--- a/git_ctpp.pptx
+++ b/git_ctpp.pptx
@@ -1,11 +1,11 @@
 
 <file path=ppt/presentation.xml><?xml version="1.0" encoding="utf-8"?>
-<p:presentation xmlns:a="http://schemas.openxmlformats.org/drawingml/2006/main" xmlns:r="http://schemas.openxmlformats.org/officeDocument/2006/relationships" xmlns:p="http://schemas.openxmlformats.org/presentationml/2006/main" saveSubsetFonts="1">
+<p:presentation xmlns:a="http://schemas.openxmlformats.org/drawingml/2006/main" xmlns:r="http://schemas.openxmlformats.org/officeDocument/2006/relationships" xmlns:p="http://schemas.openxmlformats.org/presentationml/2006/main">
   <p:sldMasterIdLst>
     <p:sldMasterId id="2147483648" r:id="rId1"/>
   </p:sldMasterIdLst>
   <p:sldIdLst>
-    <p:sldId id="256" r:id="rId2"/>
+    <p:sldId id="256" r:id="rId3"/>
   </p:sldIdLst>
   <p:sldSz cx="12192000" cy="6858000"/>
   <p:notesSz cx="6858000" cy="9144000"/>
@@ -126,13 +126,7 @@
       </p:grpSpPr>
       <p:sp>
         <p:nvSpPr>
-          <p:cNvPr id="2" name="标题 1">
-            <a:extLst>
-              <a:ext uri="{FF2B5EF4-FFF2-40B4-BE49-F238E27FC236}">
-                <a16:creationId xmlns:a16="http://schemas.microsoft.com/office/drawing/2014/main" id="{C32A9B66-6FF5-E05F-F6FB-10D86D48D339}"/>
-              </a:ext>
-            </a:extLst>
-          </p:cNvPr>
+          <p:cNvPr id="2" name="标题 1"/>
           <p:cNvSpPr>
             <a:spLocks noGrp="1"/>
           </p:cNvSpPr>
@@ -158,18 +152,13 @@
               <a:rPr lang="zh-CN" altLang="en-US"/>
               <a:t>单击此处编辑母版标题样式</a:t>
             </a:r>
+            <a:endParaRPr lang="zh-CN" altLang="en-US"/>
           </a:p>
         </p:txBody>
       </p:sp>
       <p:sp>
         <p:nvSpPr>
-          <p:cNvPr id="3" name="副标题 2">
-            <a:extLst>
-              <a:ext uri="{FF2B5EF4-FFF2-40B4-BE49-F238E27FC236}">
-                <a16:creationId xmlns:a16="http://schemas.microsoft.com/office/drawing/2014/main" id="{DD10AB2B-A70A-E7A6-32EE-6D1FC9A7ED09}"/>
-              </a:ext>
-            </a:extLst>
-          </p:cNvPr>
+          <p:cNvPr id="3" name="副标题 2"/>
           <p:cNvSpPr>
             <a:spLocks noGrp="1"/>
           </p:cNvSpPr>
@@ -228,18 +217,13 @@
               <a:rPr lang="zh-CN" altLang="en-US"/>
               <a:t>单击此处编辑母版副标题样式</a:t>
             </a:r>
+            <a:endParaRPr lang="zh-CN" altLang="en-US"/>
           </a:p>
         </p:txBody>
       </p:sp>
       <p:sp>
         <p:nvSpPr>
-          <p:cNvPr id="4" name="日期占位符 3">
-            <a:extLst>
-              <a:ext uri="{FF2B5EF4-FFF2-40B4-BE49-F238E27FC236}">
-                <a16:creationId xmlns:a16="http://schemas.microsoft.com/office/drawing/2014/main" id="{F6EA8743-3CB1-E246-49D8-0C9BD88BAD66}"/>
-              </a:ext>
-            </a:extLst>
-          </p:cNvPr>
+          <p:cNvPr id="4" name="日期占位符 3"/>
           <p:cNvSpPr>
             <a:spLocks noGrp="1"/>
           </p:cNvSpPr>
@@ -254,7 +238,6 @@
           <a:p>
             <a:fld id="{39B4D9CF-402F-4D0C-BB85-6BFADB64E4E3}" type="datetimeFigureOut">
               <a:rPr lang="zh-CN" altLang="en-US" smtClean="0"/>
-              <a:t>2026/2/20</a:t>
             </a:fld>
             <a:endParaRPr lang="zh-CN" altLang="en-US"/>
           </a:p>
@@ -262,13 +245,7 @@
       </p:sp>
       <p:sp>
         <p:nvSpPr>
-          <p:cNvPr id="5" name="页脚占位符 4">
-            <a:extLst>
-              <a:ext uri="{FF2B5EF4-FFF2-40B4-BE49-F238E27FC236}">
-                <a16:creationId xmlns:a16="http://schemas.microsoft.com/office/drawing/2014/main" id="{546D36D3-23B6-02A4-2720-B9A879D0C50A}"/>
-              </a:ext>
-            </a:extLst>
-          </p:cNvPr>
+          <p:cNvPr id="5" name="页脚占位符 4"/>
           <p:cNvSpPr>
             <a:spLocks noGrp="1"/>
           </p:cNvSpPr>
@@ -287,13 +264,7 @@
       </p:sp>
       <p:sp>
         <p:nvSpPr>
-          <p:cNvPr id="6" name="灯片编号占位符 5">
-            <a:extLst>
-              <a:ext uri="{FF2B5EF4-FFF2-40B4-BE49-F238E27FC236}">
-                <a16:creationId xmlns:a16="http://schemas.microsoft.com/office/drawing/2014/main" id="{78285271-273A-627B-29B5-056DD6875438}"/>
-              </a:ext>
-            </a:extLst>
-          </p:cNvPr>
+          <p:cNvPr id="6" name="灯片编号占位符 5"/>
           <p:cNvSpPr>
             <a:spLocks noGrp="1"/>
           </p:cNvSpPr>
@@ -308,18 +279,12 @@
           <a:p>
             <a:fld id="{938BBDAC-42F4-49B7-8829-12C07218DEA0}" type="slidenum">
               <a:rPr lang="zh-CN" altLang="en-US" smtClean="0"/>
-              <a:t>‹#›</a:t>
             </a:fld>
             <a:endParaRPr lang="zh-CN" altLang="en-US"/>
           </a:p>
         </p:txBody>
       </p:sp>
     </p:spTree>
-    <p:extLst>
-      <p:ext uri="{BB962C8B-B14F-4D97-AF65-F5344CB8AC3E}">
-        <p14:creationId xmlns:p14="http://schemas.microsoft.com/office/powerpoint/2010/main" val="2895259725"/>
-      </p:ext>
-    </p:extLst>
   </p:cSld>
   <p:clrMapOvr>
     <a:masterClrMapping/>
@@ -346,13 +311,7 @@
       </p:grpSpPr>
       <p:sp>
         <p:nvSpPr>
-          <p:cNvPr id="2" name="标题 1">
-            <a:extLst>
-              <a:ext uri="{FF2B5EF4-FFF2-40B4-BE49-F238E27FC236}">
-                <a16:creationId xmlns:a16="http://schemas.microsoft.com/office/drawing/2014/main" id="{A154EB8D-DC4D-245E-EB4E-259919EE0874}"/>
-              </a:ext>
-            </a:extLst>
-          </p:cNvPr>
+          <p:cNvPr id="2" name="标题 1"/>
           <p:cNvSpPr>
             <a:spLocks noGrp="1"/>
           </p:cNvSpPr>
@@ -369,18 +328,13 @@
               <a:rPr lang="zh-CN" altLang="en-US"/>
               <a:t>单击此处编辑母版标题样式</a:t>
             </a:r>
+            <a:endParaRPr lang="zh-CN" altLang="en-US"/>
           </a:p>
         </p:txBody>
       </p:sp>
       <p:sp>
         <p:nvSpPr>
-          <p:cNvPr id="3" name="竖排文字占位符 2">
-            <a:extLst>
-              <a:ext uri="{FF2B5EF4-FFF2-40B4-BE49-F238E27FC236}">
-                <a16:creationId xmlns:a16="http://schemas.microsoft.com/office/drawing/2014/main" id="{3C5975B4-5A0D-762B-A19E-4CEB4B1B1C3B}"/>
-              </a:ext>
-            </a:extLst>
-          </p:cNvPr>
+          <p:cNvPr id="3" name="竖排文字占位符 2"/>
           <p:cNvSpPr>
             <a:spLocks noGrp="1"/>
           </p:cNvSpPr>
@@ -398,6 +352,7 @@
               <a:rPr lang="zh-CN" altLang="en-US"/>
               <a:t>单击此处编辑母版文本样式</a:t>
             </a:r>
+            <a:endParaRPr lang="zh-CN" altLang="en-US"/>
           </a:p>
           <a:p>
             <a:pPr lvl="1"/>
@@ -405,6 +360,7 @@
               <a:rPr lang="zh-CN" altLang="en-US"/>
               <a:t>二级</a:t>
             </a:r>
+            <a:endParaRPr lang="zh-CN" altLang="en-US"/>
           </a:p>
           <a:p>
             <a:pPr lvl="2"/>
@@ -412,6 +368,7 @@
               <a:rPr lang="zh-CN" altLang="en-US"/>
               <a:t>三级</a:t>
             </a:r>
+            <a:endParaRPr lang="zh-CN" altLang="en-US"/>
           </a:p>
           <a:p>
             <a:pPr lvl="3"/>
@@ -419,6 +376,7 @@
               <a:rPr lang="zh-CN" altLang="en-US"/>
               <a:t>四级</a:t>
             </a:r>
+            <a:endParaRPr lang="zh-CN" altLang="en-US"/>
           </a:p>
           <a:p>
             <a:pPr lvl="4"/>
@@ -426,18 +384,13 @@
               <a:rPr lang="zh-CN" altLang="en-US"/>
               <a:t>五级</a:t>
             </a:r>
+            <a:endParaRPr lang="zh-CN" altLang="en-US"/>
           </a:p>
         </p:txBody>
       </p:sp>
       <p:sp>
         <p:nvSpPr>
-          <p:cNvPr id="4" name="日期占位符 3">
-            <a:extLst>
-              <a:ext uri="{FF2B5EF4-FFF2-40B4-BE49-F238E27FC236}">
-                <a16:creationId xmlns:a16="http://schemas.microsoft.com/office/drawing/2014/main" id="{7D01EBF1-4E21-2439-50E3-389DAC7C4282}"/>
-              </a:ext>
-            </a:extLst>
-          </p:cNvPr>
+          <p:cNvPr id="4" name="日期占位符 3"/>
           <p:cNvSpPr>
             <a:spLocks noGrp="1"/>
           </p:cNvSpPr>
@@ -452,7 +405,6 @@
           <a:p>
             <a:fld id="{39B4D9CF-402F-4D0C-BB85-6BFADB64E4E3}" type="datetimeFigureOut">
               <a:rPr lang="zh-CN" altLang="en-US" smtClean="0"/>
-              <a:t>2026/2/20</a:t>
             </a:fld>
             <a:endParaRPr lang="zh-CN" altLang="en-US"/>
           </a:p>
@@ -460,13 +412,7 @@
       </p:sp>
       <p:sp>
         <p:nvSpPr>
-          <p:cNvPr id="5" name="页脚占位符 4">
-            <a:extLst>
-              <a:ext uri="{FF2B5EF4-FFF2-40B4-BE49-F238E27FC236}">
-                <a16:creationId xmlns:a16="http://schemas.microsoft.com/office/drawing/2014/main" id="{634D7F9C-73EA-7698-E443-DDAD921C6F22}"/>
-              </a:ext>
-            </a:extLst>
-          </p:cNvPr>
+          <p:cNvPr id="5" name="页脚占位符 4"/>
           <p:cNvSpPr>
             <a:spLocks noGrp="1"/>
           </p:cNvSpPr>
@@ -485,13 +431,7 @@
       </p:sp>
       <p:sp>
         <p:nvSpPr>
-          <p:cNvPr id="6" name="灯片编号占位符 5">
-            <a:extLst>
-              <a:ext uri="{FF2B5EF4-FFF2-40B4-BE49-F238E27FC236}">
-                <a16:creationId xmlns:a16="http://schemas.microsoft.com/office/drawing/2014/main" id="{E2E73CCF-B539-50A8-60E2-0F492693FB3A}"/>
-              </a:ext>
-            </a:extLst>
-          </p:cNvPr>
+          <p:cNvPr id="6" name="灯片编号占位符 5"/>
           <p:cNvSpPr>
             <a:spLocks noGrp="1"/>
           </p:cNvSpPr>
@@ -506,18 +446,12 @@
           <a:p>
             <a:fld id="{938BBDAC-42F4-49B7-8829-12C07218DEA0}" type="slidenum">
               <a:rPr lang="zh-CN" altLang="en-US" smtClean="0"/>
-              <a:t>‹#›</a:t>
             </a:fld>
             <a:endParaRPr lang="zh-CN" altLang="en-US"/>
           </a:p>
         </p:txBody>
       </p:sp>
     </p:spTree>
-    <p:extLst>
-      <p:ext uri="{BB962C8B-B14F-4D97-AF65-F5344CB8AC3E}">
-        <p14:creationId xmlns:p14="http://schemas.microsoft.com/office/powerpoint/2010/main" val="2088801588"/>
-      </p:ext>
-    </p:extLst>
   </p:cSld>
   <p:clrMapOvr>
     <a:masterClrMapping/>
@@ -544,13 +478,7 @@
       </p:grpSpPr>
       <p:sp>
         <p:nvSpPr>
-          <p:cNvPr id="2" name="竖排标题 1">
-            <a:extLst>
-              <a:ext uri="{FF2B5EF4-FFF2-40B4-BE49-F238E27FC236}">
-                <a16:creationId xmlns:a16="http://schemas.microsoft.com/office/drawing/2014/main" id="{92FFCAC7-E5EC-8BE4-1459-1AE18F2D100D}"/>
-              </a:ext>
-            </a:extLst>
-          </p:cNvPr>
+          <p:cNvPr id="2" name="竖排标题 1"/>
           <p:cNvSpPr>
             <a:spLocks noGrp="1"/>
           </p:cNvSpPr>
@@ -572,18 +500,13 @@
               <a:rPr lang="zh-CN" altLang="en-US"/>
               <a:t>单击此处编辑母版标题样式</a:t>
             </a:r>
+            <a:endParaRPr lang="zh-CN" altLang="en-US"/>
           </a:p>
         </p:txBody>
       </p:sp>
       <p:sp>
         <p:nvSpPr>
-          <p:cNvPr id="3" name="竖排文字占位符 2">
-            <a:extLst>
-              <a:ext uri="{FF2B5EF4-FFF2-40B4-BE49-F238E27FC236}">
-                <a16:creationId xmlns:a16="http://schemas.microsoft.com/office/drawing/2014/main" id="{A2E045B1-EA9C-C096-9528-1872BEEBD97A}"/>
-              </a:ext>
-            </a:extLst>
-          </p:cNvPr>
+          <p:cNvPr id="3" name="竖排文字占位符 2"/>
           <p:cNvSpPr>
             <a:spLocks noGrp="1"/>
           </p:cNvSpPr>
@@ -606,6 +529,7 @@
               <a:rPr lang="zh-CN" altLang="en-US"/>
               <a:t>单击此处编辑母版文本样式</a:t>
             </a:r>
+            <a:endParaRPr lang="zh-CN" altLang="en-US"/>
           </a:p>
           <a:p>
             <a:pPr lvl="1"/>
@@ -613,6 +537,7 @@
               <a:rPr lang="zh-CN" altLang="en-US"/>
               <a:t>二级</a:t>
             </a:r>
+            <a:endParaRPr lang="zh-CN" altLang="en-US"/>
           </a:p>
           <a:p>
             <a:pPr lvl="2"/>
@@ -620,6 +545,7 @@
               <a:rPr lang="zh-CN" altLang="en-US"/>
               <a:t>三级</a:t>
             </a:r>
+            <a:endParaRPr lang="zh-CN" altLang="en-US"/>
           </a:p>
           <a:p>
             <a:pPr lvl="3"/>
@@ -627,6 +553,7 @@
               <a:rPr lang="zh-CN" altLang="en-US"/>
               <a:t>四级</a:t>
             </a:r>
+            <a:endParaRPr lang="zh-CN" altLang="en-US"/>
           </a:p>
           <a:p>
             <a:pPr lvl="4"/>
@@ -634,18 +561,13 @@
               <a:rPr lang="zh-CN" altLang="en-US"/>
               <a:t>五级</a:t>
             </a:r>
+            <a:endParaRPr lang="zh-CN" altLang="en-US"/>
           </a:p>
         </p:txBody>
       </p:sp>
       <p:sp>
         <p:nvSpPr>
-          <p:cNvPr id="4" name="日期占位符 3">
-            <a:extLst>
-              <a:ext uri="{FF2B5EF4-FFF2-40B4-BE49-F238E27FC236}">
-                <a16:creationId xmlns:a16="http://schemas.microsoft.com/office/drawing/2014/main" id="{04BDF954-16CE-17D3-2C1F-ADB57362CAE7}"/>
-              </a:ext>
-            </a:extLst>
-          </p:cNvPr>
+          <p:cNvPr id="4" name="日期占位符 3"/>
           <p:cNvSpPr>
             <a:spLocks noGrp="1"/>
           </p:cNvSpPr>
@@ -660,7 +582,6 @@
           <a:p>
             <a:fld id="{39B4D9CF-402F-4D0C-BB85-6BFADB64E4E3}" type="datetimeFigureOut">
               <a:rPr lang="zh-CN" altLang="en-US" smtClean="0"/>
-              <a:t>2026/2/20</a:t>
             </a:fld>
             <a:endParaRPr lang="zh-CN" altLang="en-US"/>
           </a:p>
@@ -668,13 +589,7 @@
       </p:sp>
       <p:sp>
         <p:nvSpPr>
-          <p:cNvPr id="5" name="页脚占位符 4">
-            <a:extLst>
-              <a:ext uri="{FF2B5EF4-FFF2-40B4-BE49-F238E27FC236}">
-                <a16:creationId xmlns:a16="http://schemas.microsoft.com/office/drawing/2014/main" id="{85820620-DEC0-CD0D-C3ED-63345CAAD5B4}"/>
-              </a:ext>
-            </a:extLst>
-          </p:cNvPr>
+          <p:cNvPr id="5" name="页脚占位符 4"/>
           <p:cNvSpPr>
             <a:spLocks noGrp="1"/>
           </p:cNvSpPr>
@@ -693,13 +608,7 @@
       </p:sp>
       <p:sp>
         <p:nvSpPr>
-          <p:cNvPr id="6" name="灯片编号占位符 5">
-            <a:extLst>
-              <a:ext uri="{FF2B5EF4-FFF2-40B4-BE49-F238E27FC236}">
-                <a16:creationId xmlns:a16="http://schemas.microsoft.com/office/drawing/2014/main" id="{80456CE1-6C42-6F52-650F-6E5B859B7D38}"/>
-              </a:ext>
-            </a:extLst>
-          </p:cNvPr>
+          <p:cNvPr id="6" name="灯片编号占位符 5"/>
           <p:cNvSpPr>
             <a:spLocks noGrp="1"/>
           </p:cNvSpPr>
@@ -714,18 +623,12 @@
           <a:p>
             <a:fld id="{938BBDAC-42F4-49B7-8829-12C07218DEA0}" type="slidenum">
               <a:rPr lang="zh-CN" altLang="en-US" smtClean="0"/>
-              <a:t>‹#›</a:t>
             </a:fld>
             <a:endParaRPr lang="zh-CN" altLang="en-US"/>
           </a:p>
         </p:txBody>
       </p:sp>
     </p:spTree>
-    <p:extLst>
-      <p:ext uri="{BB962C8B-B14F-4D97-AF65-F5344CB8AC3E}">
-        <p14:creationId xmlns:p14="http://schemas.microsoft.com/office/powerpoint/2010/main" val="1478256049"/>
-      </p:ext>
-    </p:extLst>
   </p:cSld>
   <p:clrMapOvr>
     <a:masterClrMapping/>
@@ -752,13 +655,7 @@
       </p:grpSpPr>
       <p:sp>
         <p:nvSpPr>
-          <p:cNvPr id="2" name="标题 1">
-            <a:extLst>
-              <a:ext uri="{FF2B5EF4-FFF2-40B4-BE49-F238E27FC236}">
-                <a16:creationId xmlns:a16="http://schemas.microsoft.com/office/drawing/2014/main" id="{55A30768-D86D-9D86-C15A-B051F8B961F9}"/>
-              </a:ext>
-            </a:extLst>
-          </p:cNvPr>
+          <p:cNvPr id="2" name="标题 1"/>
           <p:cNvSpPr>
             <a:spLocks noGrp="1"/>
           </p:cNvSpPr>
@@ -775,18 +672,13 @@
               <a:rPr lang="zh-CN" altLang="en-US"/>
               <a:t>单击此处编辑母版标题样式</a:t>
             </a:r>
+            <a:endParaRPr lang="zh-CN" altLang="en-US"/>
           </a:p>
         </p:txBody>
       </p:sp>
       <p:sp>
         <p:nvSpPr>
-          <p:cNvPr id="3" name="内容占位符 2">
-            <a:extLst>
-              <a:ext uri="{FF2B5EF4-FFF2-40B4-BE49-F238E27FC236}">
-                <a16:creationId xmlns:a16="http://schemas.microsoft.com/office/drawing/2014/main" id="{9A119456-F647-6AB6-D240-699C4FD7214B}"/>
-              </a:ext>
-            </a:extLst>
-          </p:cNvPr>
+          <p:cNvPr id="3" name="内容占位符 2"/>
           <p:cNvSpPr>
             <a:spLocks noGrp="1"/>
           </p:cNvSpPr>
@@ -804,6 +696,7 @@
               <a:rPr lang="zh-CN" altLang="en-US"/>
               <a:t>单击此处编辑母版文本样式</a:t>
             </a:r>
+            <a:endParaRPr lang="zh-CN" altLang="en-US"/>
           </a:p>
           <a:p>
             <a:pPr lvl="1"/>
@@ -811,6 +704,7 @@
               <a:rPr lang="zh-CN" altLang="en-US"/>
               <a:t>二级</a:t>
             </a:r>
+            <a:endParaRPr lang="zh-CN" altLang="en-US"/>
           </a:p>
           <a:p>
             <a:pPr lvl="2"/>
@@ -818,6 +712,7 @@
               <a:rPr lang="zh-CN" altLang="en-US"/>
               <a:t>三级</a:t>
             </a:r>
+            <a:endParaRPr lang="zh-CN" altLang="en-US"/>
           </a:p>
           <a:p>
             <a:pPr lvl="3"/>
@@ -825,6 +720,7 @@
               <a:rPr lang="zh-CN" altLang="en-US"/>
               <a:t>四级</a:t>
             </a:r>
+            <a:endParaRPr lang="zh-CN" altLang="en-US"/>
           </a:p>
           <a:p>
             <a:pPr lvl="4"/>
@@ -832,18 +728,13 @@
               <a:rPr lang="zh-CN" altLang="en-US"/>
               <a:t>五级</a:t>
             </a:r>
+            <a:endParaRPr lang="zh-CN" altLang="en-US"/>
           </a:p>
         </p:txBody>
       </p:sp>
       <p:sp>
         <p:nvSpPr>
-          <p:cNvPr id="4" name="日期占位符 3">
-            <a:extLst>
-              <a:ext uri="{FF2B5EF4-FFF2-40B4-BE49-F238E27FC236}">
-                <a16:creationId xmlns:a16="http://schemas.microsoft.com/office/drawing/2014/main" id="{D9773EB4-4470-214F-B6D7-7ADFFE6A4538}"/>
-              </a:ext>
-            </a:extLst>
-          </p:cNvPr>
+          <p:cNvPr id="4" name="日期占位符 3"/>
           <p:cNvSpPr>
             <a:spLocks noGrp="1"/>
           </p:cNvSpPr>
@@ -858,7 +749,6 @@
           <a:p>
             <a:fld id="{39B4D9CF-402F-4D0C-BB85-6BFADB64E4E3}" type="datetimeFigureOut">
               <a:rPr lang="zh-CN" altLang="en-US" smtClean="0"/>
-              <a:t>2026/2/20</a:t>
             </a:fld>
             <a:endParaRPr lang="zh-CN" altLang="en-US"/>
           </a:p>
@@ -866,13 +756,7 @@
       </p:sp>
       <p:sp>
         <p:nvSpPr>
-          <p:cNvPr id="5" name="页脚占位符 4">
-            <a:extLst>
-              <a:ext uri="{FF2B5EF4-FFF2-40B4-BE49-F238E27FC236}">
-                <a16:creationId xmlns:a16="http://schemas.microsoft.com/office/drawing/2014/main" id="{02518B1D-45DF-AAF3-2EBD-283C487FD696}"/>
-              </a:ext>
-            </a:extLst>
-          </p:cNvPr>
+          <p:cNvPr id="5" name="页脚占位符 4"/>
           <p:cNvSpPr>
             <a:spLocks noGrp="1"/>
           </p:cNvSpPr>
@@ -891,13 +775,7 @@
       </p:sp>
       <p:sp>
         <p:nvSpPr>
-          <p:cNvPr id="6" name="灯片编号占位符 5">
-            <a:extLst>
-              <a:ext uri="{FF2B5EF4-FFF2-40B4-BE49-F238E27FC236}">
-                <a16:creationId xmlns:a16="http://schemas.microsoft.com/office/drawing/2014/main" id="{DE39153F-CA2D-4117-96E7-E4CE417201FF}"/>
-              </a:ext>
-            </a:extLst>
-          </p:cNvPr>
+          <p:cNvPr id="6" name="灯片编号占位符 5"/>
           <p:cNvSpPr>
             <a:spLocks noGrp="1"/>
           </p:cNvSpPr>
@@ -912,18 +790,12 @@
           <a:p>
             <a:fld id="{938BBDAC-42F4-49B7-8829-12C07218DEA0}" type="slidenum">
               <a:rPr lang="zh-CN" altLang="en-US" smtClean="0"/>
-              <a:t>‹#›</a:t>
             </a:fld>
             <a:endParaRPr lang="zh-CN" altLang="en-US"/>
           </a:p>
         </p:txBody>
       </p:sp>
     </p:spTree>
-    <p:extLst>
-      <p:ext uri="{BB962C8B-B14F-4D97-AF65-F5344CB8AC3E}">
-        <p14:creationId xmlns:p14="http://schemas.microsoft.com/office/powerpoint/2010/main" val="2716750853"/>
-      </p:ext>
-    </p:extLst>
   </p:cSld>
   <p:clrMapOvr>
     <a:masterClrMapping/>
@@ -950,13 +822,7 @@
       </p:grpSpPr>
       <p:sp>
         <p:nvSpPr>
-          <p:cNvPr id="2" name="标题 1">
-            <a:extLst>
-              <a:ext uri="{FF2B5EF4-FFF2-40B4-BE49-F238E27FC236}">
-                <a16:creationId xmlns:a16="http://schemas.microsoft.com/office/drawing/2014/main" id="{86E6111C-BF34-FF4D-7E47-BABABA71B8FA}"/>
-              </a:ext>
-            </a:extLst>
-          </p:cNvPr>
+          <p:cNvPr id="2" name="标题 1"/>
           <p:cNvSpPr>
             <a:spLocks noGrp="1"/>
           </p:cNvSpPr>
@@ -982,18 +848,13 @@
               <a:rPr lang="zh-CN" altLang="en-US"/>
               <a:t>单击此处编辑母版标题样式</a:t>
             </a:r>
+            <a:endParaRPr lang="zh-CN" altLang="en-US"/>
           </a:p>
         </p:txBody>
       </p:sp>
       <p:sp>
         <p:nvSpPr>
-          <p:cNvPr id="3" name="文本占位符 2">
-            <a:extLst>
-              <a:ext uri="{FF2B5EF4-FFF2-40B4-BE49-F238E27FC236}">
-                <a16:creationId xmlns:a16="http://schemas.microsoft.com/office/drawing/2014/main" id="{EE9237FF-6211-7817-07C3-C3BECD444B67}"/>
-              </a:ext>
-            </a:extLst>
-          </p:cNvPr>
+          <p:cNvPr id="3" name="文本占位符 2"/>
           <p:cNvSpPr>
             <a:spLocks noGrp="1"/>
           </p:cNvSpPr>
@@ -1107,18 +968,13 @@
               <a:rPr lang="zh-CN" altLang="en-US"/>
               <a:t>单击此处编辑母版文本样式</a:t>
             </a:r>
+            <a:endParaRPr lang="zh-CN" altLang="en-US"/>
           </a:p>
         </p:txBody>
       </p:sp>
       <p:sp>
         <p:nvSpPr>
-          <p:cNvPr id="4" name="日期占位符 3">
-            <a:extLst>
-              <a:ext uri="{FF2B5EF4-FFF2-40B4-BE49-F238E27FC236}">
-                <a16:creationId xmlns:a16="http://schemas.microsoft.com/office/drawing/2014/main" id="{C35033F8-9D8C-345D-2E58-8DCE1EDBCE13}"/>
-              </a:ext>
-            </a:extLst>
-          </p:cNvPr>
+          <p:cNvPr id="4" name="日期占位符 3"/>
           <p:cNvSpPr>
             <a:spLocks noGrp="1"/>
           </p:cNvSpPr>
@@ -1133,7 +989,6 @@
           <a:p>
             <a:fld id="{39B4D9CF-402F-4D0C-BB85-6BFADB64E4E3}" type="datetimeFigureOut">
               <a:rPr lang="zh-CN" altLang="en-US" smtClean="0"/>
-              <a:t>2026/2/20</a:t>
             </a:fld>
             <a:endParaRPr lang="zh-CN" altLang="en-US"/>
           </a:p>
@@ -1141,13 +996,7 @@
       </p:sp>
       <p:sp>
         <p:nvSpPr>
-          <p:cNvPr id="5" name="页脚占位符 4">
-            <a:extLst>
-              <a:ext uri="{FF2B5EF4-FFF2-40B4-BE49-F238E27FC236}">
-                <a16:creationId xmlns:a16="http://schemas.microsoft.com/office/drawing/2014/main" id="{E852F962-56FD-3DB5-D635-26353CD15789}"/>
-              </a:ext>
-            </a:extLst>
-          </p:cNvPr>
+          <p:cNvPr id="5" name="页脚占位符 4"/>
           <p:cNvSpPr>
             <a:spLocks noGrp="1"/>
           </p:cNvSpPr>
@@ -1166,13 +1015,7 @@
       </p:sp>
       <p:sp>
         <p:nvSpPr>
-          <p:cNvPr id="6" name="灯片编号占位符 5">
-            <a:extLst>
-              <a:ext uri="{FF2B5EF4-FFF2-40B4-BE49-F238E27FC236}">
-                <a16:creationId xmlns:a16="http://schemas.microsoft.com/office/drawing/2014/main" id="{39810D49-24BC-78D7-32F9-4357AB1D0EBF}"/>
-              </a:ext>
-            </a:extLst>
-          </p:cNvPr>
+          <p:cNvPr id="6" name="灯片编号占位符 5"/>
           <p:cNvSpPr>
             <a:spLocks noGrp="1"/>
           </p:cNvSpPr>
@@ -1187,18 +1030,12 @@
           <a:p>
             <a:fld id="{938BBDAC-42F4-49B7-8829-12C07218DEA0}" type="slidenum">
               <a:rPr lang="zh-CN" altLang="en-US" smtClean="0"/>
-              <a:t>‹#›</a:t>
             </a:fld>
             <a:endParaRPr lang="zh-CN" altLang="en-US"/>
           </a:p>
         </p:txBody>
       </p:sp>
     </p:spTree>
-    <p:extLst>
-      <p:ext uri="{BB962C8B-B14F-4D97-AF65-F5344CB8AC3E}">
-        <p14:creationId xmlns:p14="http://schemas.microsoft.com/office/powerpoint/2010/main" val="550874153"/>
-      </p:ext>
-    </p:extLst>
   </p:cSld>
   <p:clrMapOvr>
     <a:masterClrMapping/>
@@ -1225,13 +1062,7 @@
       </p:grpSpPr>
       <p:sp>
         <p:nvSpPr>
-          <p:cNvPr id="2" name="标题 1">
-            <a:extLst>
-              <a:ext uri="{FF2B5EF4-FFF2-40B4-BE49-F238E27FC236}">
-                <a16:creationId xmlns:a16="http://schemas.microsoft.com/office/drawing/2014/main" id="{E0CF8FFB-AEFA-428F-D4FF-1A895801E5B4}"/>
-              </a:ext>
-            </a:extLst>
-          </p:cNvPr>
+          <p:cNvPr id="2" name="标题 1"/>
           <p:cNvSpPr>
             <a:spLocks noGrp="1"/>
           </p:cNvSpPr>
@@ -1248,18 +1079,13 @@
               <a:rPr lang="zh-CN" altLang="en-US"/>
               <a:t>单击此处编辑母版标题样式</a:t>
             </a:r>
+            <a:endParaRPr lang="zh-CN" altLang="en-US"/>
           </a:p>
         </p:txBody>
       </p:sp>
       <p:sp>
         <p:nvSpPr>
-          <p:cNvPr id="3" name="内容占位符 2">
-            <a:extLst>
-              <a:ext uri="{FF2B5EF4-FFF2-40B4-BE49-F238E27FC236}">
-                <a16:creationId xmlns:a16="http://schemas.microsoft.com/office/drawing/2014/main" id="{F1F65DE1-63B1-985E-894E-79827A257A1A}"/>
-              </a:ext>
-            </a:extLst>
-          </p:cNvPr>
+          <p:cNvPr id="3" name="内容占位符 2"/>
           <p:cNvSpPr>
             <a:spLocks noGrp="1"/>
           </p:cNvSpPr>
@@ -1282,6 +1108,7 @@
               <a:rPr lang="zh-CN" altLang="en-US"/>
               <a:t>单击此处编辑母版文本样式</a:t>
             </a:r>
+            <a:endParaRPr lang="zh-CN" altLang="en-US"/>
           </a:p>
           <a:p>
             <a:pPr lvl="1"/>
@@ -1289,6 +1116,7 @@
               <a:rPr lang="zh-CN" altLang="en-US"/>
               <a:t>二级</a:t>
             </a:r>
+            <a:endParaRPr lang="zh-CN" altLang="en-US"/>
           </a:p>
           <a:p>
             <a:pPr lvl="2"/>
@@ -1296,6 +1124,7 @@
               <a:rPr lang="zh-CN" altLang="en-US"/>
               <a:t>三级</a:t>
             </a:r>
+            <a:endParaRPr lang="zh-CN" altLang="en-US"/>
           </a:p>
           <a:p>
             <a:pPr lvl="3"/>
@@ -1303,6 +1132,7 @@
               <a:rPr lang="zh-CN" altLang="en-US"/>
               <a:t>四级</a:t>
             </a:r>
+            <a:endParaRPr lang="zh-CN" altLang="en-US"/>
           </a:p>
           <a:p>
             <a:pPr lvl="4"/>
@@ -1310,18 +1140,13 @@
               <a:rPr lang="zh-CN" altLang="en-US"/>
               <a:t>五级</a:t>
             </a:r>
+            <a:endParaRPr lang="zh-CN" altLang="en-US"/>
           </a:p>
         </p:txBody>
       </p:sp>
       <p:sp>
         <p:nvSpPr>
-          <p:cNvPr id="4" name="内容占位符 3">
-            <a:extLst>
-              <a:ext uri="{FF2B5EF4-FFF2-40B4-BE49-F238E27FC236}">
-                <a16:creationId xmlns:a16="http://schemas.microsoft.com/office/drawing/2014/main" id="{71F5837F-30E5-CDB3-F216-48BF1071C6F5}"/>
-              </a:ext>
-            </a:extLst>
-          </p:cNvPr>
+          <p:cNvPr id="4" name="内容占位符 3"/>
           <p:cNvSpPr>
             <a:spLocks noGrp="1"/>
           </p:cNvSpPr>
@@ -1344,6 +1169,7 @@
               <a:rPr lang="zh-CN" altLang="en-US"/>
               <a:t>单击此处编辑母版文本样式</a:t>
             </a:r>
+            <a:endParaRPr lang="zh-CN" altLang="en-US"/>
           </a:p>
           <a:p>
             <a:pPr lvl="1"/>
@@ -1351,6 +1177,7 @@
               <a:rPr lang="zh-CN" altLang="en-US"/>
               <a:t>二级</a:t>
             </a:r>
+            <a:endParaRPr lang="zh-CN" altLang="en-US"/>
           </a:p>
           <a:p>
             <a:pPr lvl="2"/>
@@ -1358,6 +1185,7 @@
               <a:rPr lang="zh-CN" altLang="en-US"/>
               <a:t>三级</a:t>
             </a:r>
+            <a:endParaRPr lang="zh-CN" altLang="en-US"/>
           </a:p>
           <a:p>
             <a:pPr lvl="3"/>
@@ -1365,6 +1193,7 @@
               <a:rPr lang="zh-CN" altLang="en-US"/>
               <a:t>四级</a:t>
             </a:r>
+            <a:endParaRPr lang="zh-CN" altLang="en-US"/>
           </a:p>
           <a:p>
             <a:pPr lvl="4"/>
@@ -1372,18 +1201,13 @@
               <a:rPr lang="zh-CN" altLang="en-US"/>
               <a:t>五级</a:t>
             </a:r>
+            <a:endParaRPr lang="zh-CN" altLang="en-US"/>
           </a:p>
         </p:txBody>
       </p:sp>
       <p:sp>
         <p:nvSpPr>
-          <p:cNvPr id="5" name="日期占位符 4">
-            <a:extLst>
-              <a:ext uri="{FF2B5EF4-FFF2-40B4-BE49-F238E27FC236}">
-                <a16:creationId xmlns:a16="http://schemas.microsoft.com/office/drawing/2014/main" id="{7B1E5588-36A4-8027-723E-8FDFA530A74A}"/>
-              </a:ext>
-            </a:extLst>
-          </p:cNvPr>
+          <p:cNvPr id="5" name="日期占位符 4"/>
           <p:cNvSpPr>
             <a:spLocks noGrp="1"/>
           </p:cNvSpPr>
@@ -1398,7 +1222,6 @@
           <a:p>
             <a:fld id="{39B4D9CF-402F-4D0C-BB85-6BFADB64E4E3}" type="datetimeFigureOut">
               <a:rPr lang="zh-CN" altLang="en-US" smtClean="0"/>
-              <a:t>2026/2/20</a:t>
             </a:fld>
             <a:endParaRPr lang="zh-CN" altLang="en-US"/>
           </a:p>
@@ -1406,13 +1229,7 @@
       </p:sp>
       <p:sp>
         <p:nvSpPr>
-          <p:cNvPr id="6" name="页脚占位符 5">
-            <a:extLst>
-              <a:ext uri="{FF2B5EF4-FFF2-40B4-BE49-F238E27FC236}">
-                <a16:creationId xmlns:a16="http://schemas.microsoft.com/office/drawing/2014/main" id="{88468AFF-CAA2-44C6-B68E-128D215B0413}"/>
-              </a:ext>
-            </a:extLst>
-          </p:cNvPr>
+          <p:cNvPr id="6" name="页脚占位符 5"/>
           <p:cNvSpPr>
             <a:spLocks noGrp="1"/>
           </p:cNvSpPr>
@@ -1431,13 +1248,7 @@
       </p:sp>
       <p:sp>
         <p:nvSpPr>
-          <p:cNvPr id="7" name="灯片编号占位符 6">
-            <a:extLst>
-              <a:ext uri="{FF2B5EF4-FFF2-40B4-BE49-F238E27FC236}">
-                <a16:creationId xmlns:a16="http://schemas.microsoft.com/office/drawing/2014/main" id="{BB3803F1-DCA3-E4E6-CE1C-D038F4FCE566}"/>
-              </a:ext>
-            </a:extLst>
-          </p:cNvPr>
+          <p:cNvPr id="7" name="灯片编号占位符 6"/>
           <p:cNvSpPr>
             <a:spLocks noGrp="1"/>
           </p:cNvSpPr>
@@ -1452,18 +1263,12 @@
           <a:p>
             <a:fld id="{938BBDAC-42F4-49B7-8829-12C07218DEA0}" type="slidenum">
               <a:rPr lang="zh-CN" altLang="en-US" smtClean="0"/>
-              <a:t>‹#›</a:t>
             </a:fld>
             <a:endParaRPr lang="zh-CN" altLang="en-US"/>
           </a:p>
         </p:txBody>
       </p:sp>
     </p:spTree>
-    <p:extLst>
-      <p:ext uri="{BB962C8B-B14F-4D97-AF65-F5344CB8AC3E}">
-        <p14:creationId xmlns:p14="http://schemas.microsoft.com/office/powerpoint/2010/main" val="3088096197"/>
-      </p:ext>
-    </p:extLst>
   </p:cSld>
   <p:clrMapOvr>
     <a:masterClrMapping/>
@@ -1490,13 +1295,7 @@
       </p:grpSpPr>
       <p:sp>
         <p:nvSpPr>
-          <p:cNvPr id="2" name="标题 1">
-            <a:extLst>
-              <a:ext uri="{FF2B5EF4-FFF2-40B4-BE49-F238E27FC236}">
-                <a16:creationId xmlns:a16="http://schemas.microsoft.com/office/drawing/2014/main" id="{1DA3F605-E3D4-8736-1CA3-8C0AE7906930}"/>
-              </a:ext>
-            </a:extLst>
-          </p:cNvPr>
+          <p:cNvPr id="2" name="标题 1"/>
           <p:cNvSpPr>
             <a:spLocks noGrp="1"/>
           </p:cNvSpPr>
@@ -1518,18 +1317,13 @@
               <a:rPr lang="zh-CN" altLang="en-US"/>
               <a:t>单击此处编辑母版标题样式</a:t>
             </a:r>
+            <a:endParaRPr lang="zh-CN" altLang="en-US"/>
           </a:p>
         </p:txBody>
       </p:sp>
       <p:sp>
         <p:nvSpPr>
-          <p:cNvPr id="3" name="文本占位符 2">
-            <a:extLst>
-              <a:ext uri="{FF2B5EF4-FFF2-40B4-BE49-F238E27FC236}">
-                <a16:creationId xmlns:a16="http://schemas.microsoft.com/office/drawing/2014/main" id="{1108FE34-C265-C74A-358C-029CBD5D7F43}"/>
-              </a:ext>
-            </a:extLst>
-          </p:cNvPr>
+          <p:cNvPr id="3" name="文本占位符 2"/>
           <p:cNvSpPr>
             <a:spLocks noGrp="1"/>
           </p:cNvSpPr>
@@ -1589,18 +1383,13 @@
               <a:rPr lang="zh-CN" altLang="en-US"/>
               <a:t>单击此处编辑母版文本样式</a:t>
             </a:r>
+            <a:endParaRPr lang="zh-CN" altLang="en-US"/>
           </a:p>
         </p:txBody>
       </p:sp>
       <p:sp>
         <p:nvSpPr>
-          <p:cNvPr id="4" name="内容占位符 3">
-            <a:extLst>
-              <a:ext uri="{FF2B5EF4-FFF2-40B4-BE49-F238E27FC236}">
-                <a16:creationId xmlns:a16="http://schemas.microsoft.com/office/drawing/2014/main" id="{46983B4E-3956-95A1-116E-5E0F80D81A3D}"/>
-              </a:ext>
-            </a:extLst>
-          </p:cNvPr>
+          <p:cNvPr id="4" name="内容占位符 3"/>
           <p:cNvSpPr>
             <a:spLocks noGrp="1"/>
           </p:cNvSpPr>
@@ -1623,6 +1412,7 @@
               <a:rPr lang="zh-CN" altLang="en-US"/>
               <a:t>单击此处编辑母版文本样式</a:t>
             </a:r>
+            <a:endParaRPr lang="zh-CN" altLang="en-US"/>
           </a:p>
           <a:p>
             <a:pPr lvl="1"/>
@@ -1630,6 +1420,7 @@
               <a:rPr lang="zh-CN" altLang="en-US"/>
               <a:t>二级</a:t>
             </a:r>
+            <a:endParaRPr lang="zh-CN" altLang="en-US"/>
           </a:p>
           <a:p>
             <a:pPr lvl="2"/>
@@ -1637,6 +1428,7 @@
               <a:rPr lang="zh-CN" altLang="en-US"/>
               <a:t>三级</a:t>
             </a:r>
+            <a:endParaRPr lang="zh-CN" altLang="en-US"/>
           </a:p>
           <a:p>
             <a:pPr lvl="3"/>
@@ -1644,6 +1436,7 @@
               <a:rPr lang="zh-CN" altLang="en-US"/>
               <a:t>四级</a:t>
             </a:r>
+            <a:endParaRPr lang="zh-CN" altLang="en-US"/>
           </a:p>
           <a:p>
             <a:pPr lvl="4"/>
@@ -1651,18 +1444,13 @@
               <a:rPr lang="zh-CN" altLang="en-US"/>
               <a:t>五级</a:t>
             </a:r>
+            <a:endParaRPr lang="zh-CN" altLang="en-US"/>
           </a:p>
         </p:txBody>
       </p:sp>
       <p:sp>
         <p:nvSpPr>
-          <p:cNvPr id="5" name="文本占位符 4">
-            <a:extLst>
-              <a:ext uri="{FF2B5EF4-FFF2-40B4-BE49-F238E27FC236}">
-                <a16:creationId xmlns:a16="http://schemas.microsoft.com/office/drawing/2014/main" id="{81737796-30BE-CF35-CC88-7841A959234F}"/>
-              </a:ext>
-            </a:extLst>
-          </p:cNvPr>
+          <p:cNvPr id="5" name="文本占位符 4"/>
           <p:cNvSpPr>
             <a:spLocks noGrp="1"/>
           </p:cNvSpPr>
@@ -1722,18 +1510,13 @@
               <a:rPr lang="zh-CN" altLang="en-US"/>
               <a:t>单击此处编辑母版文本样式</a:t>
             </a:r>
+            <a:endParaRPr lang="zh-CN" altLang="en-US"/>
           </a:p>
         </p:txBody>
       </p:sp>
       <p:sp>
         <p:nvSpPr>
-          <p:cNvPr id="6" name="内容占位符 5">
-            <a:extLst>
-              <a:ext uri="{FF2B5EF4-FFF2-40B4-BE49-F238E27FC236}">
-                <a16:creationId xmlns:a16="http://schemas.microsoft.com/office/drawing/2014/main" id="{D790C023-3C90-9F56-C534-880AF592A45D}"/>
-              </a:ext>
-            </a:extLst>
-          </p:cNvPr>
+          <p:cNvPr id="6" name="内容占位符 5"/>
           <p:cNvSpPr>
             <a:spLocks noGrp="1"/>
           </p:cNvSpPr>
@@ -1756,6 +1539,7 @@
               <a:rPr lang="zh-CN" altLang="en-US"/>
               <a:t>单击此处编辑母版文本样式</a:t>
             </a:r>
+            <a:endParaRPr lang="zh-CN" altLang="en-US"/>
           </a:p>
           <a:p>
             <a:pPr lvl="1"/>
@@ -1763,6 +1547,7 @@
               <a:rPr lang="zh-CN" altLang="en-US"/>
               <a:t>二级</a:t>
             </a:r>
+            <a:endParaRPr lang="zh-CN" altLang="en-US"/>
           </a:p>
           <a:p>
             <a:pPr lvl="2"/>
@@ -1770,6 +1555,7 @@
               <a:rPr lang="zh-CN" altLang="en-US"/>
               <a:t>三级</a:t>
             </a:r>
+            <a:endParaRPr lang="zh-CN" altLang="en-US"/>
           </a:p>
           <a:p>
             <a:pPr lvl="3"/>
@@ -1777,6 +1563,7 @@
               <a:rPr lang="zh-CN" altLang="en-US"/>
               <a:t>四级</a:t>
             </a:r>
+            <a:endParaRPr lang="zh-CN" altLang="en-US"/>
           </a:p>
           <a:p>
             <a:pPr lvl="4"/>
@@ -1784,18 +1571,13 @@
               <a:rPr lang="zh-CN" altLang="en-US"/>
               <a:t>五级</a:t>
             </a:r>
+            <a:endParaRPr lang="zh-CN" altLang="en-US"/>
           </a:p>
         </p:txBody>
       </p:sp>
       <p:sp>
         <p:nvSpPr>
-          <p:cNvPr id="7" name="日期占位符 6">
-            <a:extLst>
-              <a:ext uri="{FF2B5EF4-FFF2-40B4-BE49-F238E27FC236}">
-                <a16:creationId xmlns:a16="http://schemas.microsoft.com/office/drawing/2014/main" id="{D2F9C9B0-F674-D1D1-217B-E96ADBECA58B}"/>
-              </a:ext>
-            </a:extLst>
-          </p:cNvPr>
+          <p:cNvPr id="7" name="日期占位符 6"/>
           <p:cNvSpPr>
             <a:spLocks noGrp="1"/>
           </p:cNvSpPr>
@@ -1810,7 +1592,6 @@
           <a:p>
             <a:fld id="{39B4D9CF-402F-4D0C-BB85-6BFADB64E4E3}" type="datetimeFigureOut">
               <a:rPr lang="zh-CN" altLang="en-US" smtClean="0"/>
-              <a:t>2026/2/20</a:t>
             </a:fld>
             <a:endParaRPr lang="zh-CN" altLang="en-US"/>
           </a:p>
@@ -1818,13 +1599,7 @@
       </p:sp>
       <p:sp>
         <p:nvSpPr>
-          <p:cNvPr id="8" name="页脚占位符 7">
-            <a:extLst>
-              <a:ext uri="{FF2B5EF4-FFF2-40B4-BE49-F238E27FC236}">
-                <a16:creationId xmlns:a16="http://schemas.microsoft.com/office/drawing/2014/main" id="{D7081A4A-86F7-9915-B775-19971A3FFB3D}"/>
-              </a:ext>
-            </a:extLst>
-          </p:cNvPr>
+          <p:cNvPr id="8" name="页脚占位符 7"/>
           <p:cNvSpPr>
             <a:spLocks noGrp="1"/>
           </p:cNvSpPr>
@@ -1843,13 +1618,7 @@
       </p:sp>
       <p:sp>
         <p:nvSpPr>
-          <p:cNvPr id="9" name="灯片编号占位符 8">
-            <a:extLst>
-              <a:ext uri="{FF2B5EF4-FFF2-40B4-BE49-F238E27FC236}">
-                <a16:creationId xmlns:a16="http://schemas.microsoft.com/office/drawing/2014/main" id="{0C43CC1D-035F-CE8E-A47F-43509ACAE280}"/>
-              </a:ext>
-            </a:extLst>
-          </p:cNvPr>
+          <p:cNvPr id="9" name="灯片编号占位符 8"/>
           <p:cNvSpPr>
             <a:spLocks noGrp="1"/>
           </p:cNvSpPr>
@@ -1864,18 +1633,12 @@
           <a:p>
             <a:fld id="{938BBDAC-42F4-49B7-8829-12C07218DEA0}" type="slidenum">
               <a:rPr lang="zh-CN" altLang="en-US" smtClean="0"/>
-              <a:t>‹#›</a:t>
             </a:fld>
             <a:endParaRPr lang="zh-CN" altLang="en-US"/>
           </a:p>
         </p:txBody>
       </p:sp>
     </p:spTree>
-    <p:extLst>
-      <p:ext uri="{BB962C8B-B14F-4D97-AF65-F5344CB8AC3E}">
-        <p14:creationId xmlns:p14="http://schemas.microsoft.com/office/powerpoint/2010/main" val="4283625916"/>
-      </p:ext>
-    </p:extLst>
   </p:cSld>
   <p:clrMapOvr>
     <a:masterClrMapping/>
@@ -1902,13 +1665,7 @@
       </p:grpSpPr>
       <p:sp>
         <p:nvSpPr>
-          <p:cNvPr id="2" name="标题 1">
-            <a:extLst>
-              <a:ext uri="{FF2B5EF4-FFF2-40B4-BE49-F238E27FC236}">
-                <a16:creationId xmlns:a16="http://schemas.microsoft.com/office/drawing/2014/main" id="{6DBBD760-4703-F6D5-6845-702CFB2461BF}"/>
-              </a:ext>
-            </a:extLst>
-          </p:cNvPr>
+          <p:cNvPr id="2" name="标题 1"/>
           <p:cNvSpPr>
             <a:spLocks noGrp="1"/>
           </p:cNvSpPr>
@@ -1925,18 +1682,13 @@
               <a:rPr lang="zh-CN" altLang="en-US"/>
               <a:t>单击此处编辑母版标题样式</a:t>
             </a:r>
+            <a:endParaRPr lang="zh-CN" altLang="en-US"/>
           </a:p>
         </p:txBody>
       </p:sp>
       <p:sp>
         <p:nvSpPr>
-          <p:cNvPr id="3" name="日期占位符 2">
-            <a:extLst>
-              <a:ext uri="{FF2B5EF4-FFF2-40B4-BE49-F238E27FC236}">
-                <a16:creationId xmlns:a16="http://schemas.microsoft.com/office/drawing/2014/main" id="{9B251409-7872-D5CF-9898-CDD63FE3A5F9}"/>
-              </a:ext>
-            </a:extLst>
-          </p:cNvPr>
+          <p:cNvPr id="3" name="日期占位符 2"/>
           <p:cNvSpPr>
             <a:spLocks noGrp="1"/>
           </p:cNvSpPr>
@@ -1951,7 +1703,6 @@
           <a:p>
             <a:fld id="{39B4D9CF-402F-4D0C-BB85-6BFADB64E4E3}" type="datetimeFigureOut">
               <a:rPr lang="zh-CN" altLang="en-US" smtClean="0"/>
-              <a:t>2026/2/20</a:t>
             </a:fld>
             <a:endParaRPr lang="zh-CN" altLang="en-US"/>
           </a:p>
@@ -1959,13 +1710,7 @@
       </p:sp>
       <p:sp>
         <p:nvSpPr>
-          <p:cNvPr id="4" name="页脚占位符 3">
-            <a:extLst>
-              <a:ext uri="{FF2B5EF4-FFF2-40B4-BE49-F238E27FC236}">
-                <a16:creationId xmlns:a16="http://schemas.microsoft.com/office/drawing/2014/main" id="{E75AF568-D90A-DCE5-735F-C6F0F793AE50}"/>
-              </a:ext>
-            </a:extLst>
-          </p:cNvPr>
+          <p:cNvPr id="4" name="页脚占位符 3"/>
           <p:cNvSpPr>
             <a:spLocks noGrp="1"/>
           </p:cNvSpPr>
@@ -1984,13 +1729,7 @@
       </p:sp>
       <p:sp>
         <p:nvSpPr>
-          <p:cNvPr id="5" name="灯片编号占位符 4">
-            <a:extLst>
-              <a:ext uri="{FF2B5EF4-FFF2-40B4-BE49-F238E27FC236}">
-                <a16:creationId xmlns:a16="http://schemas.microsoft.com/office/drawing/2014/main" id="{18C2143D-59B7-4517-0ECB-8A4E09F91B6C}"/>
-              </a:ext>
-            </a:extLst>
-          </p:cNvPr>
+          <p:cNvPr id="5" name="灯片编号占位符 4"/>
           <p:cNvSpPr>
             <a:spLocks noGrp="1"/>
           </p:cNvSpPr>
@@ -2005,18 +1744,12 @@
           <a:p>
             <a:fld id="{938BBDAC-42F4-49B7-8829-12C07218DEA0}" type="slidenum">
               <a:rPr lang="zh-CN" altLang="en-US" smtClean="0"/>
-              <a:t>‹#›</a:t>
             </a:fld>
             <a:endParaRPr lang="zh-CN" altLang="en-US"/>
           </a:p>
         </p:txBody>
       </p:sp>
     </p:spTree>
-    <p:extLst>
-      <p:ext uri="{BB962C8B-B14F-4D97-AF65-F5344CB8AC3E}">
-        <p14:creationId xmlns:p14="http://schemas.microsoft.com/office/powerpoint/2010/main" val="2027140685"/>
-      </p:ext>
-    </p:extLst>
   </p:cSld>
   <p:clrMapOvr>
     <a:masterClrMapping/>
@@ -2043,13 +1776,7 @@
       </p:grpSpPr>
       <p:sp>
         <p:nvSpPr>
-          <p:cNvPr id="2" name="日期占位符 1">
-            <a:extLst>
-              <a:ext uri="{FF2B5EF4-FFF2-40B4-BE49-F238E27FC236}">
-                <a16:creationId xmlns:a16="http://schemas.microsoft.com/office/drawing/2014/main" id="{A4167EB2-1380-1160-C08F-80C1C63E7A10}"/>
-              </a:ext>
-            </a:extLst>
-          </p:cNvPr>
+          <p:cNvPr id="2" name="日期占位符 1"/>
           <p:cNvSpPr>
             <a:spLocks noGrp="1"/>
           </p:cNvSpPr>
@@ -2064,7 +1791,6 @@
           <a:p>
             <a:fld id="{39B4D9CF-402F-4D0C-BB85-6BFADB64E4E3}" type="datetimeFigureOut">
               <a:rPr lang="zh-CN" altLang="en-US" smtClean="0"/>
-              <a:t>2026/2/20</a:t>
             </a:fld>
             <a:endParaRPr lang="zh-CN" altLang="en-US"/>
           </a:p>
@@ -2072,13 +1798,7 @@
       </p:sp>
       <p:sp>
         <p:nvSpPr>
-          <p:cNvPr id="3" name="页脚占位符 2">
-            <a:extLst>
-              <a:ext uri="{FF2B5EF4-FFF2-40B4-BE49-F238E27FC236}">
-                <a16:creationId xmlns:a16="http://schemas.microsoft.com/office/drawing/2014/main" id="{84CD16D9-A37C-7DE9-EC71-C1A22573C8C8}"/>
-              </a:ext>
-            </a:extLst>
-          </p:cNvPr>
+          <p:cNvPr id="3" name="页脚占位符 2"/>
           <p:cNvSpPr>
             <a:spLocks noGrp="1"/>
           </p:cNvSpPr>
@@ -2097,13 +1817,7 @@
       </p:sp>
       <p:sp>
         <p:nvSpPr>
-          <p:cNvPr id="4" name="灯片编号占位符 3">
-            <a:extLst>
-              <a:ext uri="{FF2B5EF4-FFF2-40B4-BE49-F238E27FC236}">
-                <a16:creationId xmlns:a16="http://schemas.microsoft.com/office/drawing/2014/main" id="{EB2C8CD9-CF36-D9EE-21CB-3BF0FACEFFFA}"/>
-              </a:ext>
-            </a:extLst>
-          </p:cNvPr>
+          <p:cNvPr id="4" name="灯片编号占位符 3"/>
           <p:cNvSpPr>
             <a:spLocks noGrp="1"/>
           </p:cNvSpPr>
@@ -2118,18 +1832,12 @@
           <a:p>
             <a:fld id="{938BBDAC-42F4-49B7-8829-12C07218DEA0}" type="slidenum">
               <a:rPr lang="zh-CN" altLang="en-US" smtClean="0"/>
-              <a:t>‹#›</a:t>
             </a:fld>
             <a:endParaRPr lang="zh-CN" altLang="en-US"/>
           </a:p>
         </p:txBody>
       </p:sp>
     </p:spTree>
-    <p:extLst>
-      <p:ext uri="{BB962C8B-B14F-4D97-AF65-F5344CB8AC3E}">
-        <p14:creationId xmlns:p14="http://schemas.microsoft.com/office/powerpoint/2010/main" val="1154672823"/>
-      </p:ext>
-    </p:extLst>
   </p:cSld>
   <p:clrMapOvr>
     <a:masterClrMapping/>
@@ -2156,13 +1864,7 @@
       </p:grpSpPr>
       <p:sp>
         <p:nvSpPr>
-          <p:cNvPr id="2" name="标题 1">
-            <a:extLst>
-              <a:ext uri="{FF2B5EF4-FFF2-40B4-BE49-F238E27FC236}">
-                <a16:creationId xmlns:a16="http://schemas.microsoft.com/office/drawing/2014/main" id="{5B3482D2-9E6A-0947-4D42-BF86961AA17B}"/>
-              </a:ext>
-            </a:extLst>
-          </p:cNvPr>
+          <p:cNvPr id="2" name="标题 1"/>
           <p:cNvSpPr>
             <a:spLocks noGrp="1"/>
           </p:cNvSpPr>
@@ -2188,18 +1890,13 @@
               <a:rPr lang="zh-CN" altLang="en-US"/>
               <a:t>单击此处编辑母版标题样式</a:t>
             </a:r>
+            <a:endParaRPr lang="zh-CN" altLang="en-US"/>
           </a:p>
         </p:txBody>
       </p:sp>
       <p:sp>
         <p:nvSpPr>
-          <p:cNvPr id="3" name="内容占位符 2">
-            <a:extLst>
-              <a:ext uri="{FF2B5EF4-FFF2-40B4-BE49-F238E27FC236}">
-                <a16:creationId xmlns:a16="http://schemas.microsoft.com/office/drawing/2014/main" id="{0377DC39-EF39-CD03-861F-4F116976D232}"/>
-              </a:ext>
-            </a:extLst>
-          </p:cNvPr>
+          <p:cNvPr id="3" name="内容占位符 2"/>
           <p:cNvSpPr>
             <a:spLocks noGrp="1"/>
           </p:cNvSpPr>
@@ -2250,6 +1947,7 @@
               <a:rPr lang="zh-CN" altLang="en-US"/>
               <a:t>单击此处编辑母版文本样式</a:t>
             </a:r>
+            <a:endParaRPr lang="zh-CN" altLang="en-US"/>
           </a:p>
           <a:p>
             <a:pPr lvl="1"/>
@@ -2257,6 +1955,7 @@
               <a:rPr lang="zh-CN" altLang="en-US"/>
               <a:t>二级</a:t>
             </a:r>
+            <a:endParaRPr lang="zh-CN" altLang="en-US"/>
           </a:p>
           <a:p>
             <a:pPr lvl="2"/>
@@ -2264,6 +1963,7 @@
               <a:rPr lang="zh-CN" altLang="en-US"/>
               <a:t>三级</a:t>
             </a:r>
+            <a:endParaRPr lang="zh-CN" altLang="en-US"/>
           </a:p>
           <a:p>
             <a:pPr lvl="3"/>
@@ -2271,6 +1971,7 @@
               <a:rPr lang="zh-CN" altLang="en-US"/>
               <a:t>四级</a:t>
             </a:r>
+            <a:endParaRPr lang="zh-CN" altLang="en-US"/>
           </a:p>
           <a:p>
             <a:pPr lvl="4"/>
@@ -2278,18 +1979,13 @@
               <a:rPr lang="zh-CN" altLang="en-US"/>
               <a:t>五级</a:t>
             </a:r>
+            <a:endParaRPr lang="zh-CN" altLang="en-US"/>
           </a:p>
         </p:txBody>
       </p:sp>
       <p:sp>
         <p:nvSpPr>
-          <p:cNvPr id="4" name="文本占位符 3">
-            <a:extLst>
-              <a:ext uri="{FF2B5EF4-FFF2-40B4-BE49-F238E27FC236}">
-                <a16:creationId xmlns:a16="http://schemas.microsoft.com/office/drawing/2014/main" id="{B2AFF4D1-B5BD-7707-B6AB-8C3EE3E06844}"/>
-              </a:ext>
-            </a:extLst>
-          </p:cNvPr>
+          <p:cNvPr id="4" name="文本占位符 3"/>
           <p:cNvSpPr>
             <a:spLocks noGrp="1"/>
           </p:cNvSpPr>
@@ -2349,18 +2045,13 @@
               <a:rPr lang="zh-CN" altLang="en-US"/>
               <a:t>单击此处编辑母版文本样式</a:t>
             </a:r>
+            <a:endParaRPr lang="zh-CN" altLang="en-US"/>
           </a:p>
         </p:txBody>
       </p:sp>
       <p:sp>
         <p:nvSpPr>
-          <p:cNvPr id="5" name="日期占位符 4">
-            <a:extLst>
-              <a:ext uri="{FF2B5EF4-FFF2-40B4-BE49-F238E27FC236}">
-                <a16:creationId xmlns:a16="http://schemas.microsoft.com/office/drawing/2014/main" id="{6ACC8DFE-7309-8B65-44BF-0865FE2F2F6C}"/>
-              </a:ext>
-            </a:extLst>
-          </p:cNvPr>
+          <p:cNvPr id="5" name="日期占位符 4"/>
           <p:cNvSpPr>
             <a:spLocks noGrp="1"/>
           </p:cNvSpPr>
@@ -2375,7 +2066,6 @@
           <a:p>
             <a:fld id="{39B4D9CF-402F-4D0C-BB85-6BFADB64E4E3}" type="datetimeFigureOut">
               <a:rPr lang="zh-CN" altLang="en-US" smtClean="0"/>
-              <a:t>2026/2/20</a:t>
             </a:fld>
             <a:endParaRPr lang="zh-CN" altLang="en-US"/>
           </a:p>
@@ -2383,13 +2073,7 @@
       </p:sp>
       <p:sp>
         <p:nvSpPr>
-          <p:cNvPr id="6" name="页脚占位符 5">
-            <a:extLst>
-              <a:ext uri="{FF2B5EF4-FFF2-40B4-BE49-F238E27FC236}">
-                <a16:creationId xmlns:a16="http://schemas.microsoft.com/office/drawing/2014/main" id="{19CA2326-9922-DE59-424B-EAB1179BA2E8}"/>
-              </a:ext>
-            </a:extLst>
-          </p:cNvPr>
+          <p:cNvPr id="6" name="页脚占位符 5"/>
           <p:cNvSpPr>
             <a:spLocks noGrp="1"/>
           </p:cNvSpPr>
@@ -2408,13 +2092,7 @@
       </p:sp>
       <p:sp>
         <p:nvSpPr>
-          <p:cNvPr id="7" name="灯片编号占位符 6">
-            <a:extLst>
-              <a:ext uri="{FF2B5EF4-FFF2-40B4-BE49-F238E27FC236}">
-                <a16:creationId xmlns:a16="http://schemas.microsoft.com/office/drawing/2014/main" id="{BC04EBB2-6E0B-FE0F-E814-3AB79A7D41E0}"/>
-              </a:ext>
-            </a:extLst>
-          </p:cNvPr>
+          <p:cNvPr id="7" name="灯片编号占位符 6"/>
           <p:cNvSpPr>
             <a:spLocks noGrp="1"/>
           </p:cNvSpPr>
@@ -2429,18 +2107,12 @@
           <a:p>
             <a:fld id="{938BBDAC-42F4-49B7-8829-12C07218DEA0}" type="slidenum">
               <a:rPr lang="zh-CN" altLang="en-US" smtClean="0"/>
-              <a:t>‹#›</a:t>
             </a:fld>
             <a:endParaRPr lang="zh-CN" altLang="en-US"/>
           </a:p>
         </p:txBody>
       </p:sp>
     </p:spTree>
-    <p:extLst>
-      <p:ext uri="{BB962C8B-B14F-4D97-AF65-F5344CB8AC3E}">
-        <p14:creationId xmlns:p14="http://schemas.microsoft.com/office/powerpoint/2010/main" val="3326477245"/>
-      </p:ext>
-    </p:extLst>
   </p:cSld>
   <p:clrMapOvr>
     <a:masterClrMapping/>
@@ -2467,13 +2139,7 @@
       </p:grpSpPr>
       <p:sp>
         <p:nvSpPr>
-          <p:cNvPr id="2" name="标题 1">
-            <a:extLst>
-              <a:ext uri="{FF2B5EF4-FFF2-40B4-BE49-F238E27FC236}">
-                <a16:creationId xmlns:a16="http://schemas.microsoft.com/office/drawing/2014/main" id="{EB132C22-1127-4B34-8D73-DCB252C668A9}"/>
-              </a:ext>
-            </a:extLst>
-          </p:cNvPr>
+          <p:cNvPr id="2" name="标题 1"/>
           <p:cNvSpPr>
             <a:spLocks noGrp="1"/>
           </p:cNvSpPr>
@@ -2499,18 +2165,13 @@
               <a:rPr lang="zh-CN" altLang="en-US"/>
               <a:t>单击此处编辑母版标题样式</a:t>
             </a:r>
+            <a:endParaRPr lang="zh-CN" altLang="en-US"/>
           </a:p>
         </p:txBody>
       </p:sp>
       <p:sp>
         <p:nvSpPr>
-          <p:cNvPr id="3" name="图片占位符 2">
-            <a:extLst>
-              <a:ext uri="{FF2B5EF4-FFF2-40B4-BE49-F238E27FC236}">
-                <a16:creationId xmlns:a16="http://schemas.microsoft.com/office/drawing/2014/main" id="{C025FFF3-0591-05C0-A436-6618AD02F1E7}"/>
-              </a:ext>
-            </a:extLst>
-          </p:cNvPr>
+          <p:cNvPr id="3" name="图片占位符 2"/>
           <p:cNvSpPr>
             <a:spLocks noGrp="1"/>
           </p:cNvSpPr>
@@ -2571,13 +2232,7 @@
       </p:sp>
       <p:sp>
         <p:nvSpPr>
-          <p:cNvPr id="4" name="文本占位符 3">
-            <a:extLst>
-              <a:ext uri="{FF2B5EF4-FFF2-40B4-BE49-F238E27FC236}">
-                <a16:creationId xmlns:a16="http://schemas.microsoft.com/office/drawing/2014/main" id="{FCE54E63-AF5F-4ECE-B677-AE56B1946C3B}"/>
-              </a:ext>
-            </a:extLst>
-          </p:cNvPr>
+          <p:cNvPr id="4" name="文本占位符 3"/>
           <p:cNvSpPr>
             <a:spLocks noGrp="1"/>
           </p:cNvSpPr>
@@ -2637,18 +2292,13 @@
               <a:rPr lang="zh-CN" altLang="en-US"/>
               <a:t>单击此处编辑母版文本样式</a:t>
             </a:r>
+            <a:endParaRPr lang="zh-CN" altLang="en-US"/>
           </a:p>
         </p:txBody>
       </p:sp>
       <p:sp>
         <p:nvSpPr>
-          <p:cNvPr id="5" name="日期占位符 4">
-            <a:extLst>
-              <a:ext uri="{FF2B5EF4-FFF2-40B4-BE49-F238E27FC236}">
-                <a16:creationId xmlns:a16="http://schemas.microsoft.com/office/drawing/2014/main" id="{48360D6F-4CF7-E496-41AC-EAC25F5DFCFD}"/>
-              </a:ext>
-            </a:extLst>
-          </p:cNvPr>
+          <p:cNvPr id="5" name="日期占位符 4"/>
           <p:cNvSpPr>
             <a:spLocks noGrp="1"/>
           </p:cNvSpPr>
@@ -2663,7 +2313,6 @@
           <a:p>
             <a:fld id="{39B4D9CF-402F-4D0C-BB85-6BFADB64E4E3}" type="datetimeFigureOut">
               <a:rPr lang="zh-CN" altLang="en-US" smtClean="0"/>
-              <a:t>2026/2/20</a:t>
             </a:fld>
             <a:endParaRPr lang="zh-CN" altLang="en-US"/>
           </a:p>
@@ -2671,13 +2320,7 @@
       </p:sp>
       <p:sp>
         <p:nvSpPr>
-          <p:cNvPr id="6" name="页脚占位符 5">
-            <a:extLst>
-              <a:ext uri="{FF2B5EF4-FFF2-40B4-BE49-F238E27FC236}">
-                <a16:creationId xmlns:a16="http://schemas.microsoft.com/office/drawing/2014/main" id="{006E30F3-32EE-CECF-EB6B-954D15063683}"/>
-              </a:ext>
-            </a:extLst>
-          </p:cNvPr>
+          <p:cNvPr id="6" name="页脚占位符 5"/>
           <p:cNvSpPr>
             <a:spLocks noGrp="1"/>
           </p:cNvSpPr>
@@ -2696,13 +2339,7 @@
       </p:sp>
       <p:sp>
         <p:nvSpPr>
-          <p:cNvPr id="7" name="灯片编号占位符 6">
-            <a:extLst>
-              <a:ext uri="{FF2B5EF4-FFF2-40B4-BE49-F238E27FC236}">
-                <a16:creationId xmlns:a16="http://schemas.microsoft.com/office/drawing/2014/main" id="{A19C2712-5FCA-BE91-B22D-654EDD5B67B1}"/>
-              </a:ext>
-            </a:extLst>
-          </p:cNvPr>
+          <p:cNvPr id="7" name="灯片编号占位符 6"/>
           <p:cNvSpPr>
             <a:spLocks noGrp="1"/>
           </p:cNvSpPr>
@@ -2717,18 +2354,12 @@
           <a:p>
             <a:fld id="{938BBDAC-42F4-49B7-8829-12C07218DEA0}" type="slidenum">
               <a:rPr lang="zh-CN" altLang="en-US" smtClean="0"/>
-              <a:t>‹#›</a:t>
             </a:fld>
             <a:endParaRPr lang="zh-CN" altLang="en-US"/>
           </a:p>
         </p:txBody>
       </p:sp>
     </p:spTree>
-    <p:extLst>
-      <p:ext uri="{BB962C8B-B14F-4D97-AF65-F5344CB8AC3E}">
-        <p14:creationId xmlns:p14="http://schemas.microsoft.com/office/powerpoint/2010/main" val="1161774846"/>
-      </p:ext>
-    </p:extLst>
   </p:cSld>
   <p:clrMapOvr>
     <a:masterClrMapping/>
@@ -2760,13 +2391,7 @@
       </p:grpSpPr>
       <p:sp>
         <p:nvSpPr>
-          <p:cNvPr id="2" name="标题占位符 1">
-            <a:extLst>
-              <a:ext uri="{FF2B5EF4-FFF2-40B4-BE49-F238E27FC236}">
-                <a16:creationId xmlns:a16="http://schemas.microsoft.com/office/drawing/2014/main" id="{FA7D9A7F-C203-94A7-4D46-64C9C12091C4}"/>
-              </a:ext>
-            </a:extLst>
-          </p:cNvPr>
+          <p:cNvPr id="2" name="标题占位符 1"/>
           <p:cNvSpPr>
             <a:spLocks noGrp="1"/>
           </p:cNvSpPr>
@@ -2793,18 +2418,13 @@
               <a:rPr lang="zh-CN" altLang="en-US"/>
               <a:t>单击此处编辑母版标题样式</a:t>
             </a:r>
+            <a:endParaRPr lang="zh-CN" altLang="en-US"/>
           </a:p>
         </p:txBody>
       </p:sp>
       <p:sp>
         <p:nvSpPr>
-          <p:cNvPr id="3" name="文本占位符 2">
-            <a:extLst>
-              <a:ext uri="{FF2B5EF4-FFF2-40B4-BE49-F238E27FC236}">
-                <a16:creationId xmlns:a16="http://schemas.microsoft.com/office/drawing/2014/main" id="{33758115-B25D-9A05-9383-48B2157BA68F}"/>
-              </a:ext>
-            </a:extLst>
-          </p:cNvPr>
+          <p:cNvPr id="3" name="文本占位符 2"/>
           <p:cNvSpPr>
             <a:spLocks noGrp="1"/>
           </p:cNvSpPr>
@@ -2832,6 +2452,7 @@
               <a:rPr lang="zh-CN" altLang="en-US"/>
               <a:t>单击此处编辑母版文本样式</a:t>
             </a:r>
+            <a:endParaRPr lang="zh-CN" altLang="en-US"/>
           </a:p>
           <a:p>
             <a:pPr lvl="1"/>
@@ -2839,6 +2460,7 @@
               <a:rPr lang="zh-CN" altLang="en-US"/>
               <a:t>二级</a:t>
             </a:r>
+            <a:endParaRPr lang="zh-CN" altLang="en-US"/>
           </a:p>
           <a:p>
             <a:pPr lvl="2"/>
@@ -2846,6 +2468,7 @@
               <a:rPr lang="zh-CN" altLang="en-US"/>
               <a:t>三级</a:t>
             </a:r>
+            <a:endParaRPr lang="zh-CN" altLang="en-US"/>
           </a:p>
           <a:p>
             <a:pPr lvl="3"/>
@@ -2853,6 +2476,7 @@
               <a:rPr lang="zh-CN" altLang="en-US"/>
               <a:t>四级</a:t>
             </a:r>
+            <a:endParaRPr lang="zh-CN" altLang="en-US"/>
           </a:p>
           <a:p>
             <a:pPr lvl="4"/>
@@ -2860,18 +2484,13 @@
               <a:rPr lang="zh-CN" altLang="en-US"/>
               <a:t>五级</a:t>
             </a:r>
+            <a:endParaRPr lang="zh-CN" altLang="en-US"/>
           </a:p>
         </p:txBody>
       </p:sp>
       <p:sp>
         <p:nvSpPr>
-          <p:cNvPr id="4" name="日期占位符 3">
-            <a:extLst>
-              <a:ext uri="{FF2B5EF4-FFF2-40B4-BE49-F238E27FC236}">
-                <a16:creationId xmlns:a16="http://schemas.microsoft.com/office/drawing/2014/main" id="{03DDD00D-24E7-4F18-9328-468EBE199A7A}"/>
-              </a:ext>
-            </a:extLst>
-          </p:cNvPr>
+          <p:cNvPr id="4" name="日期占位符 3"/>
           <p:cNvSpPr>
             <a:spLocks noGrp="1"/>
           </p:cNvSpPr>
@@ -2904,7 +2523,6 @@
           <a:p>
             <a:fld id="{39B4D9CF-402F-4D0C-BB85-6BFADB64E4E3}" type="datetimeFigureOut">
               <a:rPr lang="zh-CN" altLang="en-US" smtClean="0"/>
-              <a:t>2026/2/20</a:t>
             </a:fld>
             <a:endParaRPr lang="zh-CN" altLang="en-US"/>
           </a:p>
@@ -2912,13 +2530,7 @@
       </p:sp>
       <p:sp>
         <p:nvSpPr>
-          <p:cNvPr id="5" name="页脚占位符 4">
-            <a:extLst>
-              <a:ext uri="{FF2B5EF4-FFF2-40B4-BE49-F238E27FC236}">
-                <a16:creationId xmlns:a16="http://schemas.microsoft.com/office/drawing/2014/main" id="{D29A1CE9-07F1-3303-185D-B46C12D4A55F}"/>
-              </a:ext>
-            </a:extLst>
-          </p:cNvPr>
+          <p:cNvPr id="5" name="页脚占位符 4"/>
           <p:cNvSpPr>
             <a:spLocks noGrp="1"/>
           </p:cNvSpPr>
@@ -2955,13 +2567,7 @@
       </p:sp>
       <p:sp>
         <p:nvSpPr>
-          <p:cNvPr id="6" name="灯片编号占位符 5">
-            <a:extLst>
-              <a:ext uri="{FF2B5EF4-FFF2-40B4-BE49-F238E27FC236}">
-                <a16:creationId xmlns:a16="http://schemas.microsoft.com/office/drawing/2014/main" id="{FC271B06-4DD9-09AC-868E-A1974D65DE38}"/>
-              </a:ext>
-            </a:extLst>
-          </p:cNvPr>
+          <p:cNvPr id="6" name="灯片编号占位符 5"/>
           <p:cNvSpPr>
             <a:spLocks noGrp="1"/>
           </p:cNvSpPr>
@@ -2994,18 +2600,12 @@
           <a:p>
             <a:fld id="{938BBDAC-42F4-49B7-8829-12C07218DEA0}" type="slidenum">
               <a:rPr lang="zh-CN" altLang="en-US" smtClean="0"/>
-              <a:t>‹#›</a:t>
             </a:fld>
             <a:endParaRPr lang="zh-CN" altLang="en-US"/>
           </a:p>
         </p:txBody>
       </p:sp>
     </p:spTree>
-    <p:extLst>
-      <p:ext uri="{BB962C8B-B14F-4D97-AF65-F5344CB8AC3E}">
-        <p14:creationId xmlns:p14="http://schemas.microsoft.com/office/powerpoint/2010/main" val="1525137634"/>
-      </p:ext>
-    </p:extLst>
   </p:cSld>
   <p:clrMap bg1="lt1" tx1="dk1" bg2="lt2" tx2="dk2" accent1="accent1" accent2="accent2" accent3="accent3" accent4="accent4" accent5="accent5" accent6="accent6" hlink="hlink" folHlink="folHlink"/>
   <p:sldLayoutIdLst>
@@ -3334,13 +2934,7 @@
       </p:grpSpPr>
       <p:sp>
         <p:nvSpPr>
-          <p:cNvPr id="5" name="文本框 4">
-            <a:extLst>
-              <a:ext uri="{FF2B5EF4-FFF2-40B4-BE49-F238E27FC236}">
-                <a16:creationId xmlns:a16="http://schemas.microsoft.com/office/drawing/2014/main" id="{4555BE62-0439-4E6C-89E9-17F34189A3CC}"/>
-              </a:ext>
-            </a:extLst>
-          </p:cNvPr>
+          <p:cNvPr id="5" name="文本框 4"/>
           <p:cNvSpPr txBox="1"/>
           <p:nvPr/>
         </p:nvSpPr>
@@ -3445,6 +3039,14 @@
               </a:rPr>
               <a:t>--bare : Create a bare repository (no working directory)</a:t>
             </a:r>
+            <a:endParaRPr lang="en-US" altLang="zh-CN" sz="800" dirty="0">
+              <a:solidFill>
+                <a:schemeClr val="bg1"/>
+              </a:solidFill>
+              <a:latin typeface="Siemens Slab" pitchFamily="2" charset="0"/>
+              <a:ea typeface="Calibri" panose="020F0502020204030204" pitchFamily="34" charset="0"/>
+              <a:cs typeface="Calibri" panose="020F0502020204030204" pitchFamily="34" charset="0"/>
+            </a:endParaRPr>
           </a:p>
           <a:p>
             <a:pPr>
@@ -3584,6 +3186,14 @@
               </a:rPr>
               <a:t>--recurse-submodules : Clone submodules automatically</a:t>
             </a:r>
+            <a:endParaRPr lang="en-US" altLang="zh-CN" sz="800" dirty="0">
+              <a:solidFill>
+                <a:schemeClr val="bg1"/>
+              </a:solidFill>
+              <a:latin typeface="Siemens Slab" pitchFamily="2" charset="0"/>
+              <a:ea typeface="Calibri" panose="020F0502020204030204" pitchFamily="34" charset="0"/>
+              <a:cs typeface="Calibri" panose="020F0502020204030204" pitchFamily="34" charset="0"/>
+            </a:endParaRPr>
           </a:p>
           <a:p>
             <a:pPr>
@@ -3702,6 +3312,14 @@
               </a:rPr>
               <a:t>-b : Show branch info</a:t>
             </a:r>
+            <a:endParaRPr lang="en-US" altLang="zh-CN" sz="800" dirty="0">
+              <a:solidFill>
+                <a:schemeClr val="bg1"/>
+              </a:solidFill>
+              <a:latin typeface="Siemens Slab" pitchFamily="2" charset="0"/>
+              <a:ea typeface="Calibri" panose="020F0502020204030204" pitchFamily="34" charset="0"/>
+              <a:cs typeface="Calibri" panose="020F0502020204030204" pitchFamily="34" charset="0"/>
+            </a:endParaRPr>
           </a:p>
           <a:p>
             <a:pPr>
@@ -3819,6 +3437,14 @@
               </a:rPr>
               <a:t>-p : Interactive patch selection</a:t>
             </a:r>
+            <a:endParaRPr lang="en-US" altLang="zh-CN" sz="800" dirty="0">
+              <a:solidFill>
+                <a:schemeClr val="bg1"/>
+              </a:solidFill>
+              <a:latin typeface="Siemens Slab" pitchFamily="2" charset="0"/>
+              <a:ea typeface="Calibri" panose="020F0502020204030204" pitchFamily="34" charset="0"/>
+              <a:cs typeface="Calibri" panose="020F0502020204030204" pitchFamily="34" charset="0"/>
+            </a:endParaRPr>
           </a:p>
           <a:p>
             <a:pPr>
@@ -3957,6 +3583,14 @@
               </a:rPr>
               <a:t>--allow-empty : Allow empty commit</a:t>
             </a:r>
+            <a:endParaRPr lang="en-US" altLang="zh-CN" sz="800" dirty="0">
+              <a:solidFill>
+                <a:schemeClr val="bg1"/>
+              </a:solidFill>
+              <a:latin typeface="Siemens Slab" pitchFamily="2" charset="0"/>
+              <a:ea typeface="Calibri" panose="020F0502020204030204" pitchFamily="34" charset="0"/>
+              <a:cs typeface="Calibri" panose="020F0502020204030204" pitchFamily="34" charset="0"/>
+            </a:endParaRPr>
           </a:p>
           <a:p>
             <a:pPr>
@@ -4074,18 +3708,20 @@
               </a:rPr>
               <a:t>branch1 branch2 : Compare two branches</a:t>
             </a:r>
+            <a:endParaRPr lang="en-US" altLang="zh-CN" sz="800" dirty="0">
+              <a:solidFill>
+                <a:schemeClr val="bg1"/>
+              </a:solidFill>
+              <a:latin typeface="Siemens Slab" pitchFamily="2" charset="0"/>
+              <a:ea typeface="Calibri" panose="020F0502020204030204" pitchFamily="34" charset="0"/>
+              <a:cs typeface="Calibri" panose="020F0502020204030204" pitchFamily="34" charset="0"/>
+            </a:endParaRPr>
           </a:p>
         </p:txBody>
       </p:sp>
       <p:sp>
         <p:nvSpPr>
-          <p:cNvPr id="8" name="文本框 7">
-            <a:extLst>
-              <a:ext uri="{FF2B5EF4-FFF2-40B4-BE49-F238E27FC236}">
-                <a16:creationId xmlns:a16="http://schemas.microsoft.com/office/drawing/2014/main" id="{7F1E55AE-550C-D14C-9E5E-DDBF91EA087F}"/>
-              </a:ext>
-            </a:extLst>
-          </p:cNvPr>
+          <p:cNvPr id="8" name="文本框 7"/>
           <p:cNvSpPr txBox="1"/>
           <p:nvPr/>
         </p:nvSpPr>
@@ -4148,6 +3784,14 @@
               </a:rPr>
               <a:t> Key</a:t>
             </a:r>
+            <a:endParaRPr lang="en-US" altLang="zh-CN" sz="800" b="1" dirty="0">
+              <a:solidFill>
+                <a:srgbClr val="FFFF00"/>
+              </a:solidFill>
+              <a:latin typeface="Siemens Slab" pitchFamily="2" charset="0"/>
+              <a:ea typeface="Calibri" panose="020F0502020204030204" pitchFamily="34" charset="0"/>
+              <a:cs typeface="Calibri" panose="020F0502020204030204" pitchFamily="34" charset="0"/>
+            </a:endParaRPr>
           </a:p>
           <a:p>
             <a:pPr>
@@ -4166,6 +3810,14 @@
               </a:rPr>
               <a:t>ssh-keygen -t ed25519 -C "email@example.com"</a:t>
             </a:r>
+            <a:endParaRPr lang="en-US" altLang="zh-CN" sz="800" dirty="0">
+              <a:solidFill>
+                <a:schemeClr val="bg1"/>
+              </a:solidFill>
+              <a:latin typeface="Siemens Slab" pitchFamily="2" charset="0"/>
+              <a:ea typeface="Calibri" panose="020F0502020204030204" pitchFamily="34" charset="0"/>
+              <a:cs typeface="Calibri" panose="020F0502020204030204" pitchFamily="34" charset="0"/>
+            </a:endParaRPr>
           </a:p>
           <a:p>
             <a:pPr>
@@ -4184,6 +3836,14 @@
               </a:rPr>
               <a:t>ssh-add ~/.ssh/id_ed25519</a:t>
             </a:r>
+            <a:endParaRPr lang="en-US" altLang="zh-CN" sz="800" dirty="0">
+              <a:solidFill>
+                <a:schemeClr val="bg1"/>
+              </a:solidFill>
+              <a:latin typeface="Siemens Slab" pitchFamily="2" charset="0"/>
+              <a:ea typeface="Calibri" panose="020F0502020204030204" pitchFamily="34" charset="0"/>
+              <a:cs typeface="Calibri" panose="020F0502020204030204" pitchFamily="34" charset="0"/>
+            </a:endParaRPr>
           </a:p>
           <a:p>
             <a:pPr>
@@ -4202,6 +3862,14 @@
               </a:rPr>
               <a:t>cat ~/.ssh/id_ed25519.pub</a:t>
             </a:r>
+            <a:endParaRPr lang="en-US" altLang="zh-CN" sz="800" dirty="0">
+              <a:solidFill>
+                <a:schemeClr val="bg1"/>
+              </a:solidFill>
+              <a:latin typeface="Siemens Slab" pitchFamily="2" charset="0"/>
+              <a:ea typeface="Calibri" panose="020F0502020204030204" pitchFamily="34" charset="0"/>
+              <a:cs typeface="Calibri" panose="020F0502020204030204" pitchFamily="34" charset="0"/>
+            </a:endParaRPr>
           </a:p>
           <a:p>
             <a:pPr>
@@ -4257,6 +3925,14 @@
               </a:rPr>
               <a:t>ssh -T git@github.com</a:t>
             </a:r>
+            <a:endParaRPr lang="en-US" altLang="zh-CN" sz="800" dirty="0">
+              <a:solidFill>
+                <a:schemeClr val="bg1"/>
+              </a:solidFill>
+              <a:latin typeface="Siemens Slab" pitchFamily="2" charset="0"/>
+              <a:ea typeface="Calibri" panose="020F0502020204030204" pitchFamily="34" charset="0"/>
+              <a:cs typeface="Calibri" panose="020F0502020204030204" pitchFamily="34" charset="0"/>
+            </a:endParaRPr>
           </a:p>
           <a:p>
             <a:pPr>
@@ -4277,13 +3953,7 @@
       </p:sp>
       <p:sp>
         <p:nvSpPr>
-          <p:cNvPr id="9" name="文本框 8">
-            <a:extLst>
-              <a:ext uri="{FF2B5EF4-FFF2-40B4-BE49-F238E27FC236}">
-                <a16:creationId xmlns:a16="http://schemas.microsoft.com/office/drawing/2014/main" id="{51433AD4-9E9A-0FC6-CC57-64BB2ED8B4F6}"/>
-              </a:ext>
-            </a:extLst>
-          </p:cNvPr>
+          <p:cNvPr id="9" name="文本框 8"/>
           <p:cNvSpPr txBox="1"/>
           <p:nvPr/>
         </p:nvSpPr>
@@ -4430,6 +4100,14 @@
               </a:rPr>
               <a:t> : Show last commit and tracking info</a:t>
             </a:r>
+            <a:endParaRPr lang="en-US" altLang="zh-CN" sz="800" dirty="0">
+              <a:solidFill>
+                <a:schemeClr val="bg1"/>
+              </a:solidFill>
+              <a:latin typeface="Siemens Slab" pitchFamily="2" charset="0"/>
+              <a:ea typeface="Calibri" panose="020F0502020204030204" pitchFamily="34" charset="0"/>
+              <a:cs typeface="Calibri" panose="020F0502020204030204" pitchFamily="34" charset="0"/>
+            </a:endParaRPr>
           </a:p>
           <a:p>
             <a:pPr>
@@ -4505,6 +4183,14 @@
               </a:rPr>
               <a:t>-c : Create and switch</a:t>
             </a:r>
+            <a:endParaRPr lang="en-US" altLang="zh-CN" sz="800" dirty="0">
+              <a:solidFill>
+                <a:schemeClr val="bg1"/>
+              </a:solidFill>
+              <a:latin typeface="Siemens Slab" pitchFamily="2" charset="0"/>
+              <a:ea typeface="Calibri" panose="020F0502020204030204" pitchFamily="34" charset="0"/>
+              <a:cs typeface="Calibri" panose="020F0502020204030204" pitchFamily="34" charset="0"/>
+            </a:endParaRPr>
           </a:p>
           <a:p>
             <a:pPr>
@@ -4601,6 +4287,14 @@
               </a:rPr>
               <a:t>--detach : Detached HEAD</a:t>
             </a:r>
+            <a:endParaRPr lang="en-US" altLang="zh-CN" sz="800" dirty="0">
+              <a:solidFill>
+                <a:schemeClr val="bg1"/>
+              </a:solidFill>
+              <a:latin typeface="Siemens Slab" pitchFamily="2" charset="0"/>
+              <a:ea typeface="Calibri" panose="020F0502020204030204" pitchFamily="34" charset="0"/>
+              <a:cs typeface="Calibri" panose="020F0502020204030204" pitchFamily="34" charset="0"/>
+            </a:endParaRPr>
           </a:p>
           <a:p>
             <a:pPr>
@@ -4733,6 +4427,14 @@
               </a:rPr>
               <a:t>git merge –abort</a:t>
             </a:r>
+            <a:endParaRPr lang="en-US" altLang="zh-CN" sz="800" b="1" dirty="0">
+              <a:solidFill>
+                <a:srgbClr val="FFFF00"/>
+              </a:solidFill>
+              <a:latin typeface="Siemens Slab" pitchFamily="2" charset="0"/>
+              <a:ea typeface="Calibri" panose="020F0502020204030204" pitchFamily="34" charset="0"/>
+              <a:cs typeface="Calibri" panose="020F0502020204030204" pitchFamily="34" charset="0"/>
+            </a:endParaRPr>
           </a:p>
           <a:p>
             <a:pPr>
@@ -4751,6 +4453,14 @@
               </a:rPr>
               <a:t>Abort current merge and restore previous state.</a:t>
             </a:r>
+            <a:endParaRPr lang="en-US" altLang="zh-CN" sz="800" dirty="0">
+              <a:solidFill>
+                <a:schemeClr val="bg1"/>
+              </a:solidFill>
+              <a:latin typeface="Siemens Slab" pitchFamily="2" charset="0"/>
+              <a:ea typeface="Calibri" panose="020F0502020204030204" pitchFamily="34" charset="0"/>
+              <a:cs typeface="Calibri" panose="020F0502020204030204" pitchFamily="34" charset="0"/>
+            </a:endParaRPr>
           </a:p>
           <a:p>
             <a:pPr>
@@ -4911,6 +4621,14 @@
               </a:rPr>
               <a:t>--skip : Skip problematic commit</a:t>
             </a:r>
+            <a:endParaRPr lang="en-US" altLang="zh-CN" sz="800" dirty="0">
+              <a:solidFill>
+                <a:schemeClr val="bg1"/>
+              </a:solidFill>
+              <a:latin typeface="Siemens Slab" pitchFamily="2" charset="0"/>
+              <a:ea typeface="Calibri" panose="020F0502020204030204" pitchFamily="34" charset="0"/>
+              <a:cs typeface="Calibri" panose="020F0502020204030204" pitchFamily="34" charset="0"/>
+            </a:endParaRPr>
           </a:p>
           <a:p>
             <a:pPr>
@@ -5017,6 +4735,14 @@
               </a:rPr>
               <a:t>.</a:t>
             </a:r>
+            <a:endParaRPr lang="en-US" altLang="zh-CN" sz="800" dirty="0">
+              <a:solidFill>
+                <a:schemeClr val="bg1"/>
+              </a:solidFill>
+              <a:latin typeface="Siemens Slab" pitchFamily="2" charset="0"/>
+              <a:ea typeface="Calibri" panose="020F0502020204030204" pitchFamily="34" charset="0"/>
+              <a:cs typeface="Calibri" panose="020F0502020204030204" pitchFamily="34" charset="0"/>
+            </a:endParaRPr>
           </a:p>
           <a:p>
             <a:pPr>
@@ -5035,6 +4761,14 @@
               </a:rPr>
               <a:t>--rebase-merges : Preserve merge commits.</a:t>
             </a:r>
+            <a:endParaRPr lang="en-US" altLang="zh-CN" sz="800" dirty="0">
+              <a:solidFill>
+                <a:schemeClr val="bg1"/>
+              </a:solidFill>
+              <a:latin typeface="Siemens Slab" pitchFamily="2" charset="0"/>
+              <a:ea typeface="Calibri" panose="020F0502020204030204" pitchFamily="34" charset="0"/>
+              <a:cs typeface="Calibri" panose="020F0502020204030204" pitchFamily="34" charset="0"/>
+            </a:endParaRPr>
           </a:p>
           <a:p>
             <a:pPr>
@@ -5173,6 +4907,14 @@
               </a:rPr>
               <a:t>--allow-empty : Keep empty commit</a:t>
             </a:r>
+            <a:endParaRPr lang="en-US" altLang="zh-CN" sz="800" dirty="0">
+              <a:solidFill>
+                <a:schemeClr val="bg1"/>
+              </a:solidFill>
+              <a:latin typeface="Siemens Slab" pitchFamily="2" charset="0"/>
+              <a:ea typeface="Calibri" panose="020F0502020204030204" pitchFamily="34" charset="0"/>
+              <a:cs typeface="Calibri" panose="020F0502020204030204" pitchFamily="34" charset="0"/>
+            </a:endParaRPr>
           </a:p>
           <a:p>
             <a:pPr>
@@ -5206,6 +4948,14 @@
               </a:rPr>
               <a:t>git checkout/ restore --ours &lt;file&gt;</a:t>
             </a:r>
+            <a:endParaRPr lang="en-US" altLang="zh-CN" sz="800" b="1" dirty="0">
+              <a:solidFill>
+                <a:srgbClr val="FFFF00"/>
+              </a:solidFill>
+              <a:latin typeface="Siemens Slab" pitchFamily="2" charset="0"/>
+              <a:ea typeface="Calibri" panose="020F0502020204030204" pitchFamily="34" charset="0"/>
+              <a:cs typeface="Calibri" panose="020F0502020204030204" pitchFamily="34" charset="0"/>
+            </a:endParaRPr>
           </a:p>
           <a:p>
             <a:pPr>
@@ -5224,6 +4974,14 @@
               </a:rPr>
               <a:t>Use current branch version of file during conflict.</a:t>
             </a:r>
+            <a:endParaRPr lang="en-US" altLang="zh-CN" sz="800" dirty="0">
+              <a:solidFill>
+                <a:schemeClr val="bg1"/>
+              </a:solidFill>
+              <a:latin typeface="Siemens Slab" pitchFamily="2" charset="0"/>
+              <a:ea typeface="Calibri" panose="020F0502020204030204" pitchFamily="34" charset="0"/>
+              <a:cs typeface="Calibri" panose="020F0502020204030204" pitchFamily="34" charset="0"/>
+            </a:endParaRPr>
           </a:p>
           <a:p>
             <a:pPr>
@@ -5257,6 +5015,14 @@
               </a:rPr>
               <a:t>git checkout/ restore --theirs &lt;file&gt;</a:t>
             </a:r>
+            <a:endParaRPr lang="en-US" altLang="zh-CN" sz="800" b="1" dirty="0">
+              <a:solidFill>
+                <a:srgbClr val="FFFF00"/>
+              </a:solidFill>
+              <a:latin typeface="Siemens Slab" pitchFamily="2" charset="0"/>
+              <a:ea typeface="Calibri" panose="020F0502020204030204" pitchFamily="34" charset="0"/>
+              <a:cs typeface="Calibri" panose="020F0502020204030204" pitchFamily="34" charset="0"/>
+            </a:endParaRPr>
           </a:p>
           <a:p>
             <a:pPr>
@@ -5275,6 +5041,14 @@
               </a:rPr>
               <a:t>Use incoming branch version during conflict.</a:t>
             </a:r>
+            <a:endParaRPr lang="en-US" altLang="zh-CN" sz="800" dirty="0">
+              <a:solidFill>
+                <a:schemeClr val="bg1"/>
+              </a:solidFill>
+              <a:latin typeface="Siemens Slab" pitchFamily="2" charset="0"/>
+              <a:ea typeface="Calibri" panose="020F0502020204030204" pitchFamily="34" charset="0"/>
+              <a:cs typeface="Calibri" panose="020F0502020204030204" pitchFamily="34" charset="0"/>
+            </a:endParaRPr>
           </a:p>
           <a:p>
             <a:pPr>
@@ -5308,6 +5082,14 @@
               </a:rPr>
               <a:t>git merge-file &lt;current&gt; &lt;base&gt; &lt;other&gt;</a:t>
             </a:r>
+            <a:endParaRPr lang="en-US" altLang="zh-CN" sz="800" b="1" dirty="0">
+              <a:solidFill>
+                <a:srgbClr val="FFFF00"/>
+              </a:solidFill>
+              <a:latin typeface="Siemens Slab" pitchFamily="2" charset="0"/>
+              <a:ea typeface="Calibri" panose="020F0502020204030204" pitchFamily="34" charset="0"/>
+              <a:cs typeface="Calibri" panose="020F0502020204030204" pitchFamily="34" charset="0"/>
+            </a:endParaRPr>
           </a:p>
           <a:p>
             <a:pPr>
@@ -5326,6 +5108,14 @@
               </a:rPr>
               <a:t>Perform three-way file merge manually.</a:t>
             </a:r>
+            <a:endParaRPr lang="en-US" altLang="zh-CN" sz="800" dirty="0">
+              <a:solidFill>
+                <a:schemeClr val="bg1"/>
+              </a:solidFill>
+              <a:latin typeface="Siemens Slab" pitchFamily="2" charset="0"/>
+              <a:ea typeface="Calibri" panose="020F0502020204030204" pitchFamily="34" charset="0"/>
+              <a:cs typeface="Calibri" panose="020F0502020204030204" pitchFamily="34" charset="0"/>
+            </a:endParaRPr>
           </a:p>
           <a:p>
             <a:pPr>
@@ -5359,6 +5149,14 @@
               </a:rPr>
               <a:t>git diff --name-only --diff-filter=U</a:t>
             </a:r>
+            <a:endParaRPr lang="en-US" altLang="zh-CN" sz="800" b="1" dirty="0">
+              <a:solidFill>
+                <a:srgbClr val="FFFF00"/>
+              </a:solidFill>
+              <a:latin typeface="Siemens Slab" pitchFamily="2" charset="0"/>
+              <a:ea typeface="Calibri" panose="020F0502020204030204" pitchFamily="34" charset="0"/>
+              <a:cs typeface="Calibri" panose="020F0502020204030204" pitchFamily="34" charset="0"/>
+            </a:endParaRPr>
           </a:p>
           <a:p>
             <a:pPr>
@@ -5377,6 +5175,14 @@
               </a:rPr>
               <a:t>List files with unresolved conflicts.</a:t>
             </a:r>
+            <a:endParaRPr lang="en-US" altLang="zh-CN" sz="800" dirty="0">
+              <a:solidFill>
+                <a:schemeClr val="bg1"/>
+              </a:solidFill>
+              <a:latin typeface="Siemens Slab" pitchFamily="2" charset="0"/>
+              <a:ea typeface="Calibri" panose="020F0502020204030204" pitchFamily="34" charset="0"/>
+              <a:cs typeface="Calibri" panose="020F0502020204030204" pitchFamily="34" charset="0"/>
+            </a:endParaRPr>
           </a:p>
           <a:p>
             <a:pPr>
@@ -5410,6 +5216,14 @@
               </a:rPr>
               <a:t>git log --merge</a:t>
             </a:r>
+            <a:endParaRPr lang="en-US" altLang="zh-CN" sz="800" b="1" dirty="0">
+              <a:solidFill>
+                <a:srgbClr val="FFFF00"/>
+              </a:solidFill>
+              <a:latin typeface="Siemens Slab" pitchFamily="2" charset="0"/>
+              <a:ea typeface="Calibri" panose="020F0502020204030204" pitchFamily="34" charset="0"/>
+              <a:cs typeface="Calibri" panose="020F0502020204030204" pitchFamily="34" charset="0"/>
+            </a:endParaRPr>
           </a:p>
           <a:p>
             <a:pPr>
@@ -5428,6 +5242,14 @@
               </a:rPr>
               <a:t>Show commits involved in merge conflict.</a:t>
             </a:r>
+            <a:endParaRPr lang="en-US" altLang="zh-CN" sz="800" dirty="0">
+              <a:solidFill>
+                <a:schemeClr val="bg1"/>
+              </a:solidFill>
+              <a:latin typeface="Siemens Slab" pitchFamily="2" charset="0"/>
+              <a:ea typeface="Calibri" panose="020F0502020204030204" pitchFamily="34" charset="0"/>
+              <a:cs typeface="Calibri" panose="020F0502020204030204" pitchFamily="34" charset="0"/>
+            </a:endParaRPr>
           </a:p>
           <a:p>
             <a:pPr>
@@ -5461,6 +5283,14 @@
               </a:rPr>
               <a:t>git show :&lt;stage&gt;:&lt;file&gt;</a:t>
             </a:r>
+            <a:endParaRPr lang="en-US" altLang="zh-CN" sz="800" b="1" dirty="0">
+              <a:solidFill>
+                <a:srgbClr val="FFFF00"/>
+              </a:solidFill>
+              <a:latin typeface="Siemens Slab" pitchFamily="2" charset="0"/>
+              <a:ea typeface="Calibri" panose="020F0502020204030204" pitchFamily="34" charset="0"/>
+              <a:cs typeface="Calibri" panose="020F0502020204030204" pitchFamily="34" charset="0"/>
+            </a:endParaRPr>
           </a:p>
           <a:p>
             <a:pPr>
@@ -5479,6 +5309,14 @@
               </a:rPr>
               <a:t>Show conflicted file at specific stage.</a:t>
             </a:r>
+            <a:endParaRPr lang="en-US" altLang="zh-CN" sz="800" dirty="0">
+              <a:solidFill>
+                <a:schemeClr val="bg1"/>
+              </a:solidFill>
+              <a:latin typeface="Siemens Slab" pitchFamily="2" charset="0"/>
+              <a:ea typeface="Calibri" panose="020F0502020204030204" pitchFamily="34" charset="0"/>
+              <a:cs typeface="Calibri" panose="020F0502020204030204" pitchFamily="34" charset="0"/>
+            </a:endParaRPr>
           </a:p>
           <a:p>
             <a:pPr>
@@ -5497,6 +5335,14 @@
               </a:rPr>
               <a:t>Stage 1 : common ancestor</a:t>
             </a:r>
+            <a:endParaRPr lang="en-US" altLang="zh-CN" sz="800" dirty="0">
+              <a:solidFill>
+                <a:schemeClr val="bg1"/>
+              </a:solidFill>
+              <a:latin typeface="Siemens Slab" pitchFamily="2" charset="0"/>
+              <a:ea typeface="Calibri" panose="020F0502020204030204" pitchFamily="34" charset="0"/>
+              <a:cs typeface="Calibri" panose="020F0502020204030204" pitchFamily="34" charset="0"/>
+            </a:endParaRPr>
           </a:p>
           <a:p>
             <a:pPr>
@@ -5515,6 +5361,14 @@
               </a:rPr>
               <a:t>Stage 2 : ours</a:t>
             </a:r>
+            <a:endParaRPr lang="en-US" altLang="zh-CN" sz="800" dirty="0">
+              <a:solidFill>
+                <a:schemeClr val="bg1"/>
+              </a:solidFill>
+              <a:latin typeface="Siemens Slab" pitchFamily="2" charset="0"/>
+              <a:ea typeface="Calibri" panose="020F0502020204030204" pitchFamily="34" charset="0"/>
+              <a:cs typeface="Calibri" panose="020F0502020204030204" pitchFamily="34" charset="0"/>
+            </a:endParaRPr>
           </a:p>
           <a:p>
             <a:pPr>
@@ -5533,6 +5387,14 @@
               </a:rPr>
               <a:t>Stage 3 : theirs</a:t>
             </a:r>
+            <a:endParaRPr lang="en-US" altLang="zh-CN" sz="800" dirty="0">
+              <a:solidFill>
+                <a:schemeClr val="bg1"/>
+              </a:solidFill>
+              <a:latin typeface="Siemens Slab" pitchFamily="2" charset="0"/>
+              <a:ea typeface="Calibri" panose="020F0502020204030204" pitchFamily="34" charset="0"/>
+              <a:cs typeface="Calibri" panose="020F0502020204030204" pitchFamily="34" charset="0"/>
+            </a:endParaRPr>
           </a:p>
           <a:p>
             <a:pPr>
@@ -5587,6 +5449,14 @@
               </a:rPr>
               <a:t>Set upstream tracking branch.</a:t>
             </a:r>
+            <a:endParaRPr lang="en-US" altLang="zh-CN" sz="800" dirty="0">
+              <a:solidFill>
+                <a:schemeClr val="bg1"/>
+              </a:solidFill>
+              <a:latin typeface="Siemens Slab" pitchFamily="2" charset="0"/>
+              <a:ea typeface="Calibri" panose="020F0502020204030204" pitchFamily="34" charset="0"/>
+              <a:cs typeface="Calibri" panose="020F0502020204030204" pitchFamily="34" charset="0"/>
+            </a:endParaRPr>
           </a:p>
           <a:p>
             <a:pPr>
@@ -5641,6 +5511,14 @@
               </a:rPr>
               <a:t>Push branch and set upstream in one step.</a:t>
             </a:r>
+            <a:endParaRPr lang="en-US" altLang="zh-CN" sz="800" dirty="0">
+              <a:solidFill>
+                <a:schemeClr val="bg1"/>
+              </a:solidFill>
+              <a:latin typeface="Siemens Slab" pitchFamily="2" charset="0"/>
+              <a:ea typeface="Calibri" panose="020F0502020204030204" pitchFamily="34" charset="0"/>
+              <a:cs typeface="Calibri" panose="020F0502020204030204" pitchFamily="34" charset="0"/>
+            </a:endParaRPr>
           </a:p>
           <a:p>
             <a:pPr>
@@ -5695,6 +5573,14 @@
               </a:rPr>
               <a:t>List remote branches (-r) or all branches (-a).</a:t>
             </a:r>
+            <a:endParaRPr lang="en-US" altLang="zh-CN" sz="800" dirty="0">
+              <a:solidFill>
+                <a:schemeClr val="bg1"/>
+              </a:solidFill>
+              <a:latin typeface="Siemens Slab" pitchFamily="2" charset="0"/>
+              <a:ea typeface="Calibri" panose="020F0502020204030204" pitchFamily="34" charset="0"/>
+              <a:cs typeface="Calibri" panose="020F0502020204030204" pitchFamily="34" charset="0"/>
+            </a:endParaRPr>
           </a:p>
           <a:p>
             <a:pPr>
@@ -5770,18 +5656,20 @@
               </a:rPr>
               <a:t>Show merged or unmerged branches relative to current branch.</a:t>
             </a:r>
+            <a:endParaRPr lang="en-US" altLang="zh-CN" sz="800" dirty="0">
+              <a:solidFill>
+                <a:schemeClr val="bg1"/>
+              </a:solidFill>
+              <a:latin typeface="Siemens Slab" pitchFamily="2" charset="0"/>
+              <a:ea typeface="Calibri" panose="020F0502020204030204" pitchFamily="34" charset="0"/>
+              <a:cs typeface="Calibri" panose="020F0502020204030204" pitchFamily="34" charset="0"/>
+            </a:endParaRPr>
           </a:p>
         </p:txBody>
       </p:sp>
       <p:sp>
         <p:nvSpPr>
-          <p:cNvPr id="10" name="文本框 9">
-            <a:extLst>
-              <a:ext uri="{FF2B5EF4-FFF2-40B4-BE49-F238E27FC236}">
-                <a16:creationId xmlns:a16="http://schemas.microsoft.com/office/drawing/2014/main" id="{94D09E03-B457-0392-0D9F-BF39A1D0FDDD}"/>
-              </a:ext>
-            </a:extLst>
-          </p:cNvPr>
+          <p:cNvPr id="10" name="文本框 9"/>
           <p:cNvSpPr txBox="1"/>
           <p:nvPr/>
         </p:nvSpPr>
@@ -5822,6 +5710,14 @@
               </a:rPr>
               <a:t>git remote (-v)</a:t>
             </a:r>
+            <a:endParaRPr lang="en-US" altLang="zh-CN" sz="800" b="1" dirty="0">
+              <a:solidFill>
+                <a:srgbClr val="FFFF00"/>
+              </a:solidFill>
+              <a:latin typeface="Siemens Slab" pitchFamily="2" charset="0"/>
+              <a:ea typeface="Calibri" panose="020F0502020204030204" pitchFamily="34" charset="0"/>
+              <a:cs typeface="Calibri" panose="020F0502020204030204" pitchFamily="34" charset="0"/>
+            </a:endParaRPr>
           </a:p>
           <a:p>
             <a:pPr>
@@ -5840,6 +5736,14 @@
               </a:rPr>
               <a:t>List remotes.</a:t>
             </a:r>
+            <a:endParaRPr lang="en-US" altLang="zh-CN" sz="800" dirty="0">
+              <a:solidFill>
+                <a:schemeClr val="bg1"/>
+              </a:solidFill>
+              <a:latin typeface="Siemens Slab" pitchFamily="2" charset="0"/>
+              <a:ea typeface="Calibri" panose="020F0502020204030204" pitchFamily="34" charset="0"/>
+              <a:cs typeface="Calibri" panose="020F0502020204030204" pitchFamily="34" charset="0"/>
+            </a:endParaRPr>
           </a:p>
           <a:p>
             <a:pPr>
@@ -5858,6 +5762,14 @@
               </a:rPr>
               <a:t>-v : Show remote URLs</a:t>
             </a:r>
+            <a:endParaRPr lang="en-US" altLang="zh-CN" sz="800" dirty="0">
+              <a:solidFill>
+                <a:schemeClr val="bg1"/>
+              </a:solidFill>
+              <a:latin typeface="Siemens Slab" pitchFamily="2" charset="0"/>
+              <a:ea typeface="Calibri" panose="020F0502020204030204" pitchFamily="34" charset="0"/>
+              <a:cs typeface="Calibri" panose="020F0502020204030204" pitchFamily="34" charset="0"/>
+            </a:endParaRPr>
           </a:p>
           <a:p>
             <a:pPr>
@@ -5913,6 +5825,14 @@
               </a:rPr>
               <a:t>&gt;/remove &lt;name&gt;</a:t>
             </a:r>
+            <a:endParaRPr lang="en-US" altLang="zh-CN" sz="800" b="1" dirty="0">
+              <a:solidFill>
+                <a:srgbClr val="FFFF00"/>
+              </a:solidFill>
+              <a:latin typeface="Siemens Slab" pitchFamily="2" charset="0"/>
+              <a:ea typeface="Calibri" panose="020F0502020204030204" pitchFamily="34" charset="0"/>
+              <a:cs typeface="Calibri" panose="020F0502020204030204" pitchFamily="34" charset="0"/>
+            </a:endParaRPr>
           </a:p>
           <a:p>
             <a:pPr>
@@ -5931,6 +5851,14 @@
               </a:rPr>
               <a:t>Add/ Remove a new remote.</a:t>
             </a:r>
+            <a:endParaRPr lang="en-US" altLang="zh-CN" sz="800" dirty="0">
+              <a:solidFill>
+                <a:schemeClr val="bg1"/>
+              </a:solidFill>
+              <a:latin typeface="Siemens Slab" pitchFamily="2" charset="0"/>
+              <a:ea typeface="Calibri" panose="020F0502020204030204" pitchFamily="34" charset="0"/>
+              <a:cs typeface="Calibri" panose="020F0502020204030204" pitchFamily="34" charset="0"/>
+            </a:endParaRPr>
           </a:p>
           <a:p>
             <a:pPr>
@@ -5964,6 +5892,14 @@
               </a:rPr>
               <a:t>git fetch (&lt;remote&gt;) (--all) (--prune)</a:t>
             </a:r>
+            <a:endParaRPr lang="en-US" altLang="zh-CN" sz="800" b="1" dirty="0">
+              <a:solidFill>
+                <a:srgbClr val="FFFF00"/>
+              </a:solidFill>
+              <a:latin typeface="Siemens Slab" pitchFamily="2" charset="0"/>
+              <a:ea typeface="Calibri" panose="020F0502020204030204" pitchFamily="34" charset="0"/>
+              <a:cs typeface="Calibri" panose="020F0502020204030204" pitchFamily="34" charset="0"/>
+            </a:endParaRPr>
           </a:p>
           <a:p>
             <a:pPr>
@@ -5982,6 +5918,14 @@
               </a:rPr>
               <a:t>Download objects and refs from remote (no merge).</a:t>
             </a:r>
+            <a:endParaRPr lang="en-US" altLang="zh-CN" sz="800" dirty="0">
+              <a:solidFill>
+                <a:schemeClr val="bg1"/>
+              </a:solidFill>
+              <a:latin typeface="Siemens Slab" pitchFamily="2" charset="0"/>
+              <a:ea typeface="Calibri" panose="020F0502020204030204" pitchFamily="34" charset="0"/>
+              <a:cs typeface="Calibri" panose="020F0502020204030204" pitchFamily="34" charset="0"/>
+            </a:endParaRPr>
           </a:p>
           <a:p>
             <a:pPr>
@@ -6000,6 +5944,14 @@
               </a:rPr>
               <a:t>--all : Fetch all remotes</a:t>
             </a:r>
+            <a:endParaRPr lang="en-US" altLang="zh-CN" sz="800" dirty="0">
+              <a:solidFill>
+                <a:schemeClr val="bg1"/>
+              </a:solidFill>
+              <a:latin typeface="Siemens Slab" pitchFamily="2" charset="0"/>
+              <a:ea typeface="Calibri" panose="020F0502020204030204" pitchFamily="34" charset="0"/>
+              <a:cs typeface="Calibri" panose="020F0502020204030204" pitchFamily="34" charset="0"/>
+            </a:endParaRPr>
           </a:p>
           <a:p>
             <a:pPr>
@@ -6018,6 +5970,14 @@
               </a:rPr>
               <a:t>--prune : Remove deleted remote branches locally</a:t>
             </a:r>
+            <a:endParaRPr lang="en-US" altLang="zh-CN" sz="800" dirty="0">
+              <a:solidFill>
+                <a:schemeClr val="bg1"/>
+              </a:solidFill>
+              <a:latin typeface="Siemens Slab" pitchFamily="2" charset="0"/>
+              <a:ea typeface="Calibri" panose="020F0502020204030204" pitchFamily="34" charset="0"/>
+              <a:cs typeface="Calibri" panose="020F0502020204030204" pitchFamily="34" charset="0"/>
+            </a:endParaRPr>
           </a:p>
           <a:p>
             <a:pPr>
@@ -6051,6 +6011,14 @@
               </a:rPr>
               <a:t>git pull (&lt;remote&gt; &lt;branch&gt;) (--rebase) (--ff-only) (--no-ff)</a:t>
             </a:r>
+            <a:endParaRPr lang="en-US" altLang="zh-CN" sz="800" b="1" dirty="0">
+              <a:solidFill>
+                <a:srgbClr val="FFFF00"/>
+              </a:solidFill>
+              <a:latin typeface="Siemens Slab" pitchFamily="2" charset="0"/>
+              <a:ea typeface="Calibri" panose="020F0502020204030204" pitchFamily="34" charset="0"/>
+              <a:cs typeface="Calibri" panose="020F0502020204030204" pitchFamily="34" charset="0"/>
+            </a:endParaRPr>
           </a:p>
           <a:p>
             <a:pPr>
@@ -6069,6 +6037,14 @@
               </a:rPr>
               <a:t>Fetch and integrate into current branch.</a:t>
             </a:r>
+            <a:endParaRPr lang="en-US" altLang="zh-CN" sz="800" dirty="0">
+              <a:solidFill>
+                <a:schemeClr val="bg1"/>
+              </a:solidFill>
+              <a:latin typeface="Siemens Slab" pitchFamily="2" charset="0"/>
+              <a:ea typeface="Calibri" panose="020F0502020204030204" pitchFamily="34" charset="0"/>
+              <a:cs typeface="Calibri" panose="020F0502020204030204" pitchFamily="34" charset="0"/>
+            </a:endParaRPr>
           </a:p>
           <a:p>
             <a:pPr>
@@ -6087,6 +6063,14 @@
               </a:rPr>
               <a:t>--rebase : Rebase instead of merge</a:t>
             </a:r>
+            <a:endParaRPr lang="en-US" altLang="zh-CN" sz="800" dirty="0">
+              <a:solidFill>
+                <a:schemeClr val="bg1"/>
+              </a:solidFill>
+              <a:latin typeface="Siemens Slab" pitchFamily="2" charset="0"/>
+              <a:ea typeface="Calibri" panose="020F0502020204030204" pitchFamily="34" charset="0"/>
+              <a:cs typeface="Calibri" panose="020F0502020204030204" pitchFamily="34" charset="0"/>
+            </a:endParaRPr>
           </a:p>
           <a:p>
             <a:pPr>
@@ -6105,6 +6089,14 @@
               </a:rPr>
               <a:t>--ff-only : Only allow fast-forward</a:t>
             </a:r>
+            <a:endParaRPr lang="en-US" altLang="zh-CN" sz="800" dirty="0">
+              <a:solidFill>
+                <a:schemeClr val="bg1"/>
+              </a:solidFill>
+              <a:latin typeface="Siemens Slab" pitchFamily="2" charset="0"/>
+              <a:ea typeface="Calibri" panose="020F0502020204030204" pitchFamily="34" charset="0"/>
+              <a:cs typeface="Calibri" panose="020F0502020204030204" pitchFamily="34" charset="0"/>
+            </a:endParaRPr>
           </a:p>
           <a:p>
             <a:pPr>
@@ -6123,6 +6115,14 @@
               </a:rPr>
               <a:t>--no-ff : Always create merge commit</a:t>
             </a:r>
+            <a:endParaRPr lang="en-US" altLang="zh-CN" sz="800" dirty="0">
+              <a:solidFill>
+                <a:schemeClr val="bg1"/>
+              </a:solidFill>
+              <a:latin typeface="Siemens Slab" pitchFamily="2" charset="0"/>
+              <a:ea typeface="Calibri" panose="020F0502020204030204" pitchFamily="34" charset="0"/>
+              <a:cs typeface="Calibri" panose="020F0502020204030204" pitchFamily="34" charset="0"/>
+            </a:endParaRPr>
           </a:p>
           <a:p>
             <a:pPr>
@@ -6156,6 +6156,14 @@
               </a:rPr>
               <a:t>git push (&lt;remote&gt; &lt;branch&gt;) (-u) (--force) (--force-with-lease) (--tags)</a:t>
             </a:r>
+            <a:endParaRPr lang="en-US" altLang="zh-CN" sz="800" b="1" dirty="0">
+              <a:solidFill>
+                <a:srgbClr val="FFFF00"/>
+              </a:solidFill>
+              <a:latin typeface="Siemens Slab" pitchFamily="2" charset="0"/>
+              <a:ea typeface="Calibri" panose="020F0502020204030204" pitchFamily="34" charset="0"/>
+              <a:cs typeface="Calibri" panose="020F0502020204030204" pitchFamily="34" charset="0"/>
+            </a:endParaRPr>
           </a:p>
           <a:p>
             <a:pPr>
@@ -6174,6 +6182,14 @@
               </a:rPr>
               <a:t>Upload local commits to remote.</a:t>
             </a:r>
+            <a:endParaRPr lang="en-US" altLang="zh-CN" sz="800" dirty="0">
+              <a:solidFill>
+                <a:schemeClr val="bg1"/>
+              </a:solidFill>
+              <a:latin typeface="Siemens Slab" pitchFamily="2" charset="0"/>
+              <a:ea typeface="Calibri" panose="020F0502020204030204" pitchFamily="34" charset="0"/>
+              <a:cs typeface="Calibri" panose="020F0502020204030204" pitchFamily="34" charset="0"/>
+            </a:endParaRPr>
           </a:p>
           <a:p>
             <a:pPr>
@@ -6192,6 +6208,14 @@
               </a:rPr>
               <a:t>-u : Set upstream tracking branch</a:t>
             </a:r>
+            <a:endParaRPr lang="en-US" altLang="zh-CN" sz="800" dirty="0">
+              <a:solidFill>
+                <a:schemeClr val="bg1"/>
+              </a:solidFill>
+              <a:latin typeface="Siemens Slab" pitchFamily="2" charset="0"/>
+              <a:ea typeface="Calibri" panose="020F0502020204030204" pitchFamily="34" charset="0"/>
+              <a:cs typeface="Calibri" panose="020F0502020204030204" pitchFamily="34" charset="0"/>
+            </a:endParaRPr>
           </a:p>
           <a:p>
             <a:pPr>
@@ -6210,6 +6234,14 @@
               </a:rPr>
               <a:t>--force : Overwrite remote history</a:t>
             </a:r>
+            <a:endParaRPr lang="en-US" altLang="zh-CN" sz="800" dirty="0">
+              <a:solidFill>
+                <a:schemeClr val="bg1"/>
+              </a:solidFill>
+              <a:latin typeface="Siemens Slab" pitchFamily="2" charset="0"/>
+              <a:ea typeface="Calibri" panose="020F0502020204030204" pitchFamily="34" charset="0"/>
+              <a:cs typeface="Calibri" panose="020F0502020204030204" pitchFamily="34" charset="0"/>
+            </a:endParaRPr>
           </a:p>
           <a:p>
             <a:pPr>
@@ -6228,6 +6260,14 @@
               </a:rPr>
               <a:t>--force-with-lease : Safer force push</a:t>
             </a:r>
+            <a:endParaRPr lang="en-US" altLang="zh-CN" sz="800" dirty="0">
+              <a:solidFill>
+                <a:schemeClr val="bg1"/>
+              </a:solidFill>
+              <a:latin typeface="Siemens Slab" pitchFamily="2" charset="0"/>
+              <a:ea typeface="Calibri" panose="020F0502020204030204" pitchFamily="34" charset="0"/>
+              <a:cs typeface="Calibri" panose="020F0502020204030204" pitchFamily="34" charset="0"/>
+            </a:endParaRPr>
           </a:p>
           <a:p>
             <a:pPr>
@@ -6246,6 +6286,14 @@
               </a:rPr>
               <a:t>--tags : Push all tags</a:t>
             </a:r>
+            <a:endParaRPr lang="en-US" altLang="zh-CN" sz="800" dirty="0">
+              <a:solidFill>
+                <a:schemeClr val="bg1"/>
+              </a:solidFill>
+              <a:latin typeface="Siemens Slab" pitchFamily="2" charset="0"/>
+              <a:ea typeface="Calibri" panose="020F0502020204030204" pitchFamily="34" charset="0"/>
+              <a:cs typeface="Calibri" panose="020F0502020204030204" pitchFamily="34" charset="0"/>
+            </a:endParaRPr>
           </a:p>
           <a:p>
             <a:pPr>
@@ -6279,6 +6327,14 @@
               </a:rPr>
               <a:t>git push &lt;remote&gt; --delete &lt;branch&gt;</a:t>
             </a:r>
+            <a:endParaRPr lang="en-US" altLang="zh-CN" sz="800" b="1" dirty="0">
+              <a:solidFill>
+                <a:srgbClr val="FFFF00"/>
+              </a:solidFill>
+              <a:latin typeface="Siemens Slab" pitchFamily="2" charset="0"/>
+              <a:ea typeface="Calibri" panose="020F0502020204030204" pitchFamily="34" charset="0"/>
+              <a:cs typeface="Calibri" panose="020F0502020204030204" pitchFamily="34" charset="0"/>
+            </a:endParaRPr>
           </a:p>
           <a:p>
             <a:pPr>
@@ -6297,6 +6353,14 @@
               </a:rPr>
               <a:t>Delete remote branch.</a:t>
             </a:r>
+            <a:endParaRPr lang="en-US" altLang="zh-CN" sz="800" dirty="0">
+              <a:solidFill>
+                <a:schemeClr val="bg1"/>
+              </a:solidFill>
+              <a:latin typeface="Siemens Slab" pitchFamily="2" charset="0"/>
+              <a:ea typeface="Calibri" panose="020F0502020204030204" pitchFamily="34" charset="0"/>
+              <a:cs typeface="Calibri" panose="020F0502020204030204" pitchFamily="34" charset="0"/>
+            </a:endParaRPr>
           </a:p>
           <a:p>
             <a:pPr>
@@ -6367,6 +6431,14 @@
               </a:rPr>
               <a:t>Show tracking branch and ahead/behind status.</a:t>
             </a:r>
+            <a:endParaRPr lang="en-US" altLang="zh-CN" sz="800" dirty="0">
+              <a:solidFill>
+                <a:schemeClr val="bg1"/>
+              </a:solidFill>
+              <a:latin typeface="Siemens Slab" pitchFamily="2" charset="0"/>
+              <a:ea typeface="Calibri" panose="020F0502020204030204" pitchFamily="34" charset="0"/>
+              <a:cs typeface="Calibri" panose="020F0502020204030204" pitchFamily="34" charset="0"/>
+            </a:endParaRPr>
           </a:p>
           <a:p>
             <a:pPr>
@@ -6400,6 +6472,14 @@
               </a:rPr>
               <a:t>git ls-remote</a:t>
             </a:r>
+            <a:endParaRPr lang="en-US" altLang="zh-CN" sz="800" b="1" dirty="0">
+              <a:solidFill>
+                <a:srgbClr val="FFFF00"/>
+              </a:solidFill>
+              <a:latin typeface="Siemens Slab" pitchFamily="2" charset="0"/>
+              <a:ea typeface="Calibri" panose="020F0502020204030204" pitchFamily="34" charset="0"/>
+              <a:cs typeface="Calibri" panose="020F0502020204030204" pitchFamily="34" charset="0"/>
+            </a:endParaRPr>
           </a:p>
           <a:p>
             <a:pPr>
@@ -6418,18 +6498,20 @@
               </a:rPr>
               <a:t>List remote refs without cloning.</a:t>
             </a:r>
+            <a:endParaRPr lang="en-US" altLang="zh-CN" sz="800" dirty="0">
+              <a:solidFill>
+                <a:schemeClr val="bg1"/>
+              </a:solidFill>
+              <a:latin typeface="Siemens Slab" pitchFamily="2" charset="0"/>
+              <a:ea typeface="Calibri" panose="020F0502020204030204" pitchFamily="34" charset="0"/>
+              <a:cs typeface="Calibri" panose="020F0502020204030204" pitchFamily="34" charset="0"/>
+            </a:endParaRPr>
           </a:p>
         </p:txBody>
       </p:sp>
       <p:sp>
         <p:nvSpPr>
-          <p:cNvPr id="11" name="文本框 10">
-            <a:extLst>
-              <a:ext uri="{FF2B5EF4-FFF2-40B4-BE49-F238E27FC236}">
-                <a16:creationId xmlns:a16="http://schemas.microsoft.com/office/drawing/2014/main" id="{18AE7C62-D51C-07A2-0CEF-065ED601BB95}"/>
-              </a:ext>
-            </a:extLst>
-          </p:cNvPr>
+          <p:cNvPr id="11" name="文本框 10"/>
           <p:cNvSpPr txBox="1"/>
           <p:nvPr/>
         </p:nvSpPr>
@@ -6470,6 +6552,14 @@
               </a:rPr>
               <a:t>git restore &lt;file&gt;</a:t>
             </a:r>
+            <a:endParaRPr lang="en-US" altLang="zh-CN" sz="800" b="1" dirty="0">
+              <a:solidFill>
+                <a:srgbClr val="FFFF00"/>
+              </a:solidFill>
+              <a:latin typeface="Siemens Slab" pitchFamily="2" charset="0"/>
+              <a:ea typeface="Calibri" panose="020F0502020204030204" pitchFamily="34" charset="0"/>
+              <a:cs typeface="Calibri" panose="020F0502020204030204" pitchFamily="34" charset="0"/>
+            </a:endParaRPr>
           </a:p>
           <a:p>
             <a:pPr>
@@ -6488,6 +6578,14 @@
               </a:rPr>
               <a:t>Restore working directory changes.</a:t>
             </a:r>
+            <a:endParaRPr lang="en-US" altLang="zh-CN" sz="800" dirty="0">
+              <a:solidFill>
+                <a:schemeClr val="bg1"/>
+              </a:solidFill>
+              <a:latin typeface="Siemens Slab" pitchFamily="2" charset="0"/>
+              <a:ea typeface="Calibri" panose="020F0502020204030204" pitchFamily="34" charset="0"/>
+              <a:cs typeface="Calibri" panose="020F0502020204030204" pitchFamily="34" charset="0"/>
+            </a:endParaRPr>
           </a:p>
           <a:p>
             <a:pPr>
@@ -6528,6 +6626,14 @@
               </a:rPr>
               <a:t> file (move from staging back to working area)</a:t>
             </a:r>
+            <a:endParaRPr lang="en-US" altLang="zh-CN" sz="800" dirty="0">
+              <a:solidFill>
+                <a:schemeClr val="bg1"/>
+              </a:solidFill>
+              <a:latin typeface="Siemens Slab" pitchFamily="2" charset="0"/>
+              <a:ea typeface="Calibri" panose="020F0502020204030204" pitchFamily="34" charset="0"/>
+              <a:cs typeface="Calibri" panose="020F0502020204030204" pitchFamily="34" charset="0"/>
+            </a:endParaRPr>
           </a:p>
           <a:p>
             <a:pPr>
@@ -6546,6 +6652,14 @@
               </a:rPr>
               <a:t>--source=&lt;commit&gt; : Restore from specific commit</a:t>
             </a:r>
+            <a:endParaRPr lang="en-US" altLang="zh-CN" sz="800" dirty="0">
+              <a:solidFill>
+                <a:schemeClr val="bg1"/>
+              </a:solidFill>
+              <a:latin typeface="Siemens Slab" pitchFamily="2" charset="0"/>
+              <a:ea typeface="Calibri" panose="020F0502020204030204" pitchFamily="34" charset="0"/>
+              <a:cs typeface="Calibri" panose="020F0502020204030204" pitchFamily="34" charset="0"/>
+            </a:endParaRPr>
           </a:p>
           <a:p>
             <a:pPr>
@@ -6579,6 +6693,14 @@
               </a:rPr>
               <a:t>git reset &lt;commit&gt; (--soft) (--mixed) (--hard)</a:t>
             </a:r>
+            <a:endParaRPr lang="en-US" altLang="zh-CN" sz="800" b="1" dirty="0">
+              <a:solidFill>
+                <a:srgbClr val="FFFF00"/>
+              </a:solidFill>
+              <a:latin typeface="Siemens Slab" pitchFamily="2" charset="0"/>
+              <a:ea typeface="Calibri" panose="020F0502020204030204" pitchFamily="34" charset="0"/>
+              <a:cs typeface="Calibri" panose="020F0502020204030204" pitchFamily="34" charset="0"/>
+            </a:endParaRPr>
           </a:p>
           <a:p>
             <a:pPr>
@@ -6597,6 +6719,14 @@
               </a:rPr>
               <a:t>Move current branch pointer (HEAD) to specified commit.</a:t>
             </a:r>
+            <a:endParaRPr lang="en-US" altLang="zh-CN" sz="800" dirty="0">
+              <a:solidFill>
+                <a:schemeClr val="bg1"/>
+              </a:solidFill>
+              <a:latin typeface="Siemens Slab" pitchFamily="2" charset="0"/>
+              <a:ea typeface="Calibri" panose="020F0502020204030204" pitchFamily="34" charset="0"/>
+              <a:cs typeface="Calibri" panose="020F0502020204030204" pitchFamily="34" charset="0"/>
+            </a:endParaRPr>
           </a:p>
           <a:p>
             <a:pPr>
@@ -6615,6 +6745,14 @@
               </a:rPr>
               <a:t>--soft : Keep changes staged</a:t>
             </a:r>
+            <a:endParaRPr lang="en-US" altLang="zh-CN" sz="800" dirty="0">
+              <a:solidFill>
+                <a:schemeClr val="bg1"/>
+              </a:solidFill>
+              <a:latin typeface="Siemens Slab" pitchFamily="2" charset="0"/>
+              <a:ea typeface="Calibri" panose="020F0502020204030204" pitchFamily="34" charset="0"/>
+              <a:cs typeface="Calibri" panose="020F0502020204030204" pitchFamily="34" charset="0"/>
+            </a:endParaRPr>
           </a:p>
           <a:p>
             <a:pPr>
@@ -6633,6 +6771,14 @@
               </a:rPr>
               <a:t>--mixed : Keep changes in working directory (default)</a:t>
             </a:r>
+            <a:endParaRPr lang="en-US" altLang="zh-CN" sz="800" dirty="0">
+              <a:solidFill>
+                <a:schemeClr val="bg1"/>
+              </a:solidFill>
+              <a:latin typeface="Siemens Slab" pitchFamily="2" charset="0"/>
+              <a:ea typeface="Calibri" panose="020F0502020204030204" pitchFamily="34" charset="0"/>
+              <a:cs typeface="Calibri" panose="020F0502020204030204" pitchFamily="34" charset="0"/>
+            </a:endParaRPr>
           </a:p>
           <a:p>
             <a:pPr>
@@ -6651,6 +6797,14 @@
               </a:rPr>
               <a:t>--hard : Discard all changes (dangerous)</a:t>
             </a:r>
+            <a:endParaRPr lang="en-US" altLang="zh-CN" sz="800" dirty="0">
+              <a:solidFill>
+                <a:schemeClr val="bg1"/>
+              </a:solidFill>
+              <a:latin typeface="Siemens Slab" pitchFamily="2" charset="0"/>
+              <a:ea typeface="Calibri" panose="020F0502020204030204" pitchFamily="34" charset="0"/>
+              <a:cs typeface="Calibri" panose="020F0502020204030204" pitchFamily="34" charset="0"/>
+            </a:endParaRPr>
           </a:p>
           <a:p>
             <a:pPr>
@@ -6684,6 +6838,14 @@
               </a:rPr>
               <a:t>git revert &lt;commit&gt;</a:t>
             </a:r>
+            <a:endParaRPr lang="en-US" altLang="zh-CN" sz="800" b="1" dirty="0">
+              <a:solidFill>
+                <a:srgbClr val="FFFF00"/>
+              </a:solidFill>
+              <a:latin typeface="Siemens Slab" pitchFamily="2" charset="0"/>
+              <a:ea typeface="Calibri" panose="020F0502020204030204" pitchFamily="34" charset="0"/>
+              <a:cs typeface="Calibri" panose="020F0502020204030204" pitchFamily="34" charset="0"/>
+            </a:endParaRPr>
           </a:p>
           <a:p>
             <a:pPr>
@@ -6702,6 +6864,14 @@
               </a:rPr>
               <a:t>Create a new commit that reverses specified commit.</a:t>
             </a:r>
+            <a:endParaRPr lang="en-US" altLang="zh-CN" sz="800" dirty="0">
+              <a:solidFill>
+                <a:schemeClr val="bg1"/>
+              </a:solidFill>
+              <a:latin typeface="Siemens Slab" pitchFamily="2" charset="0"/>
+              <a:ea typeface="Calibri" panose="020F0502020204030204" pitchFamily="34" charset="0"/>
+              <a:cs typeface="Calibri" panose="020F0502020204030204" pitchFamily="34" charset="0"/>
+            </a:endParaRPr>
           </a:p>
           <a:p>
             <a:pPr>
@@ -6720,6 +6890,14 @@
               </a:rPr>
               <a:t>--no-edit : Skip commit message editor</a:t>
             </a:r>
+            <a:endParaRPr lang="en-US" altLang="zh-CN" sz="800" dirty="0">
+              <a:solidFill>
+                <a:schemeClr val="bg1"/>
+              </a:solidFill>
+              <a:latin typeface="Siemens Slab" pitchFamily="2" charset="0"/>
+              <a:ea typeface="Calibri" panose="020F0502020204030204" pitchFamily="34" charset="0"/>
+              <a:cs typeface="Calibri" panose="020F0502020204030204" pitchFamily="34" charset="0"/>
+            </a:endParaRPr>
           </a:p>
           <a:p>
             <a:pPr>
@@ -6753,6 +6931,14 @@
               </a:rPr>
               <a:t>git commit --amend</a:t>
             </a:r>
+            <a:endParaRPr lang="en-US" altLang="zh-CN" sz="800" b="1" dirty="0">
+              <a:solidFill>
+                <a:srgbClr val="FFFF00"/>
+              </a:solidFill>
+              <a:latin typeface="Siemens Slab" pitchFamily="2" charset="0"/>
+              <a:ea typeface="Calibri" panose="020F0502020204030204" pitchFamily="34" charset="0"/>
+              <a:cs typeface="Calibri" panose="020F0502020204030204" pitchFamily="34" charset="0"/>
+            </a:endParaRPr>
           </a:p>
           <a:p>
             <a:pPr>
@@ -6771,6 +6957,14 @@
               </a:rPr>
               <a:t>Modify last commit (message or staged content).</a:t>
             </a:r>
+            <a:endParaRPr lang="en-US" altLang="zh-CN" sz="800" dirty="0">
+              <a:solidFill>
+                <a:schemeClr val="bg1"/>
+              </a:solidFill>
+              <a:latin typeface="Siemens Slab" pitchFamily="2" charset="0"/>
+              <a:ea typeface="Calibri" panose="020F0502020204030204" pitchFamily="34" charset="0"/>
+              <a:cs typeface="Calibri" panose="020F0502020204030204" pitchFamily="34" charset="0"/>
+            </a:endParaRPr>
           </a:p>
           <a:p>
             <a:pPr>
@@ -6841,6 +7035,14 @@
               </a:rPr>
               <a:t>Show HEAD movement history (including resets and rebases).</a:t>
             </a:r>
+            <a:endParaRPr lang="en-US" altLang="zh-CN" sz="800" dirty="0">
+              <a:solidFill>
+                <a:schemeClr val="bg1"/>
+              </a:solidFill>
+              <a:latin typeface="Siemens Slab" pitchFamily="2" charset="0"/>
+              <a:ea typeface="Calibri" panose="020F0502020204030204" pitchFamily="34" charset="0"/>
+              <a:cs typeface="Calibri" panose="020F0502020204030204" pitchFamily="34" charset="0"/>
+            </a:endParaRPr>
           </a:p>
           <a:p>
             <a:pPr>
@@ -6874,6 +7076,14 @@
               </a:rPr>
               <a:t>git clean (-n) (-f) (-d)</a:t>
             </a:r>
+            <a:endParaRPr lang="en-US" altLang="zh-CN" sz="800" b="1" dirty="0">
+              <a:solidFill>
+                <a:srgbClr val="FFFF00"/>
+              </a:solidFill>
+              <a:latin typeface="Siemens Slab" pitchFamily="2" charset="0"/>
+              <a:ea typeface="Calibri" panose="020F0502020204030204" pitchFamily="34" charset="0"/>
+              <a:cs typeface="Calibri" panose="020F0502020204030204" pitchFamily="34" charset="0"/>
+            </a:endParaRPr>
           </a:p>
           <a:p>
             <a:pPr>
@@ -6892,6 +7102,14 @@
               </a:rPr>
               <a:t>Remove untracked files.</a:t>
             </a:r>
+            <a:endParaRPr lang="en-US" altLang="zh-CN" sz="800" dirty="0">
+              <a:solidFill>
+                <a:schemeClr val="bg1"/>
+              </a:solidFill>
+              <a:latin typeface="Siemens Slab" pitchFamily="2" charset="0"/>
+              <a:ea typeface="Calibri" panose="020F0502020204030204" pitchFamily="34" charset="0"/>
+              <a:cs typeface="Calibri" panose="020F0502020204030204" pitchFamily="34" charset="0"/>
+            </a:endParaRPr>
           </a:p>
           <a:p>
             <a:pPr>
@@ -6910,6 +7128,14 @@
               </a:rPr>
               <a:t>-n : Dry run</a:t>
             </a:r>
+            <a:endParaRPr lang="en-US" altLang="zh-CN" sz="800" dirty="0">
+              <a:solidFill>
+                <a:schemeClr val="bg1"/>
+              </a:solidFill>
+              <a:latin typeface="Siemens Slab" pitchFamily="2" charset="0"/>
+              <a:ea typeface="Calibri" panose="020F0502020204030204" pitchFamily="34" charset="0"/>
+              <a:cs typeface="Calibri" panose="020F0502020204030204" pitchFamily="34" charset="0"/>
+            </a:endParaRPr>
           </a:p>
           <a:p>
             <a:pPr>
@@ -6928,6 +7154,14 @@
               </a:rPr>
               <a:t>-f : Force</a:t>
             </a:r>
+            <a:endParaRPr lang="en-US" altLang="zh-CN" sz="800" dirty="0">
+              <a:solidFill>
+                <a:schemeClr val="bg1"/>
+              </a:solidFill>
+              <a:latin typeface="Siemens Slab" pitchFamily="2" charset="0"/>
+              <a:ea typeface="Calibri" panose="020F0502020204030204" pitchFamily="34" charset="0"/>
+              <a:cs typeface="Calibri" panose="020F0502020204030204" pitchFamily="34" charset="0"/>
+            </a:endParaRPr>
           </a:p>
           <a:p>
             <a:pPr>
@@ -6946,6 +7180,14 @@
               </a:rPr>
               <a:t>-d : Include directories</a:t>
             </a:r>
+            <a:endParaRPr lang="en-US" altLang="zh-CN" sz="800" dirty="0">
+              <a:solidFill>
+                <a:schemeClr val="bg1"/>
+              </a:solidFill>
+              <a:latin typeface="Siemens Slab" pitchFamily="2" charset="0"/>
+              <a:ea typeface="Calibri" panose="020F0502020204030204" pitchFamily="34" charset="0"/>
+              <a:cs typeface="Calibri" panose="020F0502020204030204" pitchFamily="34" charset="0"/>
+            </a:endParaRPr>
           </a:p>
           <a:p>
             <a:pPr>
@@ -6979,6 +7221,14 @@
               </a:rPr>
               <a:t>git stash (push) (-u) (-a)</a:t>
             </a:r>
+            <a:endParaRPr lang="en-US" altLang="zh-CN" sz="800" b="1" dirty="0">
+              <a:solidFill>
+                <a:srgbClr val="FFFF00"/>
+              </a:solidFill>
+              <a:latin typeface="Siemens Slab" pitchFamily="2" charset="0"/>
+              <a:ea typeface="Calibri" panose="020F0502020204030204" pitchFamily="34" charset="0"/>
+              <a:cs typeface="Calibri" panose="020F0502020204030204" pitchFamily="34" charset="0"/>
+            </a:endParaRPr>
           </a:p>
           <a:p>
             <a:pPr>
@@ -6997,6 +7247,14 @@
               </a:rPr>
               <a:t>Temporarily save uncommitted changes.</a:t>
             </a:r>
+            <a:endParaRPr lang="en-US" altLang="zh-CN" sz="800" dirty="0">
+              <a:solidFill>
+                <a:schemeClr val="bg1"/>
+              </a:solidFill>
+              <a:latin typeface="Siemens Slab" pitchFamily="2" charset="0"/>
+              <a:ea typeface="Calibri" panose="020F0502020204030204" pitchFamily="34" charset="0"/>
+              <a:cs typeface="Calibri" panose="020F0502020204030204" pitchFamily="34" charset="0"/>
+            </a:endParaRPr>
           </a:p>
           <a:p>
             <a:pPr>
@@ -7015,6 +7273,14 @@
               </a:rPr>
               <a:t>-u : Include untracked files</a:t>
             </a:r>
+            <a:endParaRPr lang="en-US" altLang="zh-CN" sz="800" dirty="0">
+              <a:solidFill>
+                <a:schemeClr val="bg1"/>
+              </a:solidFill>
+              <a:latin typeface="Siemens Slab" pitchFamily="2" charset="0"/>
+              <a:ea typeface="Calibri" panose="020F0502020204030204" pitchFamily="34" charset="0"/>
+              <a:cs typeface="Calibri" panose="020F0502020204030204" pitchFamily="34" charset="0"/>
+            </a:endParaRPr>
           </a:p>
           <a:p>
             <a:pPr>
@@ -7033,6 +7299,14 @@
               </a:rPr>
               <a:t>-a : Include ignored files</a:t>
             </a:r>
+            <a:endParaRPr lang="en-US" altLang="zh-CN" sz="800" dirty="0">
+              <a:solidFill>
+                <a:schemeClr val="bg1"/>
+              </a:solidFill>
+              <a:latin typeface="Siemens Slab" pitchFamily="2" charset="0"/>
+              <a:ea typeface="Calibri" panose="020F0502020204030204" pitchFamily="34" charset="0"/>
+              <a:cs typeface="Calibri" panose="020F0502020204030204" pitchFamily="34" charset="0"/>
+            </a:endParaRPr>
           </a:p>
           <a:p>
             <a:pPr>
@@ -7066,6 +7340,14 @@
               </a:rPr>
               <a:t>git stash pop</a:t>
             </a:r>
+            <a:endParaRPr lang="en-US" altLang="zh-CN" sz="800" b="1" dirty="0">
+              <a:solidFill>
+                <a:srgbClr val="FFFF00"/>
+              </a:solidFill>
+              <a:latin typeface="Siemens Slab" pitchFamily="2" charset="0"/>
+              <a:ea typeface="Calibri" panose="020F0502020204030204" pitchFamily="34" charset="0"/>
+              <a:cs typeface="Calibri" panose="020F0502020204030204" pitchFamily="34" charset="0"/>
+            </a:endParaRPr>
           </a:p>
           <a:p>
             <a:pPr>
@@ -7084,6 +7366,14 @@
               </a:rPr>
               <a:t>Apply latest stash and remove it.</a:t>
             </a:r>
+            <a:endParaRPr lang="en-US" altLang="zh-CN" sz="800" dirty="0">
+              <a:solidFill>
+                <a:schemeClr val="bg1"/>
+              </a:solidFill>
+              <a:latin typeface="Siemens Slab" pitchFamily="2" charset="0"/>
+              <a:ea typeface="Calibri" panose="020F0502020204030204" pitchFamily="34" charset="0"/>
+              <a:cs typeface="Calibri" panose="020F0502020204030204" pitchFamily="34" charset="0"/>
+            </a:endParaRPr>
           </a:p>
           <a:p>
             <a:pPr>
@@ -7117,6 +7407,14 @@
               </a:rPr>
               <a:t>git stash apply (&lt;stash@{n}&gt;)</a:t>
             </a:r>
+            <a:endParaRPr lang="en-US" altLang="zh-CN" sz="800" b="1" dirty="0">
+              <a:solidFill>
+                <a:srgbClr val="FFFF00"/>
+              </a:solidFill>
+              <a:latin typeface="Siemens Slab" pitchFamily="2" charset="0"/>
+              <a:ea typeface="Calibri" panose="020F0502020204030204" pitchFamily="34" charset="0"/>
+              <a:cs typeface="Calibri" panose="020F0502020204030204" pitchFamily="34" charset="0"/>
+            </a:endParaRPr>
           </a:p>
           <a:p>
             <a:pPr>
@@ -7135,6 +7433,14 @@
               </a:rPr>
               <a:t>Apply stash without removing it.</a:t>
             </a:r>
+            <a:endParaRPr lang="en-US" altLang="zh-CN" sz="800" dirty="0">
+              <a:solidFill>
+                <a:schemeClr val="bg1"/>
+              </a:solidFill>
+              <a:latin typeface="Siemens Slab" pitchFamily="2" charset="0"/>
+              <a:ea typeface="Calibri" panose="020F0502020204030204" pitchFamily="34" charset="0"/>
+              <a:cs typeface="Calibri" panose="020F0502020204030204" pitchFamily="34" charset="0"/>
+            </a:endParaRPr>
           </a:p>
           <a:p>
             <a:pPr>
@@ -7168,6 +7474,14 @@
               </a:rPr>
               <a:t>git stash list</a:t>
             </a:r>
+            <a:endParaRPr lang="en-US" altLang="zh-CN" sz="800" b="1" dirty="0">
+              <a:solidFill>
+                <a:srgbClr val="FFFF00"/>
+              </a:solidFill>
+              <a:latin typeface="Siemens Slab" pitchFamily="2" charset="0"/>
+              <a:ea typeface="Calibri" panose="020F0502020204030204" pitchFamily="34" charset="0"/>
+              <a:cs typeface="Calibri" panose="020F0502020204030204" pitchFamily="34" charset="0"/>
+            </a:endParaRPr>
           </a:p>
           <a:p>
             <a:pPr>
@@ -7186,6 +7500,14 @@
               </a:rPr>
               <a:t>List saved stashes.</a:t>
             </a:r>
+            <a:endParaRPr lang="en-US" altLang="zh-CN" sz="800" dirty="0">
+              <a:solidFill>
+                <a:schemeClr val="bg1"/>
+              </a:solidFill>
+              <a:latin typeface="Siemens Slab" pitchFamily="2" charset="0"/>
+              <a:ea typeface="Calibri" panose="020F0502020204030204" pitchFamily="34" charset="0"/>
+              <a:cs typeface="Calibri" panose="020F0502020204030204" pitchFamily="34" charset="0"/>
+            </a:endParaRPr>
           </a:p>
           <a:p>
             <a:pPr>
@@ -7219,6 +7541,14 @@
               </a:rPr>
               <a:t>git stash drop (&lt;stash@{n}&gt;)</a:t>
             </a:r>
+            <a:endParaRPr lang="en-US" altLang="zh-CN" sz="800" b="1" dirty="0">
+              <a:solidFill>
+                <a:srgbClr val="FFFF00"/>
+              </a:solidFill>
+              <a:latin typeface="Siemens Slab" pitchFamily="2" charset="0"/>
+              <a:ea typeface="Calibri" panose="020F0502020204030204" pitchFamily="34" charset="0"/>
+              <a:cs typeface="Calibri" panose="020F0502020204030204" pitchFamily="34" charset="0"/>
+            </a:endParaRPr>
           </a:p>
           <a:p>
             <a:pPr>
@@ -7237,18 +7567,20 @@
               </a:rPr>
               <a:t>Delete stash entry.</a:t>
             </a:r>
+            <a:endParaRPr lang="en-US" altLang="zh-CN" sz="800" dirty="0">
+              <a:solidFill>
+                <a:schemeClr val="bg1"/>
+              </a:solidFill>
+              <a:latin typeface="Siemens Slab" pitchFamily="2" charset="0"/>
+              <a:ea typeface="Calibri" panose="020F0502020204030204" pitchFamily="34" charset="0"/>
+              <a:cs typeface="Calibri" panose="020F0502020204030204" pitchFamily="34" charset="0"/>
+            </a:endParaRPr>
           </a:p>
         </p:txBody>
       </p:sp>
       <p:sp>
         <p:nvSpPr>
-          <p:cNvPr id="12" name="文本框 11">
-            <a:extLst>
-              <a:ext uri="{FF2B5EF4-FFF2-40B4-BE49-F238E27FC236}">
-                <a16:creationId xmlns:a16="http://schemas.microsoft.com/office/drawing/2014/main" id="{47B11D5B-9FE2-0F3F-B3E1-83270793A6C9}"/>
-              </a:ext>
-            </a:extLst>
-          </p:cNvPr>
+          <p:cNvPr id="12" name="文本框 11"/>
           <p:cNvSpPr txBox="1"/>
           <p:nvPr/>
         </p:nvSpPr>
@@ -7311,6 +7643,14 @@
               </a:rPr>
               <a:t>&gt; (&lt;path&gt;)</a:t>
             </a:r>
+            <a:endParaRPr lang="en-US" altLang="zh-CN" sz="800" b="1" dirty="0">
+              <a:solidFill>
+                <a:srgbClr val="FFFF00"/>
+              </a:solidFill>
+              <a:latin typeface="Siemens Slab" pitchFamily="2" charset="0"/>
+              <a:ea typeface="Calibri" panose="020F0502020204030204" pitchFamily="34" charset="0"/>
+              <a:cs typeface="Calibri" panose="020F0502020204030204" pitchFamily="34" charset="0"/>
+            </a:endParaRPr>
           </a:p>
           <a:p>
             <a:pPr>
@@ -7329,6 +7669,14 @@
               </a:rPr>
               <a:t>Add a submodule to current repository.</a:t>
             </a:r>
+            <a:endParaRPr lang="en-US" altLang="zh-CN" sz="800" dirty="0">
+              <a:solidFill>
+                <a:schemeClr val="bg1"/>
+              </a:solidFill>
+              <a:latin typeface="Siemens Slab" pitchFamily="2" charset="0"/>
+              <a:ea typeface="Calibri" panose="020F0502020204030204" pitchFamily="34" charset="0"/>
+              <a:cs typeface="Calibri" panose="020F0502020204030204" pitchFamily="34" charset="0"/>
+            </a:endParaRPr>
           </a:p>
           <a:p>
             <a:pPr>
@@ -7399,6 +7747,14 @@
               </a:rPr>
               <a:t>Initialize submodule configuration (after clone).</a:t>
             </a:r>
+            <a:endParaRPr lang="en-US" altLang="zh-CN" sz="800" dirty="0">
+              <a:solidFill>
+                <a:schemeClr val="bg1"/>
+              </a:solidFill>
+              <a:latin typeface="Siemens Slab" pitchFamily="2" charset="0"/>
+              <a:ea typeface="Calibri" panose="020F0502020204030204" pitchFamily="34" charset="0"/>
+              <a:cs typeface="Calibri" panose="020F0502020204030204" pitchFamily="34" charset="0"/>
+            </a:endParaRPr>
           </a:p>
           <a:p>
             <a:pPr>
@@ -7454,6 +7810,14 @@
               </a:rPr>
               <a:t>) (--recursive)</a:t>
             </a:r>
+            <a:endParaRPr lang="en-US" altLang="zh-CN" sz="800" b="1" dirty="0">
+              <a:solidFill>
+                <a:srgbClr val="FFFF00"/>
+              </a:solidFill>
+              <a:latin typeface="Siemens Slab" pitchFamily="2" charset="0"/>
+              <a:ea typeface="Calibri" panose="020F0502020204030204" pitchFamily="34" charset="0"/>
+              <a:cs typeface="Calibri" panose="020F0502020204030204" pitchFamily="34" charset="0"/>
+            </a:endParaRPr>
           </a:p>
           <a:p>
             <a:pPr>
@@ -7472,6 +7836,14 @@
               </a:rPr>
               <a:t>Checkout submodule to recorded commit.</a:t>
             </a:r>
+            <a:endParaRPr lang="en-US" altLang="zh-CN" sz="800" dirty="0">
+              <a:solidFill>
+                <a:schemeClr val="bg1"/>
+              </a:solidFill>
+              <a:latin typeface="Siemens Slab" pitchFamily="2" charset="0"/>
+              <a:ea typeface="Calibri" panose="020F0502020204030204" pitchFamily="34" charset="0"/>
+              <a:cs typeface="Calibri" panose="020F0502020204030204" pitchFamily="34" charset="0"/>
+            </a:endParaRPr>
           </a:p>
           <a:p>
             <a:pPr>
@@ -7512,6 +7884,14 @@
               </a:rPr>
               <a:t> : Initialize if not yet initialized</a:t>
             </a:r>
+            <a:endParaRPr lang="en-US" altLang="zh-CN" sz="800" dirty="0">
+              <a:solidFill>
+                <a:schemeClr val="bg1"/>
+              </a:solidFill>
+              <a:latin typeface="Siemens Slab" pitchFamily="2" charset="0"/>
+              <a:ea typeface="Calibri" panose="020F0502020204030204" pitchFamily="34" charset="0"/>
+              <a:cs typeface="Calibri" panose="020F0502020204030204" pitchFamily="34" charset="0"/>
+            </a:endParaRPr>
           </a:p>
           <a:p>
             <a:pPr>
@@ -7530,6 +7910,14 @@
               </a:rPr>
               <a:t>--recursive : Include nested submodules</a:t>
             </a:r>
+            <a:endParaRPr lang="en-US" altLang="zh-CN" sz="800" dirty="0">
+              <a:solidFill>
+                <a:schemeClr val="bg1"/>
+              </a:solidFill>
+              <a:latin typeface="Siemens Slab" pitchFamily="2" charset="0"/>
+              <a:ea typeface="Calibri" panose="020F0502020204030204" pitchFamily="34" charset="0"/>
+              <a:cs typeface="Calibri" panose="020F0502020204030204" pitchFamily="34" charset="0"/>
+            </a:endParaRPr>
           </a:p>
           <a:p>
             <a:pPr>
@@ -7585,6 +7973,14 @@
               </a:rPr>
               <a:t>&gt; --recurse-submodules</a:t>
             </a:r>
+            <a:endParaRPr lang="en-US" altLang="zh-CN" sz="800" b="1" dirty="0">
+              <a:solidFill>
+                <a:srgbClr val="FFFF00"/>
+              </a:solidFill>
+              <a:latin typeface="Siemens Slab" pitchFamily="2" charset="0"/>
+              <a:ea typeface="Calibri" panose="020F0502020204030204" pitchFamily="34" charset="0"/>
+              <a:cs typeface="Calibri" panose="020F0502020204030204" pitchFamily="34" charset="0"/>
+            </a:endParaRPr>
           </a:p>
           <a:p>
             <a:pPr>
@@ -7603,6 +7999,14 @@
               </a:rPr>
               <a:t>Clone repository and automatically initialize/update submodules.</a:t>
             </a:r>
+            <a:endParaRPr lang="en-US" altLang="zh-CN" sz="800" dirty="0">
+              <a:solidFill>
+                <a:schemeClr val="bg1"/>
+              </a:solidFill>
+              <a:latin typeface="Siemens Slab" pitchFamily="2" charset="0"/>
+              <a:ea typeface="Calibri" panose="020F0502020204030204" pitchFamily="34" charset="0"/>
+              <a:cs typeface="Calibri" panose="020F0502020204030204" pitchFamily="34" charset="0"/>
+            </a:endParaRPr>
           </a:p>
           <a:p>
             <a:pPr>
@@ -7636,6 +8040,14 @@
               </a:rPr>
               <a:t>git submodule update --remote</a:t>
             </a:r>
+            <a:endParaRPr lang="en-US" altLang="zh-CN" sz="800" b="1" dirty="0">
+              <a:solidFill>
+                <a:srgbClr val="FFFF00"/>
+              </a:solidFill>
+              <a:latin typeface="Siemens Slab" pitchFamily="2" charset="0"/>
+              <a:ea typeface="Calibri" panose="020F0502020204030204" pitchFamily="34" charset="0"/>
+              <a:cs typeface="Calibri" panose="020F0502020204030204" pitchFamily="34" charset="0"/>
+            </a:endParaRPr>
           </a:p>
           <a:p>
             <a:pPr>
@@ -7654,6 +8066,14 @@
               </a:rPr>
               <a:t>Update submodule to latest commit of tracked branch.</a:t>
             </a:r>
+            <a:endParaRPr lang="en-US" altLang="zh-CN" sz="800" dirty="0">
+              <a:solidFill>
+                <a:schemeClr val="bg1"/>
+              </a:solidFill>
+              <a:latin typeface="Siemens Slab" pitchFamily="2" charset="0"/>
+              <a:ea typeface="Calibri" panose="020F0502020204030204" pitchFamily="34" charset="0"/>
+              <a:cs typeface="Calibri" panose="020F0502020204030204" pitchFamily="34" charset="0"/>
+            </a:endParaRPr>
           </a:p>
           <a:p>
             <a:pPr>
@@ -7687,6 +8107,14 @@
               </a:rPr>
               <a:t>git submodule foreach &lt;command&gt;</a:t>
             </a:r>
+            <a:endParaRPr lang="en-US" altLang="zh-CN" sz="800" b="1" dirty="0">
+              <a:solidFill>
+                <a:srgbClr val="FFFF00"/>
+              </a:solidFill>
+              <a:latin typeface="Siemens Slab" pitchFamily="2" charset="0"/>
+              <a:ea typeface="Calibri" panose="020F0502020204030204" pitchFamily="34" charset="0"/>
+              <a:cs typeface="Calibri" panose="020F0502020204030204" pitchFamily="34" charset="0"/>
+            </a:endParaRPr>
           </a:p>
           <a:p>
             <a:pPr>
@@ -7705,6 +8133,14 @@
               </a:rPr>
               <a:t>Run command inside each submodule.</a:t>
             </a:r>
+            <a:endParaRPr lang="en-US" altLang="zh-CN" sz="800" dirty="0">
+              <a:solidFill>
+                <a:schemeClr val="bg1"/>
+              </a:solidFill>
+              <a:latin typeface="Siemens Slab" pitchFamily="2" charset="0"/>
+              <a:ea typeface="Calibri" panose="020F0502020204030204" pitchFamily="34" charset="0"/>
+              <a:cs typeface="Calibri" panose="020F0502020204030204" pitchFamily="34" charset="0"/>
+            </a:endParaRPr>
           </a:p>
           <a:p>
             <a:pPr>
@@ -7738,6 +8174,14 @@
               </a:rPr>
               <a:t>git submodule status</a:t>
             </a:r>
+            <a:endParaRPr lang="en-US" altLang="zh-CN" sz="800" b="1" dirty="0">
+              <a:solidFill>
+                <a:srgbClr val="FFFF00"/>
+              </a:solidFill>
+              <a:latin typeface="Siemens Slab" pitchFamily="2" charset="0"/>
+              <a:ea typeface="Calibri" panose="020F0502020204030204" pitchFamily="34" charset="0"/>
+              <a:cs typeface="Calibri" panose="020F0502020204030204" pitchFamily="34" charset="0"/>
+            </a:endParaRPr>
           </a:p>
           <a:p>
             <a:pPr>
@@ -7756,6 +8200,14 @@
               </a:rPr>
               <a:t>Show submodule commit and state.</a:t>
             </a:r>
+            <a:endParaRPr lang="en-US" altLang="zh-CN" sz="800" dirty="0">
+              <a:solidFill>
+                <a:schemeClr val="bg1"/>
+              </a:solidFill>
+              <a:latin typeface="Siemens Slab" pitchFamily="2" charset="0"/>
+              <a:ea typeface="Calibri" panose="020F0502020204030204" pitchFamily="34" charset="0"/>
+              <a:cs typeface="Calibri" panose="020F0502020204030204" pitchFamily="34" charset="0"/>
+            </a:endParaRPr>
           </a:p>
           <a:p>
             <a:pPr>
@@ -7776,13 +8228,7 @@
       </p:sp>
       <p:sp>
         <p:nvSpPr>
-          <p:cNvPr id="15" name="文本框 14">
-            <a:extLst>
-              <a:ext uri="{FF2B5EF4-FFF2-40B4-BE49-F238E27FC236}">
-                <a16:creationId xmlns:a16="http://schemas.microsoft.com/office/drawing/2014/main" id="{2039A55C-D2C3-DAC4-DC01-D6BF54015E02}"/>
-              </a:ext>
-            </a:extLst>
-          </p:cNvPr>
+          <p:cNvPr id="15" name="文本框 14"/>
           <p:cNvSpPr txBox="1"/>
           <p:nvPr/>
         </p:nvSpPr>
@@ -7823,6 +8269,14 @@
               </a:rPr>
               <a:t>git config --list</a:t>
             </a:r>
+            <a:endParaRPr lang="en-US" altLang="zh-CN" sz="800" b="1" dirty="0">
+              <a:solidFill>
+                <a:srgbClr val="FFFF00"/>
+              </a:solidFill>
+              <a:latin typeface="Siemens Slab" pitchFamily="2" charset="0"/>
+              <a:ea typeface="Calibri" panose="020F0502020204030204" pitchFamily="34" charset="0"/>
+              <a:cs typeface="Calibri" panose="020F0502020204030204" pitchFamily="34" charset="0"/>
+            </a:endParaRPr>
           </a:p>
           <a:p>
             <a:pPr>
@@ -7841,6 +8295,14 @@
               </a:rPr>
               <a:t>List current Git configuration.</a:t>
             </a:r>
+            <a:endParaRPr lang="en-US" altLang="zh-CN" sz="800" dirty="0">
+              <a:solidFill>
+                <a:schemeClr val="bg1"/>
+              </a:solidFill>
+              <a:latin typeface="Siemens Slab" pitchFamily="2" charset="0"/>
+              <a:ea typeface="Calibri" panose="020F0502020204030204" pitchFamily="34" charset="0"/>
+              <a:cs typeface="Calibri" panose="020F0502020204030204" pitchFamily="34" charset="0"/>
+            </a:endParaRPr>
           </a:p>
           <a:p>
             <a:pPr>
@@ -7874,6 +8336,14 @@
               </a:rPr>
               <a:t>git config &lt;key&gt; &lt;value&gt;</a:t>
             </a:r>
+            <a:endParaRPr lang="en-US" altLang="zh-CN" sz="800" b="1" dirty="0">
+              <a:solidFill>
+                <a:srgbClr val="FFFF00"/>
+              </a:solidFill>
+              <a:latin typeface="Siemens Slab" pitchFamily="2" charset="0"/>
+              <a:ea typeface="Calibri" panose="020F0502020204030204" pitchFamily="34" charset="0"/>
+              <a:cs typeface="Calibri" panose="020F0502020204030204" pitchFamily="34" charset="0"/>
+            </a:endParaRPr>
           </a:p>
           <a:p>
             <a:pPr>
@@ -7892,6 +8362,14 @@
               </a:rPr>
               <a:t>Set configuration for current repository.</a:t>
             </a:r>
+            <a:endParaRPr lang="en-US" altLang="zh-CN" sz="800" dirty="0">
+              <a:solidFill>
+                <a:schemeClr val="bg1"/>
+              </a:solidFill>
+              <a:latin typeface="Siemens Slab" pitchFamily="2" charset="0"/>
+              <a:ea typeface="Calibri" panose="020F0502020204030204" pitchFamily="34" charset="0"/>
+              <a:cs typeface="Calibri" panose="020F0502020204030204" pitchFamily="34" charset="0"/>
+            </a:endParaRPr>
           </a:p>
           <a:p>
             <a:pPr>
@@ -7925,6 +8403,14 @@
               </a:rPr>
               <a:t>git config --global &lt;key&gt; &lt;value&gt;</a:t>
             </a:r>
+            <a:endParaRPr lang="en-US" altLang="zh-CN" sz="800" b="1" dirty="0">
+              <a:solidFill>
+                <a:srgbClr val="FFFF00"/>
+              </a:solidFill>
+              <a:latin typeface="Siemens Slab" pitchFamily="2" charset="0"/>
+              <a:ea typeface="Calibri" panose="020F0502020204030204" pitchFamily="34" charset="0"/>
+              <a:cs typeface="Calibri" panose="020F0502020204030204" pitchFamily="34" charset="0"/>
+            </a:endParaRPr>
           </a:p>
           <a:p>
             <a:pPr>
@@ -7943,6 +8429,14 @@
               </a:rPr>
               <a:t>Set global configuration (applies to all repositories).</a:t>
             </a:r>
+            <a:endParaRPr lang="en-US" altLang="zh-CN" sz="800" dirty="0">
+              <a:solidFill>
+                <a:schemeClr val="bg1"/>
+              </a:solidFill>
+              <a:latin typeface="Siemens Slab" pitchFamily="2" charset="0"/>
+              <a:ea typeface="Calibri" panose="020F0502020204030204" pitchFamily="34" charset="0"/>
+              <a:cs typeface="Calibri" panose="020F0502020204030204" pitchFamily="34" charset="0"/>
+            </a:endParaRPr>
           </a:p>
           <a:p>
             <a:pPr>
@@ -7976,6 +8470,14 @@
               </a:rPr>
               <a:t>git config --system &lt;key&gt; &lt;value&gt;</a:t>
             </a:r>
+            <a:endParaRPr lang="en-US" altLang="zh-CN" sz="800" b="1" dirty="0">
+              <a:solidFill>
+                <a:srgbClr val="FFFF00"/>
+              </a:solidFill>
+              <a:latin typeface="Siemens Slab" pitchFamily="2" charset="0"/>
+              <a:ea typeface="Calibri" panose="020F0502020204030204" pitchFamily="34" charset="0"/>
+              <a:cs typeface="Calibri" panose="020F0502020204030204" pitchFamily="34" charset="0"/>
+            </a:endParaRPr>
           </a:p>
           <a:p>
             <a:pPr>
@@ -7994,6 +8496,14 @@
               </a:rPr>
               <a:t>Set system-wide configuration.</a:t>
             </a:r>
+            <a:endParaRPr lang="en-US" altLang="zh-CN" sz="800" dirty="0">
+              <a:solidFill>
+                <a:schemeClr val="bg1"/>
+              </a:solidFill>
+              <a:latin typeface="Siemens Slab" pitchFamily="2" charset="0"/>
+              <a:ea typeface="Calibri" panose="020F0502020204030204" pitchFamily="34" charset="0"/>
+              <a:cs typeface="Calibri" panose="020F0502020204030204" pitchFamily="34" charset="0"/>
+            </a:endParaRPr>
           </a:p>
           <a:p>
             <a:pPr>
@@ -8027,6 +8537,14 @@
               </a:rPr>
               <a:t>git config --unset &lt;key&gt;</a:t>
             </a:r>
+            <a:endParaRPr lang="en-US" altLang="zh-CN" sz="800" b="1" dirty="0">
+              <a:solidFill>
+                <a:srgbClr val="FFFF00"/>
+              </a:solidFill>
+              <a:latin typeface="Siemens Slab" pitchFamily="2" charset="0"/>
+              <a:ea typeface="Calibri" panose="020F0502020204030204" pitchFamily="34" charset="0"/>
+              <a:cs typeface="Calibri" panose="020F0502020204030204" pitchFamily="34" charset="0"/>
+            </a:endParaRPr>
           </a:p>
           <a:p>
             <a:pPr>
@@ -8045,6 +8563,14 @@
               </a:rPr>
               <a:t>Remove configuration key.</a:t>
             </a:r>
+            <a:endParaRPr lang="en-US" altLang="zh-CN" sz="800" dirty="0">
+              <a:solidFill>
+                <a:schemeClr val="bg1"/>
+              </a:solidFill>
+              <a:latin typeface="Siemens Slab" pitchFamily="2" charset="0"/>
+              <a:ea typeface="Calibri" panose="020F0502020204030204" pitchFamily="34" charset="0"/>
+              <a:cs typeface="Calibri" panose="020F0502020204030204" pitchFamily="34" charset="0"/>
+            </a:endParaRPr>
           </a:p>
           <a:p>
             <a:pPr>
@@ -8078,6 +8604,14 @@
               </a:rPr>
               <a:t>git config --global user.name "Name"</a:t>
             </a:r>
+            <a:endParaRPr lang="en-US" altLang="zh-CN" sz="800" b="1" dirty="0">
+              <a:solidFill>
+                <a:srgbClr val="FFFF00"/>
+              </a:solidFill>
+              <a:latin typeface="Siemens Slab" pitchFamily="2" charset="0"/>
+              <a:ea typeface="Calibri" panose="020F0502020204030204" pitchFamily="34" charset="0"/>
+              <a:cs typeface="Calibri" panose="020F0502020204030204" pitchFamily="34" charset="0"/>
+            </a:endParaRPr>
           </a:p>
           <a:p>
             <a:pPr>
@@ -8096,6 +8630,14 @@
               </a:rPr>
               <a:t>Set global username.</a:t>
             </a:r>
+            <a:endParaRPr lang="en-US" altLang="zh-CN" sz="800" dirty="0">
+              <a:solidFill>
+                <a:schemeClr val="bg1"/>
+              </a:solidFill>
+              <a:latin typeface="Siemens Slab" pitchFamily="2" charset="0"/>
+              <a:ea typeface="Calibri" panose="020F0502020204030204" pitchFamily="34" charset="0"/>
+              <a:cs typeface="Calibri" panose="020F0502020204030204" pitchFamily="34" charset="0"/>
+            </a:endParaRPr>
           </a:p>
           <a:p>
             <a:pPr>
@@ -8151,6 +8693,14 @@
               </a:rPr>
               <a:t> "email@ex.com"</a:t>
             </a:r>
+            <a:endParaRPr lang="en-US" altLang="zh-CN" sz="800" b="1" dirty="0">
+              <a:solidFill>
+                <a:srgbClr val="FFFF00"/>
+              </a:solidFill>
+              <a:latin typeface="Siemens Slab" pitchFamily="2" charset="0"/>
+              <a:ea typeface="Calibri" panose="020F0502020204030204" pitchFamily="34" charset="0"/>
+              <a:cs typeface="Calibri" panose="020F0502020204030204" pitchFamily="34" charset="0"/>
+            </a:endParaRPr>
           </a:p>
           <a:p>
             <a:pPr>
@@ -8169,6 +8719,14 @@
               </a:rPr>
               <a:t>Set global email.</a:t>
             </a:r>
+            <a:endParaRPr lang="en-US" altLang="zh-CN" sz="800" dirty="0">
+              <a:solidFill>
+                <a:schemeClr val="bg1"/>
+              </a:solidFill>
+              <a:latin typeface="Siemens Slab" pitchFamily="2" charset="0"/>
+              <a:ea typeface="Calibri" panose="020F0502020204030204" pitchFamily="34" charset="0"/>
+              <a:cs typeface="Calibri" panose="020F0502020204030204" pitchFamily="34" charset="0"/>
+            </a:endParaRPr>
           </a:p>
           <a:p>
             <a:pPr>
@@ -8202,6 +8760,14 @@
               </a:rPr>
               <a:t>git config --show-origin</a:t>
             </a:r>
+            <a:endParaRPr lang="en-US" altLang="zh-CN" sz="800" b="1" dirty="0">
+              <a:solidFill>
+                <a:srgbClr val="FFFF00"/>
+              </a:solidFill>
+              <a:latin typeface="Siemens Slab" pitchFamily="2" charset="0"/>
+              <a:ea typeface="Calibri" panose="020F0502020204030204" pitchFamily="34" charset="0"/>
+              <a:cs typeface="Calibri" panose="020F0502020204030204" pitchFamily="34" charset="0"/>
+            </a:endParaRPr>
           </a:p>
           <a:p>
             <a:pPr>
@@ -8220,18 +8786,20 @@
               </a:rPr>
               <a:t>Show config file source location.</a:t>
             </a:r>
+            <a:endParaRPr lang="en-US" altLang="zh-CN" sz="800" dirty="0">
+              <a:solidFill>
+                <a:schemeClr val="bg1"/>
+              </a:solidFill>
+              <a:latin typeface="Siemens Slab" pitchFamily="2" charset="0"/>
+              <a:ea typeface="Calibri" panose="020F0502020204030204" pitchFamily="34" charset="0"/>
+              <a:cs typeface="Calibri" panose="020F0502020204030204" pitchFamily="34" charset="0"/>
+            </a:endParaRPr>
           </a:p>
         </p:txBody>
       </p:sp>
       <p:sp>
         <p:nvSpPr>
-          <p:cNvPr id="16" name="文本框 15">
-            <a:extLst>
-              <a:ext uri="{FF2B5EF4-FFF2-40B4-BE49-F238E27FC236}">
-                <a16:creationId xmlns:a16="http://schemas.microsoft.com/office/drawing/2014/main" id="{69E9A2D2-5092-9BE8-E80B-2999979F2758}"/>
-              </a:ext>
-            </a:extLst>
-          </p:cNvPr>
+          <p:cNvPr id="16" name="文本框 15"/>
           <p:cNvSpPr txBox="1"/>
           <p:nvPr/>
         </p:nvSpPr>
@@ -8272,6 +8840,14 @@
               </a:rPr>
               <a:t>git tag</a:t>
             </a:r>
+            <a:endParaRPr lang="en-US" altLang="zh-CN" sz="800" b="1" dirty="0">
+              <a:solidFill>
+                <a:srgbClr val="FFFF00"/>
+              </a:solidFill>
+              <a:latin typeface="Siemens Slab" pitchFamily="2" charset="0"/>
+              <a:ea typeface="Calibri" panose="020F0502020204030204" pitchFamily="34" charset="0"/>
+              <a:cs typeface="Calibri" panose="020F0502020204030204" pitchFamily="34" charset="0"/>
+            </a:endParaRPr>
           </a:p>
           <a:p>
             <a:pPr>
@@ -8290,6 +8866,14 @@
               </a:rPr>
               <a:t>List tags.</a:t>
             </a:r>
+            <a:endParaRPr lang="en-US" altLang="zh-CN" sz="800" dirty="0">
+              <a:solidFill>
+                <a:schemeClr val="bg1"/>
+              </a:solidFill>
+              <a:latin typeface="Siemens Slab" pitchFamily="2" charset="0"/>
+              <a:ea typeface="Calibri" panose="020F0502020204030204" pitchFamily="34" charset="0"/>
+              <a:cs typeface="Calibri" panose="020F0502020204030204" pitchFamily="34" charset="0"/>
+            </a:endParaRPr>
           </a:p>
           <a:p>
             <a:pPr>
@@ -8323,6 +8907,14 @@
               </a:rPr>
               <a:t>git tag &lt;tag&gt;</a:t>
             </a:r>
+            <a:endParaRPr lang="en-US" altLang="zh-CN" sz="800" b="1" dirty="0">
+              <a:solidFill>
+                <a:srgbClr val="FFFF00"/>
+              </a:solidFill>
+              <a:latin typeface="Siemens Slab" pitchFamily="2" charset="0"/>
+              <a:ea typeface="Calibri" panose="020F0502020204030204" pitchFamily="34" charset="0"/>
+              <a:cs typeface="Calibri" panose="020F0502020204030204" pitchFamily="34" charset="0"/>
+            </a:endParaRPr>
           </a:p>
           <a:p>
             <a:pPr>
@@ -8341,6 +8933,14 @@
               </a:rPr>
               <a:t>Create lightweight tag at current commit.</a:t>
             </a:r>
+            <a:endParaRPr lang="en-US" altLang="zh-CN" sz="800" dirty="0">
+              <a:solidFill>
+                <a:schemeClr val="bg1"/>
+              </a:solidFill>
+              <a:latin typeface="Siemens Slab" pitchFamily="2" charset="0"/>
+              <a:ea typeface="Calibri" panose="020F0502020204030204" pitchFamily="34" charset="0"/>
+              <a:cs typeface="Calibri" panose="020F0502020204030204" pitchFamily="34" charset="0"/>
+            </a:endParaRPr>
           </a:p>
           <a:p>
             <a:pPr>
@@ -8374,6 +8974,14 @@
               </a:rPr>
               <a:t>git tag &lt;tag&gt; &lt;commit&gt;</a:t>
             </a:r>
+            <a:endParaRPr lang="en-US" altLang="zh-CN" sz="800" b="1" dirty="0">
+              <a:solidFill>
+                <a:srgbClr val="FFFF00"/>
+              </a:solidFill>
+              <a:latin typeface="Siemens Slab" pitchFamily="2" charset="0"/>
+              <a:ea typeface="Calibri" panose="020F0502020204030204" pitchFamily="34" charset="0"/>
+              <a:cs typeface="Calibri" panose="020F0502020204030204" pitchFamily="34" charset="0"/>
+            </a:endParaRPr>
           </a:p>
           <a:p>
             <a:pPr>
@@ -8392,6 +9000,14 @@
               </a:rPr>
               <a:t>Create tag for specified commit.</a:t>
             </a:r>
+            <a:endParaRPr lang="en-US" altLang="zh-CN" sz="800" dirty="0">
+              <a:solidFill>
+                <a:schemeClr val="bg1"/>
+              </a:solidFill>
+              <a:latin typeface="Siemens Slab" pitchFamily="2" charset="0"/>
+              <a:ea typeface="Calibri" panose="020F0502020204030204" pitchFamily="34" charset="0"/>
+              <a:cs typeface="Calibri" panose="020F0502020204030204" pitchFamily="34" charset="0"/>
+            </a:endParaRPr>
           </a:p>
           <a:p>
             <a:pPr>
@@ -8425,6 +9041,14 @@
               </a:rPr>
               <a:t>git tag -a &lt;tag&gt; -m "message"</a:t>
             </a:r>
+            <a:endParaRPr lang="en-US" altLang="zh-CN" sz="800" b="1" dirty="0">
+              <a:solidFill>
+                <a:srgbClr val="FFFF00"/>
+              </a:solidFill>
+              <a:latin typeface="Siemens Slab" pitchFamily="2" charset="0"/>
+              <a:ea typeface="Calibri" panose="020F0502020204030204" pitchFamily="34" charset="0"/>
+              <a:cs typeface="Calibri" panose="020F0502020204030204" pitchFamily="34" charset="0"/>
+            </a:endParaRPr>
           </a:p>
           <a:p>
             <a:pPr>
@@ -8443,6 +9067,14 @@
               </a:rPr>
               <a:t>Create annotated tag.</a:t>
             </a:r>
+            <a:endParaRPr lang="en-US" altLang="zh-CN" sz="800" dirty="0">
+              <a:solidFill>
+                <a:schemeClr val="bg1"/>
+              </a:solidFill>
+              <a:latin typeface="Siemens Slab" pitchFamily="2" charset="0"/>
+              <a:ea typeface="Calibri" panose="020F0502020204030204" pitchFamily="34" charset="0"/>
+              <a:cs typeface="Calibri" panose="020F0502020204030204" pitchFamily="34" charset="0"/>
+            </a:endParaRPr>
           </a:p>
           <a:p>
             <a:pPr>
@@ -8476,6 +9108,14 @@
               </a:rPr>
               <a:t>git tag -d &lt;tag&gt;</a:t>
             </a:r>
+            <a:endParaRPr lang="en-US" altLang="zh-CN" sz="800" b="1" dirty="0">
+              <a:solidFill>
+                <a:srgbClr val="FFFF00"/>
+              </a:solidFill>
+              <a:latin typeface="Siemens Slab" pitchFamily="2" charset="0"/>
+              <a:ea typeface="Calibri" panose="020F0502020204030204" pitchFamily="34" charset="0"/>
+              <a:cs typeface="Calibri" panose="020F0502020204030204" pitchFamily="34" charset="0"/>
+            </a:endParaRPr>
           </a:p>
           <a:p>
             <a:pPr>
@@ -8494,6 +9134,14 @@
               </a:rPr>
               <a:t>Delete local tag.</a:t>
             </a:r>
+            <a:endParaRPr lang="en-US" altLang="zh-CN" sz="800" dirty="0">
+              <a:solidFill>
+                <a:schemeClr val="bg1"/>
+              </a:solidFill>
+              <a:latin typeface="Siemens Slab" pitchFamily="2" charset="0"/>
+              <a:ea typeface="Calibri" panose="020F0502020204030204" pitchFamily="34" charset="0"/>
+              <a:cs typeface="Calibri" panose="020F0502020204030204" pitchFamily="34" charset="0"/>
+            </a:endParaRPr>
           </a:p>
           <a:p>
             <a:pPr>
@@ -8527,6 +9175,14 @@
               </a:rPr>
               <a:t>git push origin &lt;tag&gt;</a:t>
             </a:r>
+            <a:endParaRPr lang="en-US" altLang="zh-CN" sz="800" b="1" dirty="0">
+              <a:solidFill>
+                <a:srgbClr val="FFFF00"/>
+              </a:solidFill>
+              <a:latin typeface="Siemens Slab" pitchFamily="2" charset="0"/>
+              <a:ea typeface="Calibri" panose="020F0502020204030204" pitchFamily="34" charset="0"/>
+              <a:cs typeface="Calibri" panose="020F0502020204030204" pitchFamily="34" charset="0"/>
+            </a:endParaRPr>
           </a:p>
           <a:p>
             <a:pPr>
@@ -8545,6 +9201,14 @@
               </a:rPr>
               <a:t>Push specific tag to remote.</a:t>
             </a:r>
+            <a:endParaRPr lang="en-US" altLang="zh-CN" sz="800" dirty="0">
+              <a:solidFill>
+                <a:schemeClr val="bg1"/>
+              </a:solidFill>
+              <a:latin typeface="Siemens Slab" pitchFamily="2" charset="0"/>
+              <a:ea typeface="Calibri" panose="020F0502020204030204" pitchFamily="34" charset="0"/>
+              <a:cs typeface="Calibri" panose="020F0502020204030204" pitchFamily="34" charset="0"/>
+            </a:endParaRPr>
           </a:p>
           <a:p>
             <a:pPr>
@@ -8578,6 +9242,14 @@
               </a:rPr>
               <a:t>git push origin --tags</a:t>
             </a:r>
+            <a:endParaRPr lang="en-US" altLang="zh-CN" sz="800" b="1" dirty="0">
+              <a:solidFill>
+                <a:srgbClr val="FFFF00"/>
+              </a:solidFill>
+              <a:latin typeface="Siemens Slab" pitchFamily="2" charset="0"/>
+              <a:ea typeface="Calibri" panose="020F0502020204030204" pitchFamily="34" charset="0"/>
+              <a:cs typeface="Calibri" panose="020F0502020204030204" pitchFamily="34" charset="0"/>
+            </a:endParaRPr>
           </a:p>
           <a:p>
             <a:pPr>
@@ -8596,6 +9268,14 @@
               </a:rPr>
               <a:t>Push all local tags.</a:t>
             </a:r>
+            <a:endParaRPr lang="en-US" altLang="zh-CN" sz="800" dirty="0">
+              <a:solidFill>
+                <a:schemeClr val="bg1"/>
+              </a:solidFill>
+              <a:latin typeface="Siemens Slab" pitchFamily="2" charset="0"/>
+              <a:ea typeface="Calibri" panose="020F0502020204030204" pitchFamily="34" charset="0"/>
+              <a:cs typeface="Calibri" panose="020F0502020204030204" pitchFamily="34" charset="0"/>
+            </a:endParaRPr>
           </a:p>
           <a:p>
             <a:pPr>
@@ -8629,6 +9309,14 @@
               </a:rPr>
               <a:t>git push origin --delete &lt;tag&gt;</a:t>
             </a:r>
+            <a:endParaRPr lang="en-US" altLang="zh-CN" sz="800" b="1" dirty="0">
+              <a:solidFill>
+                <a:srgbClr val="FFFF00"/>
+              </a:solidFill>
+              <a:latin typeface="Siemens Slab" pitchFamily="2" charset="0"/>
+              <a:ea typeface="Calibri" panose="020F0502020204030204" pitchFamily="34" charset="0"/>
+              <a:cs typeface="Calibri" panose="020F0502020204030204" pitchFamily="34" charset="0"/>
+            </a:endParaRPr>
           </a:p>
           <a:p>
             <a:pPr>
@@ -8647,6 +9335,14 @@
               </a:rPr>
               <a:t>Delete remote tag.</a:t>
             </a:r>
+            <a:endParaRPr lang="en-US" altLang="zh-CN" sz="800" dirty="0">
+              <a:solidFill>
+                <a:schemeClr val="bg1"/>
+              </a:solidFill>
+              <a:latin typeface="Siemens Slab" pitchFamily="2" charset="0"/>
+              <a:ea typeface="Calibri" panose="020F0502020204030204" pitchFamily="34" charset="0"/>
+              <a:cs typeface="Calibri" panose="020F0502020204030204" pitchFamily="34" charset="0"/>
+            </a:endParaRPr>
           </a:p>
           <a:p>
             <a:pPr>
@@ -8680,6 +9376,14 @@
               </a:rPr>
               <a:t>git show &lt;tag&gt;</a:t>
             </a:r>
+            <a:endParaRPr lang="en-US" altLang="zh-CN" sz="800" b="1" dirty="0">
+              <a:solidFill>
+                <a:srgbClr val="FFFF00"/>
+              </a:solidFill>
+              <a:latin typeface="Siemens Slab" pitchFamily="2" charset="0"/>
+              <a:ea typeface="Calibri" panose="020F0502020204030204" pitchFamily="34" charset="0"/>
+              <a:cs typeface="Calibri" panose="020F0502020204030204" pitchFamily="34" charset="0"/>
+            </a:endParaRPr>
           </a:p>
           <a:p>
             <a:pPr>
@@ -8698,18 +9402,20 @@
               </a:rPr>
               <a:t>Show tag details (and commit info).</a:t>
             </a:r>
+            <a:endParaRPr lang="en-US" altLang="zh-CN" sz="800" dirty="0">
+              <a:solidFill>
+                <a:schemeClr val="bg1"/>
+              </a:solidFill>
+              <a:latin typeface="Siemens Slab" pitchFamily="2" charset="0"/>
+              <a:ea typeface="Calibri" panose="020F0502020204030204" pitchFamily="34" charset="0"/>
+              <a:cs typeface="Calibri" panose="020F0502020204030204" pitchFamily="34" charset="0"/>
+            </a:endParaRPr>
           </a:p>
         </p:txBody>
       </p:sp>
       <p:sp>
         <p:nvSpPr>
-          <p:cNvPr id="17" name="文本框 16">
-            <a:extLst>
-              <a:ext uri="{FF2B5EF4-FFF2-40B4-BE49-F238E27FC236}">
-                <a16:creationId xmlns:a16="http://schemas.microsoft.com/office/drawing/2014/main" id="{DF31B111-96E4-E772-B2FC-51DF2DBDF46B}"/>
-              </a:ext>
-            </a:extLst>
-          </p:cNvPr>
+          <p:cNvPr id="17" name="文本框 16"/>
           <p:cNvSpPr txBox="1"/>
           <p:nvPr/>
         </p:nvSpPr>
@@ -8772,6 +9478,14 @@
               </a:rPr>
               <a:t> list</a:t>
             </a:r>
+            <a:endParaRPr lang="en-US" altLang="zh-CN" sz="800" b="1" dirty="0">
+              <a:solidFill>
+                <a:srgbClr val="FFFF00"/>
+              </a:solidFill>
+              <a:latin typeface="Siemens Slab" pitchFamily="2" charset="0"/>
+              <a:ea typeface="Calibri" panose="020F0502020204030204" pitchFamily="34" charset="0"/>
+              <a:cs typeface="Calibri" panose="020F0502020204030204" pitchFamily="34" charset="0"/>
+            </a:endParaRPr>
           </a:p>
           <a:p>
             <a:pPr>
@@ -8812,6 +9526,14 @@
               </a:rPr>
               <a:t>.</a:t>
             </a:r>
+            <a:endParaRPr lang="en-US" altLang="zh-CN" sz="800" dirty="0">
+              <a:solidFill>
+                <a:schemeClr val="bg1"/>
+              </a:solidFill>
+              <a:latin typeface="Siemens Slab" pitchFamily="2" charset="0"/>
+              <a:ea typeface="Calibri" panose="020F0502020204030204" pitchFamily="34" charset="0"/>
+              <a:cs typeface="Calibri" panose="020F0502020204030204" pitchFamily="34" charset="0"/>
+            </a:endParaRPr>
           </a:p>
           <a:p>
             <a:pPr>
@@ -8867,6 +9589,14 @@
               </a:rPr>
               <a:t> add &lt;path&gt; (&lt;branch&gt;)</a:t>
             </a:r>
+            <a:endParaRPr lang="en-US" altLang="zh-CN" sz="800" b="1" dirty="0">
+              <a:solidFill>
+                <a:srgbClr val="FFFF00"/>
+              </a:solidFill>
+              <a:latin typeface="Siemens Slab" pitchFamily="2" charset="0"/>
+              <a:ea typeface="Calibri" panose="020F0502020204030204" pitchFamily="34" charset="0"/>
+              <a:cs typeface="Calibri" panose="020F0502020204030204" pitchFamily="34" charset="0"/>
+            </a:endParaRPr>
           </a:p>
           <a:p>
             <a:pPr>
@@ -8885,6 +9615,14 @@
               </a:rPr>
               <a:t>Create new working directory at &lt;path&gt;.</a:t>
             </a:r>
+            <a:endParaRPr lang="en-US" altLang="zh-CN" sz="800" dirty="0">
+              <a:solidFill>
+                <a:schemeClr val="bg1"/>
+              </a:solidFill>
+              <a:latin typeface="Siemens Slab" pitchFamily="2" charset="0"/>
+              <a:ea typeface="Calibri" panose="020F0502020204030204" pitchFamily="34" charset="0"/>
+              <a:cs typeface="Calibri" panose="020F0502020204030204" pitchFamily="34" charset="0"/>
+            </a:endParaRPr>
           </a:p>
           <a:p>
             <a:pPr>
@@ -8903,6 +9641,14 @@
               </a:rPr>
               <a:t>If &lt;branch&gt; not exists, it will be created.</a:t>
             </a:r>
+            <a:endParaRPr lang="en-US" altLang="zh-CN" sz="800" dirty="0">
+              <a:solidFill>
+                <a:schemeClr val="bg1"/>
+              </a:solidFill>
+              <a:latin typeface="Siemens Slab" pitchFamily="2" charset="0"/>
+              <a:ea typeface="Calibri" panose="020F0502020204030204" pitchFamily="34" charset="0"/>
+              <a:cs typeface="Calibri" panose="020F0502020204030204" pitchFamily="34" charset="0"/>
+            </a:endParaRPr>
           </a:p>
           <a:p>
             <a:pPr>
@@ -8958,6 +9704,14 @@
               </a:rPr>
               <a:t> add -b &lt;branch&gt; &lt;path&gt;</a:t>
             </a:r>
+            <a:endParaRPr lang="en-US" altLang="zh-CN" sz="800" b="1" dirty="0">
+              <a:solidFill>
+                <a:srgbClr val="FFFF00"/>
+              </a:solidFill>
+              <a:latin typeface="Siemens Slab" pitchFamily="2" charset="0"/>
+              <a:ea typeface="Calibri" panose="020F0502020204030204" pitchFamily="34" charset="0"/>
+              <a:cs typeface="Calibri" panose="020F0502020204030204" pitchFamily="34" charset="0"/>
+            </a:endParaRPr>
           </a:p>
           <a:p>
             <a:pPr>
@@ -8998,6 +9752,14 @@
               </a:rPr>
               <a:t> together.</a:t>
             </a:r>
+            <a:endParaRPr lang="en-US" altLang="zh-CN" sz="800" dirty="0">
+              <a:solidFill>
+                <a:schemeClr val="bg1"/>
+              </a:solidFill>
+              <a:latin typeface="Siemens Slab" pitchFamily="2" charset="0"/>
+              <a:ea typeface="Calibri" panose="020F0502020204030204" pitchFamily="34" charset="0"/>
+              <a:cs typeface="Calibri" panose="020F0502020204030204" pitchFamily="34" charset="0"/>
+            </a:endParaRPr>
           </a:p>
           <a:p>
             <a:pPr>
@@ -9053,6 +9815,14 @@
               </a:rPr>
               <a:t> remove &lt;path&gt;</a:t>
             </a:r>
+            <a:endParaRPr lang="en-US" altLang="zh-CN" sz="800" b="1" dirty="0">
+              <a:solidFill>
+                <a:srgbClr val="FFFF00"/>
+              </a:solidFill>
+              <a:latin typeface="Siemens Slab" pitchFamily="2" charset="0"/>
+              <a:ea typeface="Calibri" panose="020F0502020204030204" pitchFamily="34" charset="0"/>
+              <a:cs typeface="Calibri" panose="020F0502020204030204" pitchFamily="34" charset="0"/>
+            </a:endParaRPr>
           </a:p>
           <a:p>
             <a:pPr>
@@ -9093,6 +9863,14 @@
               </a:rPr>
               <a:t>.</a:t>
             </a:r>
+            <a:endParaRPr lang="en-US" altLang="zh-CN" sz="800" dirty="0">
+              <a:solidFill>
+                <a:schemeClr val="bg1"/>
+              </a:solidFill>
+              <a:latin typeface="Siemens Slab" pitchFamily="2" charset="0"/>
+              <a:ea typeface="Calibri" panose="020F0502020204030204" pitchFamily="34" charset="0"/>
+              <a:cs typeface="Calibri" panose="020F0502020204030204" pitchFamily="34" charset="0"/>
+            </a:endParaRPr>
           </a:p>
           <a:p>
             <a:pPr>
@@ -9148,6 +9926,14 @@
               </a:rPr>
               <a:t> prune</a:t>
             </a:r>
+            <a:endParaRPr lang="en-US" altLang="zh-CN" sz="800" b="1" dirty="0">
+              <a:solidFill>
+                <a:srgbClr val="FFFF00"/>
+              </a:solidFill>
+              <a:latin typeface="Siemens Slab" pitchFamily="2" charset="0"/>
+              <a:ea typeface="Calibri" panose="020F0502020204030204" pitchFamily="34" charset="0"/>
+              <a:cs typeface="Calibri" panose="020F0502020204030204" pitchFamily="34" charset="0"/>
+            </a:endParaRPr>
           </a:p>
           <a:p>
             <a:pPr>
@@ -9188,6 +9974,14 @@
               </a:rPr>
               <a:t> metadata.</a:t>
             </a:r>
+            <a:endParaRPr lang="en-US" altLang="zh-CN" sz="800" dirty="0">
+              <a:solidFill>
+                <a:schemeClr val="bg1"/>
+              </a:solidFill>
+              <a:latin typeface="Siemens Slab" pitchFamily="2" charset="0"/>
+              <a:ea typeface="Calibri" panose="020F0502020204030204" pitchFamily="34" charset="0"/>
+              <a:cs typeface="Calibri" panose="020F0502020204030204" pitchFamily="34" charset="0"/>
+            </a:endParaRPr>
           </a:p>
           <a:p>
             <a:pPr>
@@ -9243,6 +10037,14 @@
               </a:rPr>
               <a:t> move &lt;old-path&gt; &lt;new-path&gt;</a:t>
             </a:r>
+            <a:endParaRPr lang="en-US" altLang="zh-CN" sz="800" b="1" dirty="0">
+              <a:solidFill>
+                <a:srgbClr val="FFFF00"/>
+              </a:solidFill>
+              <a:latin typeface="Siemens Slab" pitchFamily="2" charset="0"/>
+              <a:ea typeface="Calibri" panose="020F0502020204030204" pitchFamily="34" charset="0"/>
+              <a:cs typeface="Calibri" panose="020F0502020204030204" pitchFamily="34" charset="0"/>
+            </a:endParaRPr>
           </a:p>
           <a:p>
             <a:pPr>
@@ -9283,6 +10085,14 @@
               </a:rPr>
               <a:t> to new location.</a:t>
             </a:r>
+            <a:endParaRPr lang="en-US" altLang="zh-CN" sz="800" dirty="0">
+              <a:solidFill>
+                <a:schemeClr val="bg1"/>
+              </a:solidFill>
+              <a:latin typeface="Siemens Slab" pitchFamily="2" charset="0"/>
+              <a:ea typeface="Calibri" panose="020F0502020204030204" pitchFamily="34" charset="0"/>
+              <a:cs typeface="Calibri" panose="020F0502020204030204" pitchFamily="34" charset="0"/>
+            </a:endParaRPr>
           </a:p>
           <a:p>
             <a:pPr>
@@ -9338,6 +10148,14 @@
               </a:rPr>
               <a:t> lock/unlock &lt;path&gt;</a:t>
             </a:r>
+            <a:endParaRPr lang="en-US" altLang="zh-CN" sz="800" b="1" dirty="0">
+              <a:solidFill>
+                <a:srgbClr val="FFFF00"/>
+              </a:solidFill>
+              <a:latin typeface="Siemens Slab" pitchFamily="2" charset="0"/>
+              <a:ea typeface="Calibri" panose="020F0502020204030204" pitchFamily="34" charset="0"/>
+              <a:cs typeface="Calibri" panose="020F0502020204030204" pitchFamily="34" charset="0"/>
+            </a:endParaRPr>
           </a:p>
           <a:p>
             <a:pPr>
@@ -9378,6 +10196,14 @@
               </a:rPr>
               <a:t> from being pruned.</a:t>
             </a:r>
+            <a:endParaRPr lang="en-US" altLang="zh-CN" sz="800" dirty="0">
+              <a:solidFill>
+                <a:schemeClr val="bg1"/>
+              </a:solidFill>
+              <a:latin typeface="Siemens Slab" pitchFamily="2" charset="0"/>
+              <a:ea typeface="Calibri" panose="020F0502020204030204" pitchFamily="34" charset="0"/>
+              <a:cs typeface="Calibri" panose="020F0502020204030204" pitchFamily="34" charset="0"/>
+            </a:endParaRPr>
           </a:p>
           <a:p>
             <a:pPr>
@@ -9398,13 +10224,7 @@
       </p:sp>
       <p:sp>
         <p:nvSpPr>
-          <p:cNvPr id="18" name="文本框 17">
-            <a:extLst>
-              <a:ext uri="{FF2B5EF4-FFF2-40B4-BE49-F238E27FC236}">
-                <a16:creationId xmlns:a16="http://schemas.microsoft.com/office/drawing/2014/main" id="{5D470AA9-969D-1D79-10AE-8133005B660C}"/>
-              </a:ext>
-            </a:extLst>
-          </p:cNvPr>
+          <p:cNvPr id="18" name="文本框 17"/>
           <p:cNvSpPr txBox="1"/>
           <p:nvPr/>
         </p:nvSpPr>
@@ -9445,6 +10265,14 @@
               </a:rPr>
               <a:t>git log </a:t>
             </a:r>
+            <a:endParaRPr lang="en-US" altLang="zh-CN" sz="800" b="1" dirty="0">
+              <a:solidFill>
+                <a:srgbClr val="FFFF00"/>
+              </a:solidFill>
+              <a:latin typeface="Siemens Slab" pitchFamily="2" charset="0"/>
+              <a:ea typeface="Calibri" panose="020F0502020204030204" pitchFamily="34" charset="0"/>
+              <a:cs typeface="Calibri" panose="020F0502020204030204" pitchFamily="34" charset="0"/>
+            </a:endParaRPr>
           </a:p>
           <a:p>
             <a:pPr>
@@ -9463,6 +10291,14 @@
               </a:rPr>
               <a:t>Show commit history.</a:t>
             </a:r>
+            <a:endParaRPr lang="en-US" altLang="zh-CN" sz="800" dirty="0">
+              <a:solidFill>
+                <a:schemeClr val="bg1"/>
+              </a:solidFill>
+              <a:latin typeface="Siemens Slab" pitchFamily="2" charset="0"/>
+              <a:ea typeface="Calibri" panose="020F0502020204030204" pitchFamily="34" charset="0"/>
+              <a:cs typeface="Calibri" panose="020F0502020204030204" pitchFamily="34" charset="0"/>
+            </a:endParaRPr>
           </a:p>
           <a:p>
             <a:pPr>
@@ -9503,6 +10339,14 @@
               </a:rPr>
               <a:t> : Compact one-line format</a:t>
             </a:r>
+            <a:endParaRPr lang="en-US" altLang="zh-CN" sz="800" dirty="0">
+              <a:solidFill>
+                <a:schemeClr val="bg1"/>
+              </a:solidFill>
+              <a:latin typeface="Siemens Slab" pitchFamily="2" charset="0"/>
+              <a:ea typeface="Calibri" panose="020F0502020204030204" pitchFamily="34" charset="0"/>
+              <a:cs typeface="Calibri" panose="020F0502020204030204" pitchFamily="34" charset="0"/>
+            </a:endParaRPr>
           </a:p>
           <a:p>
             <a:pPr>
@@ -9521,6 +10365,14 @@
               </a:rPr>
               <a:t>--graph : Show branch graph structure</a:t>
             </a:r>
+            <a:endParaRPr lang="en-US" altLang="zh-CN" sz="800" dirty="0">
+              <a:solidFill>
+                <a:schemeClr val="bg1"/>
+              </a:solidFill>
+              <a:latin typeface="Siemens Slab" pitchFamily="2" charset="0"/>
+              <a:ea typeface="Calibri" panose="020F0502020204030204" pitchFamily="34" charset="0"/>
+              <a:cs typeface="Calibri" panose="020F0502020204030204" pitchFamily="34" charset="0"/>
+            </a:endParaRPr>
           </a:p>
           <a:p>
             <a:pPr>
@@ -9539,6 +10391,14 @@
               </a:rPr>
               <a:t>--decorate : Show branch and HEAD labels</a:t>
             </a:r>
+            <a:endParaRPr lang="en-US" altLang="zh-CN" sz="800" dirty="0">
+              <a:solidFill>
+                <a:schemeClr val="bg1"/>
+              </a:solidFill>
+              <a:latin typeface="Siemens Slab" pitchFamily="2" charset="0"/>
+              <a:ea typeface="Calibri" panose="020F0502020204030204" pitchFamily="34" charset="0"/>
+              <a:cs typeface="Calibri" panose="020F0502020204030204" pitchFamily="34" charset="0"/>
+            </a:endParaRPr>
           </a:p>
           <a:p>
             <a:pPr>
@@ -9557,6 +10417,14 @@
               </a:rPr>
               <a:t>--author="&lt;name&gt;" : Filter by author</a:t>
             </a:r>
+            <a:endParaRPr lang="en-US" altLang="zh-CN" sz="800" dirty="0">
+              <a:solidFill>
+                <a:schemeClr val="bg1"/>
+              </a:solidFill>
+              <a:latin typeface="Siemens Slab" pitchFamily="2" charset="0"/>
+              <a:ea typeface="Calibri" panose="020F0502020204030204" pitchFamily="34" charset="0"/>
+              <a:cs typeface="Calibri" panose="020F0502020204030204" pitchFamily="34" charset="0"/>
+            </a:endParaRPr>
           </a:p>
           <a:p>
             <a:pPr>
@@ -9575,6 +10443,14 @@
               </a:rPr>
               <a:t>--since="&lt;date&gt;" : Filter by date</a:t>
             </a:r>
+            <a:endParaRPr lang="en-US" altLang="zh-CN" sz="800" dirty="0">
+              <a:solidFill>
+                <a:schemeClr val="bg1"/>
+              </a:solidFill>
+              <a:latin typeface="Siemens Slab" pitchFamily="2" charset="0"/>
+              <a:ea typeface="Calibri" panose="020F0502020204030204" pitchFamily="34" charset="0"/>
+              <a:cs typeface="Calibri" panose="020F0502020204030204" pitchFamily="34" charset="0"/>
+            </a:endParaRPr>
           </a:p>
           <a:p>
             <a:pPr>
@@ -9593,6 +10469,14 @@
               </a:rPr>
               <a:t>&lt;branch1&gt;..&lt;branch2&gt; : Commits in branch2 but not in branch1</a:t>
             </a:r>
+            <a:endParaRPr lang="en-US" altLang="zh-CN" sz="800" dirty="0">
+              <a:solidFill>
+                <a:schemeClr val="bg1"/>
+              </a:solidFill>
+              <a:latin typeface="Siemens Slab" pitchFamily="2" charset="0"/>
+              <a:ea typeface="Calibri" panose="020F0502020204030204" pitchFamily="34" charset="0"/>
+              <a:cs typeface="Calibri" panose="020F0502020204030204" pitchFamily="34" charset="0"/>
+            </a:endParaRPr>
           </a:p>
           <a:p>
             <a:pPr>
@@ -9611,6 +10495,14 @@
               </a:rPr>
               <a:t>--merge : Show commits in merge conflict.</a:t>
             </a:r>
+            <a:endParaRPr lang="en-US" altLang="zh-CN" sz="800" dirty="0">
+              <a:solidFill>
+                <a:schemeClr val="bg1"/>
+              </a:solidFill>
+              <a:latin typeface="Siemens Slab" pitchFamily="2" charset="0"/>
+              <a:ea typeface="Calibri" panose="020F0502020204030204" pitchFamily="34" charset="0"/>
+              <a:cs typeface="Calibri" panose="020F0502020204030204" pitchFamily="34" charset="0"/>
+            </a:endParaRPr>
           </a:p>
           <a:p>
             <a:pPr>
@@ -9644,6 +10536,14 @@
               </a:rPr>
               <a:t>git show &lt;commit&gt; : </a:t>
             </a:r>
+            <a:endParaRPr lang="en-US" altLang="zh-CN" sz="800" b="1" dirty="0">
+              <a:solidFill>
+                <a:srgbClr val="FFFF00"/>
+              </a:solidFill>
+              <a:latin typeface="Siemens Slab" pitchFamily="2" charset="0"/>
+              <a:ea typeface="Calibri" panose="020F0502020204030204" pitchFamily="34" charset="0"/>
+              <a:cs typeface="Calibri" panose="020F0502020204030204" pitchFamily="34" charset="0"/>
+            </a:endParaRPr>
           </a:p>
           <a:p>
             <a:pPr>
@@ -9662,6 +10562,14 @@
               </a:rPr>
               <a:t>Show commit details and diff.</a:t>
             </a:r>
+            <a:endParaRPr lang="en-US" altLang="zh-CN" sz="800" dirty="0">
+              <a:solidFill>
+                <a:schemeClr val="bg1"/>
+              </a:solidFill>
+              <a:latin typeface="Siemens Slab" pitchFamily="2" charset="0"/>
+              <a:ea typeface="Calibri" panose="020F0502020204030204" pitchFamily="34" charset="0"/>
+              <a:cs typeface="Calibri" panose="020F0502020204030204" pitchFamily="34" charset="0"/>
+            </a:endParaRPr>
           </a:p>
           <a:p>
             <a:pPr>
@@ -9695,6 +10603,14 @@
               </a:rPr>
               <a:t>git show &lt;commit&gt;:&lt;file&gt;</a:t>
             </a:r>
+            <a:endParaRPr lang="en-US" altLang="zh-CN" sz="800" b="1" dirty="0">
+              <a:solidFill>
+                <a:srgbClr val="FFFF00"/>
+              </a:solidFill>
+              <a:latin typeface="Siemens Slab" pitchFamily="2" charset="0"/>
+              <a:ea typeface="Calibri" panose="020F0502020204030204" pitchFamily="34" charset="0"/>
+              <a:cs typeface="Calibri" panose="020F0502020204030204" pitchFamily="34" charset="0"/>
+            </a:endParaRPr>
           </a:p>
           <a:p>
             <a:pPr>
@@ -9713,6 +10629,14 @@
               </a:rPr>
               <a:t>Show specific file at given commit.</a:t>
             </a:r>
+            <a:endParaRPr lang="en-US" altLang="zh-CN" sz="800" dirty="0">
+              <a:solidFill>
+                <a:schemeClr val="bg1"/>
+              </a:solidFill>
+              <a:latin typeface="Siemens Slab" pitchFamily="2" charset="0"/>
+              <a:ea typeface="Calibri" panose="020F0502020204030204" pitchFamily="34" charset="0"/>
+              <a:cs typeface="Calibri" panose="020F0502020204030204" pitchFamily="34" charset="0"/>
+            </a:endParaRPr>
           </a:p>
           <a:p>
             <a:pPr>
@@ -9746,6 +10670,14 @@
               </a:rPr>
               <a:t>git blame &lt;file&gt;</a:t>
             </a:r>
+            <a:endParaRPr lang="en-US" altLang="zh-CN" sz="800" b="1" dirty="0">
+              <a:solidFill>
+                <a:srgbClr val="FFFF00"/>
+              </a:solidFill>
+              <a:latin typeface="Siemens Slab" pitchFamily="2" charset="0"/>
+              <a:ea typeface="Calibri" panose="020F0502020204030204" pitchFamily="34" charset="0"/>
+              <a:cs typeface="Calibri" panose="020F0502020204030204" pitchFamily="34" charset="0"/>
+            </a:endParaRPr>
           </a:p>
           <a:p>
             <a:pPr>
@@ -9764,6 +10696,14 @@
               </a:rPr>
               <a:t>Show last modification author for each line.</a:t>
             </a:r>
+            <a:endParaRPr lang="en-US" altLang="zh-CN" sz="800" dirty="0">
+              <a:solidFill>
+                <a:schemeClr val="bg1"/>
+              </a:solidFill>
+              <a:latin typeface="Siemens Slab" pitchFamily="2" charset="0"/>
+              <a:ea typeface="Calibri" panose="020F0502020204030204" pitchFamily="34" charset="0"/>
+              <a:cs typeface="Calibri" panose="020F0502020204030204" pitchFamily="34" charset="0"/>
+            </a:endParaRPr>
           </a:p>
           <a:p>
             <a:pPr>
@@ -9782,6 +10722,14 @@
               </a:rPr>
               <a:t>-L &lt;start&gt;,&lt;end&gt; : Blame specific line range</a:t>
             </a:r>
+            <a:endParaRPr lang="en-US" altLang="zh-CN" sz="800" dirty="0">
+              <a:solidFill>
+                <a:schemeClr val="bg1"/>
+              </a:solidFill>
+              <a:latin typeface="Siemens Slab" pitchFamily="2" charset="0"/>
+              <a:ea typeface="Calibri" panose="020F0502020204030204" pitchFamily="34" charset="0"/>
+              <a:cs typeface="Calibri" panose="020F0502020204030204" pitchFamily="34" charset="0"/>
+            </a:endParaRPr>
           </a:p>
           <a:p>
             <a:pPr>
@@ -9800,6 +10748,14 @@
               </a:rPr>
               <a:t>-w : Ignore whitespace changes</a:t>
             </a:r>
+            <a:endParaRPr lang="en-US" altLang="zh-CN" sz="800" dirty="0">
+              <a:solidFill>
+                <a:schemeClr val="bg1"/>
+              </a:solidFill>
+              <a:latin typeface="Siemens Slab" pitchFamily="2" charset="0"/>
+              <a:ea typeface="Calibri" panose="020F0502020204030204" pitchFamily="34" charset="0"/>
+              <a:cs typeface="Calibri" panose="020F0502020204030204" pitchFamily="34" charset="0"/>
+            </a:endParaRPr>
           </a:p>
           <a:p>
             <a:pPr>
@@ -9818,6 +10774,14 @@
               </a:rPr>
               <a:t>--since="&lt;date&gt;" : Only show recent commits</a:t>
             </a:r>
+            <a:endParaRPr lang="en-US" altLang="zh-CN" sz="800" dirty="0">
+              <a:solidFill>
+                <a:schemeClr val="bg1"/>
+              </a:solidFill>
+              <a:latin typeface="Siemens Slab" pitchFamily="2" charset="0"/>
+              <a:ea typeface="Calibri" panose="020F0502020204030204" pitchFamily="34" charset="0"/>
+              <a:cs typeface="Calibri" panose="020F0502020204030204" pitchFamily="34" charset="0"/>
+            </a:endParaRPr>
           </a:p>
           <a:p>
             <a:pPr>
@@ -9888,6 +10852,14 @@
               </a:rPr>
               <a:t>Summarize commits by author.</a:t>
             </a:r>
+            <a:endParaRPr lang="en-US" altLang="zh-CN" sz="800" dirty="0">
+              <a:solidFill>
+                <a:schemeClr val="bg1"/>
+              </a:solidFill>
+              <a:latin typeface="Siemens Slab" pitchFamily="2" charset="0"/>
+              <a:ea typeface="Calibri" panose="020F0502020204030204" pitchFamily="34" charset="0"/>
+              <a:cs typeface="Calibri" panose="020F0502020204030204" pitchFamily="34" charset="0"/>
+            </a:endParaRPr>
           </a:p>
           <a:p>
             <a:pPr>
@@ -9921,6 +10893,14 @@
               </a:rPr>
               <a:t>git bisect start</a:t>
             </a:r>
+            <a:endParaRPr lang="en-US" altLang="zh-CN" sz="800" b="1" dirty="0">
+              <a:solidFill>
+                <a:srgbClr val="FFFF00"/>
+              </a:solidFill>
+              <a:latin typeface="Siemens Slab" pitchFamily="2" charset="0"/>
+              <a:ea typeface="Calibri" panose="020F0502020204030204" pitchFamily="34" charset="0"/>
+              <a:cs typeface="Calibri" panose="020F0502020204030204" pitchFamily="34" charset="0"/>
+            </a:endParaRPr>
           </a:p>
           <a:p>
             <a:pPr>
@@ -9939,6 +10919,14 @@
               </a:rPr>
               <a:t>Start binary search for bad commit.</a:t>
             </a:r>
+            <a:endParaRPr lang="en-US" altLang="zh-CN" sz="800" dirty="0">
+              <a:solidFill>
+                <a:schemeClr val="bg1"/>
+              </a:solidFill>
+              <a:latin typeface="Siemens Slab" pitchFamily="2" charset="0"/>
+              <a:ea typeface="Calibri" panose="020F0502020204030204" pitchFamily="34" charset="0"/>
+              <a:cs typeface="Calibri" panose="020F0502020204030204" pitchFamily="34" charset="0"/>
+            </a:endParaRPr>
           </a:p>
           <a:p>
             <a:pPr>
@@ -9972,6 +10960,14 @@
               </a:rPr>
               <a:t>git bisect bad</a:t>
             </a:r>
+            <a:endParaRPr lang="en-US" altLang="zh-CN" sz="800" b="1" dirty="0">
+              <a:solidFill>
+                <a:srgbClr val="FFFF00"/>
+              </a:solidFill>
+              <a:latin typeface="Siemens Slab" pitchFamily="2" charset="0"/>
+              <a:ea typeface="Calibri" panose="020F0502020204030204" pitchFamily="34" charset="0"/>
+              <a:cs typeface="Calibri" panose="020F0502020204030204" pitchFamily="34" charset="0"/>
+            </a:endParaRPr>
           </a:p>
           <a:p>
             <a:pPr>
@@ -9990,6 +10986,14 @@
               </a:rPr>
               <a:t>Mark current commit as bad.</a:t>
             </a:r>
+            <a:endParaRPr lang="en-US" altLang="zh-CN" sz="800" dirty="0">
+              <a:solidFill>
+                <a:schemeClr val="bg1"/>
+              </a:solidFill>
+              <a:latin typeface="Siemens Slab" pitchFamily="2" charset="0"/>
+              <a:ea typeface="Calibri" panose="020F0502020204030204" pitchFamily="34" charset="0"/>
+              <a:cs typeface="Calibri" panose="020F0502020204030204" pitchFamily="34" charset="0"/>
+            </a:endParaRPr>
           </a:p>
           <a:p>
             <a:pPr>
@@ -10023,6 +11027,14 @@
               </a:rPr>
               <a:t>git bisect good (&lt;commit&gt;)</a:t>
             </a:r>
+            <a:endParaRPr lang="en-US" altLang="zh-CN" sz="800" b="1" dirty="0">
+              <a:solidFill>
+                <a:srgbClr val="FFFF00"/>
+              </a:solidFill>
+              <a:latin typeface="Siemens Slab" pitchFamily="2" charset="0"/>
+              <a:ea typeface="Calibri" panose="020F0502020204030204" pitchFamily="34" charset="0"/>
+              <a:cs typeface="Calibri" panose="020F0502020204030204" pitchFamily="34" charset="0"/>
+            </a:endParaRPr>
           </a:p>
           <a:p>
             <a:pPr>
@@ -10041,6 +11053,14 @@
               </a:rPr>
               <a:t>Mark commit as good.</a:t>
             </a:r>
+            <a:endParaRPr lang="en-US" altLang="zh-CN" sz="800" dirty="0">
+              <a:solidFill>
+                <a:schemeClr val="bg1"/>
+              </a:solidFill>
+              <a:latin typeface="Siemens Slab" pitchFamily="2" charset="0"/>
+              <a:ea typeface="Calibri" panose="020F0502020204030204" pitchFamily="34" charset="0"/>
+              <a:cs typeface="Calibri" panose="020F0502020204030204" pitchFamily="34" charset="0"/>
+            </a:endParaRPr>
           </a:p>
           <a:p>
             <a:pPr>
@@ -10074,6 +11094,14 @@
               </a:rPr>
               <a:t>git bisect reset</a:t>
             </a:r>
+            <a:endParaRPr lang="en-US" altLang="zh-CN" sz="800" b="1" dirty="0">
+              <a:solidFill>
+                <a:srgbClr val="FFFF00"/>
+              </a:solidFill>
+              <a:latin typeface="Siemens Slab" pitchFamily="2" charset="0"/>
+              <a:ea typeface="Calibri" panose="020F0502020204030204" pitchFamily="34" charset="0"/>
+              <a:cs typeface="Calibri" panose="020F0502020204030204" pitchFamily="34" charset="0"/>
+            </a:endParaRPr>
           </a:p>
           <a:p>
             <a:pPr>
@@ -10092,6 +11120,14 @@
               </a:rPr>
               <a:t>End bisect session.</a:t>
             </a:r>
+            <a:endParaRPr lang="en-US" altLang="zh-CN" sz="800" dirty="0">
+              <a:solidFill>
+                <a:schemeClr val="bg1"/>
+              </a:solidFill>
+              <a:latin typeface="Siemens Slab" pitchFamily="2" charset="0"/>
+              <a:ea typeface="Calibri" panose="020F0502020204030204" pitchFamily="34" charset="0"/>
+              <a:cs typeface="Calibri" panose="020F0502020204030204" pitchFamily="34" charset="0"/>
+            </a:endParaRPr>
           </a:p>
           <a:p>
             <a:pPr>
@@ -10125,6 +11161,14 @@
               </a:rPr>
               <a:t>git describe (--tags)</a:t>
             </a:r>
+            <a:endParaRPr lang="en-US" altLang="zh-CN" sz="800" b="1" dirty="0">
+              <a:solidFill>
+                <a:srgbClr val="FFFF00"/>
+              </a:solidFill>
+              <a:latin typeface="Siemens Slab" pitchFamily="2" charset="0"/>
+              <a:ea typeface="Calibri" panose="020F0502020204030204" pitchFamily="34" charset="0"/>
+              <a:cs typeface="Calibri" panose="020F0502020204030204" pitchFamily="34" charset="0"/>
+            </a:endParaRPr>
           </a:p>
           <a:p>
             <a:pPr>
@@ -10143,6 +11187,14 @@
               </a:rPr>
               <a:t>Show nearest tag for current commit.</a:t>
             </a:r>
+            <a:endParaRPr lang="en-US" altLang="zh-CN" sz="800" dirty="0">
+              <a:solidFill>
+                <a:schemeClr val="bg1"/>
+              </a:solidFill>
+              <a:latin typeface="Siemens Slab" pitchFamily="2" charset="0"/>
+              <a:ea typeface="Calibri" panose="020F0502020204030204" pitchFamily="34" charset="0"/>
+              <a:cs typeface="Calibri" panose="020F0502020204030204" pitchFamily="34" charset="0"/>
+            </a:endParaRPr>
           </a:p>
           <a:p>
             <a:pPr>
@@ -10161,18 +11213,20 @@
               </a:rPr>
               <a:t>--tags : Use annotated and lightweight tags.</a:t>
             </a:r>
+            <a:endParaRPr lang="en-US" altLang="zh-CN" sz="800" dirty="0">
+              <a:solidFill>
+                <a:schemeClr val="bg1"/>
+              </a:solidFill>
+              <a:latin typeface="Siemens Slab" pitchFamily="2" charset="0"/>
+              <a:ea typeface="Calibri" panose="020F0502020204030204" pitchFamily="34" charset="0"/>
+              <a:cs typeface="Calibri" panose="020F0502020204030204" pitchFamily="34" charset="0"/>
+            </a:endParaRPr>
           </a:p>
         </p:txBody>
       </p:sp>
       <p:sp>
         <p:nvSpPr>
-          <p:cNvPr id="19" name="文本框 18">
-            <a:extLst>
-              <a:ext uri="{FF2B5EF4-FFF2-40B4-BE49-F238E27FC236}">
-                <a16:creationId xmlns:a16="http://schemas.microsoft.com/office/drawing/2014/main" id="{9307D3EE-2554-C745-921F-7821C74B9063}"/>
-              </a:ext>
-            </a:extLst>
-          </p:cNvPr>
+          <p:cNvPr id="19" name="文本框 18"/>
           <p:cNvSpPr txBox="1"/>
           <p:nvPr/>
         </p:nvSpPr>
@@ -10213,13 +11267,6 @@
               </a:rPr>
               <a:t>Danger Zone</a:t>
             </a:r>
-          </a:p>
-          <a:p>
-            <a:pPr>
-              <a:lnSpc>
-                <a:spcPts val="700"/>
-              </a:lnSpc>
-            </a:pPr>
             <a:endParaRPr lang="en-US" altLang="zh-CN" sz="800" b="1" dirty="0">
               <a:solidFill>
                 <a:srgbClr val="FF0000"/>
@@ -10235,6 +11282,21 @@
                 <a:spcPts val="700"/>
               </a:lnSpc>
             </a:pPr>
+            <a:endParaRPr lang="en-US" altLang="zh-CN" sz="800" b="1" dirty="0">
+              <a:solidFill>
+                <a:srgbClr val="FF0000"/>
+              </a:solidFill>
+              <a:latin typeface="Siemens Slab" pitchFamily="2" charset="0"/>
+              <a:ea typeface="Calibri" panose="020F0502020204030204" pitchFamily="34" charset="0"/>
+              <a:cs typeface="Calibri" panose="020F0502020204030204" pitchFamily="34" charset="0"/>
+            </a:endParaRPr>
+          </a:p>
+          <a:p>
+            <a:pPr>
+              <a:lnSpc>
+                <a:spcPts val="700"/>
+              </a:lnSpc>
+            </a:pPr>
             <a:r>
               <a:rPr lang="en-US" altLang="zh-CN" sz="800" b="1" dirty="0">
                 <a:solidFill>
@@ -10246,6 +11308,14 @@
               </a:rPr>
               <a:t>git reset --hard (&lt;commit&gt;)</a:t>
             </a:r>
+            <a:endParaRPr lang="en-US" altLang="zh-CN" sz="800" b="1" dirty="0">
+              <a:solidFill>
+                <a:srgbClr val="FF0000"/>
+              </a:solidFill>
+              <a:latin typeface="Siemens Slab" pitchFamily="2" charset="0"/>
+              <a:ea typeface="Calibri" panose="020F0502020204030204" pitchFamily="34" charset="0"/>
+              <a:cs typeface="Calibri" panose="020F0502020204030204" pitchFamily="34" charset="0"/>
+            </a:endParaRPr>
           </a:p>
           <a:p>
             <a:pPr>
@@ -10286,6 +11356,14 @@
               </a:rPr>
               <a:t>).</a:t>
             </a:r>
+            <a:endParaRPr lang="en-US" altLang="zh-CN" sz="800" dirty="0">
+              <a:solidFill>
+                <a:schemeClr val="bg1"/>
+              </a:solidFill>
+              <a:latin typeface="Siemens Slab" pitchFamily="2" charset="0"/>
+              <a:ea typeface="Calibri" panose="020F0502020204030204" pitchFamily="34" charset="0"/>
+              <a:cs typeface="Calibri" panose="020F0502020204030204" pitchFamily="34" charset="0"/>
+            </a:endParaRPr>
           </a:p>
           <a:p>
             <a:pPr>
@@ -10319,6 +11397,14 @@
               </a:rPr>
               <a:t>git clean -f (-d) (-x)</a:t>
             </a:r>
+            <a:endParaRPr lang="en-US" altLang="zh-CN" sz="800" b="1" dirty="0">
+              <a:solidFill>
+                <a:srgbClr val="FF0000"/>
+              </a:solidFill>
+              <a:latin typeface="Siemens Slab" pitchFamily="2" charset="0"/>
+              <a:ea typeface="Calibri" panose="020F0502020204030204" pitchFamily="34" charset="0"/>
+              <a:cs typeface="Calibri" panose="020F0502020204030204" pitchFamily="34" charset="0"/>
+            </a:endParaRPr>
           </a:p>
           <a:p>
             <a:pPr>
@@ -10337,6 +11423,14 @@
               </a:rPr>
               <a:t>Delete untracked files.</a:t>
             </a:r>
+            <a:endParaRPr lang="en-US" altLang="zh-CN" sz="800" dirty="0">
+              <a:solidFill>
+                <a:schemeClr val="bg1"/>
+              </a:solidFill>
+              <a:latin typeface="Siemens Slab" pitchFamily="2" charset="0"/>
+              <a:ea typeface="Calibri" panose="020F0502020204030204" pitchFamily="34" charset="0"/>
+              <a:cs typeface="Calibri" panose="020F0502020204030204" pitchFamily="34" charset="0"/>
+            </a:endParaRPr>
           </a:p>
           <a:p>
             <a:pPr>
@@ -10355,6 +11449,14 @@
               </a:rPr>
               <a:t>-d : Include directories</a:t>
             </a:r>
+            <a:endParaRPr lang="en-US" altLang="zh-CN" sz="800" dirty="0">
+              <a:solidFill>
+                <a:schemeClr val="bg1"/>
+              </a:solidFill>
+              <a:latin typeface="Siemens Slab" pitchFamily="2" charset="0"/>
+              <a:ea typeface="Calibri" panose="020F0502020204030204" pitchFamily="34" charset="0"/>
+              <a:cs typeface="Calibri" panose="020F0502020204030204" pitchFamily="34" charset="0"/>
+            </a:endParaRPr>
           </a:p>
           <a:p>
             <a:pPr>
@@ -10373,6 +11475,14 @@
               </a:rPr>
               <a:t>-x : Also delete ignored files</a:t>
             </a:r>
+            <a:endParaRPr lang="en-US" altLang="zh-CN" sz="800" dirty="0">
+              <a:solidFill>
+                <a:schemeClr val="bg1"/>
+              </a:solidFill>
+              <a:latin typeface="Siemens Slab" pitchFamily="2" charset="0"/>
+              <a:ea typeface="Calibri" panose="020F0502020204030204" pitchFamily="34" charset="0"/>
+              <a:cs typeface="Calibri" panose="020F0502020204030204" pitchFamily="34" charset="0"/>
+            </a:endParaRPr>
           </a:p>
           <a:p>
             <a:pPr>
@@ -10406,6 +11516,14 @@
               </a:rPr>
               <a:t>git push --force (&lt;remote&gt; &lt;branch&gt;)</a:t>
             </a:r>
+            <a:endParaRPr lang="en-US" altLang="zh-CN" sz="800" b="1" dirty="0">
+              <a:solidFill>
+                <a:srgbClr val="FF0000"/>
+              </a:solidFill>
+              <a:latin typeface="Siemens Slab" pitchFamily="2" charset="0"/>
+              <a:ea typeface="Calibri" panose="020F0502020204030204" pitchFamily="34" charset="0"/>
+              <a:cs typeface="Calibri" panose="020F0502020204030204" pitchFamily="34" charset="0"/>
+            </a:endParaRPr>
           </a:p>
           <a:p>
             <a:pPr>
@@ -10424,6 +11542,14 @@
               </a:rPr>
               <a:t>Overwrite remote history (including others’ commits).</a:t>
             </a:r>
+            <a:endParaRPr lang="en-US" altLang="zh-CN" sz="800" dirty="0">
+              <a:solidFill>
+                <a:schemeClr val="bg1"/>
+              </a:solidFill>
+              <a:latin typeface="Siemens Slab" pitchFamily="2" charset="0"/>
+              <a:ea typeface="Calibri" panose="020F0502020204030204" pitchFamily="34" charset="0"/>
+              <a:cs typeface="Calibri" panose="020F0502020204030204" pitchFamily="34" charset="0"/>
+            </a:endParaRPr>
           </a:p>
           <a:p>
             <a:pPr>
@@ -10457,6 +11583,14 @@
               </a:rPr>
               <a:t>git commit --amend</a:t>
             </a:r>
+            <a:endParaRPr lang="en-US" altLang="zh-CN" sz="800" b="1" dirty="0">
+              <a:solidFill>
+                <a:srgbClr val="FF0000"/>
+              </a:solidFill>
+              <a:latin typeface="Siemens Slab" pitchFamily="2" charset="0"/>
+              <a:ea typeface="Calibri" panose="020F0502020204030204" pitchFamily="34" charset="0"/>
+              <a:cs typeface="Calibri" panose="020F0502020204030204" pitchFamily="34" charset="0"/>
+            </a:endParaRPr>
           </a:p>
           <a:p>
             <a:pPr>
@@ -10475,6 +11609,14 @@
               </a:rPr>
               <a:t>Rewrite last commit (danger if already pushed).</a:t>
             </a:r>
+            <a:endParaRPr lang="en-US" altLang="zh-CN" sz="800" dirty="0">
+              <a:solidFill>
+                <a:schemeClr val="bg1"/>
+              </a:solidFill>
+              <a:latin typeface="Siemens Slab" pitchFamily="2" charset="0"/>
+              <a:ea typeface="Calibri" panose="020F0502020204030204" pitchFamily="34" charset="0"/>
+              <a:cs typeface="Calibri" panose="020F0502020204030204" pitchFamily="34" charset="0"/>
+            </a:endParaRPr>
           </a:p>
           <a:p>
             <a:pPr>
@@ -10508,6 +11650,14 @@
               </a:rPr>
               <a:t>git checkout --detach</a:t>
             </a:r>
+            <a:endParaRPr lang="en-US" altLang="zh-CN" sz="800" b="1" dirty="0">
+              <a:solidFill>
+                <a:srgbClr val="FF0000"/>
+              </a:solidFill>
+              <a:latin typeface="Siemens Slab" pitchFamily="2" charset="0"/>
+              <a:ea typeface="Calibri" panose="020F0502020204030204" pitchFamily="34" charset="0"/>
+              <a:cs typeface="Calibri" panose="020F0502020204030204" pitchFamily="34" charset="0"/>
+            </a:endParaRPr>
           </a:p>
           <a:p>
             <a:pPr>
@@ -10526,6 +11676,14 @@
               </a:rPr>
               <a:t>Detached HEAD (commits can be “lost” if you don’t create a branch).</a:t>
             </a:r>
+            <a:endParaRPr lang="en-US" altLang="zh-CN" sz="800" dirty="0">
+              <a:solidFill>
+                <a:schemeClr val="bg1"/>
+              </a:solidFill>
+              <a:latin typeface="Siemens Slab" pitchFamily="2" charset="0"/>
+              <a:ea typeface="Calibri" panose="020F0502020204030204" pitchFamily="34" charset="0"/>
+              <a:cs typeface="Calibri" panose="020F0502020204030204" pitchFamily="34" charset="0"/>
+            </a:endParaRPr>
           </a:p>
           <a:p>
             <a:pPr>
@@ -10559,6 +11717,14 @@
               </a:rPr>
               <a:t>git branch -D &lt;branch&gt;</a:t>
             </a:r>
+            <a:endParaRPr lang="en-US" altLang="zh-CN" sz="800" b="1" dirty="0">
+              <a:solidFill>
+                <a:srgbClr val="FF0000"/>
+              </a:solidFill>
+              <a:latin typeface="Siemens Slab" pitchFamily="2" charset="0"/>
+              <a:ea typeface="Calibri" panose="020F0502020204030204" pitchFamily="34" charset="0"/>
+              <a:cs typeface="Calibri" panose="020F0502020204030204" pitchFamily="34" charset="0"/>
+            </a:endParaRPr>
           </a:p>
           <a:p>
             <a:pPr>
@@ -10577,30 +11743,77 @@
               </a:rPr>
               <a:t>Force delete branch (may lose unmerged work).</a:t>
             </a:r>
-          </a:p>
-          <a:p>
-            <a:pPr>
-              <a:lnSpc>
-                <a:spcPts val="700"/>
-              </a:lnSpc>
-            </a:pPr>
-            <a:endParaRPr lang="en-US" altLang="zh-CN" sz="800" dirty="0">
-              <a:solidFill>
-                <a:schemeClr val="bg1"/>
-              </a:solidFill>
-              <a:latin typeface="Siemens Slab" pitchFamily="2" charset="0"/>
-              <a:ea typeface="Calibri" panose="020F0502020204030204" pitchFamily="34" charset="0"/>
-              <a:cs typeface="Calibri" panose="020F0502020204030204" pitchFamily="34" charset="0"/>
-            </a:endParaRPr>
+            <a:endParaRPr lang="en-US" altLang="zh-CN" sz="800" dirty="0">
+              <a:solidFill>
+                <a:schemeClr val="bg1"/>
+              </a:solidFill>
+              <a:latin typeface="Siemens Slab" pitchFamily="2" charset="0"/>
+              <a:ea typeface="Calibri" panose="020F0502020204030204" pitchFamily="34" charset="0"/>
+              <a:cs typeface="Calibri" panose="020F0502020204030204" pitchFamily="34" charset="0"/>
+            </a:endParaRPr>
+          </a:p>
+          <a:p>
+            <a:pPr>
+              <a:lnSpc>
+                <a:spcPts val="700"/>
+              </a:lnSpc>
+            </a:pPr>
+            <a:endParaRPr lang="en-US" altLang="zh-CN" sz="800" dirty="0">
+              <a:solidFill>
+                <a:schemeClr val="bg1"/>
+              </a:solidFill>
+              <a:latin typeface="Siemens Slab" pitchFamily="2" charset="0"/>
+              <a:ea typeface="Calibri" panose="020F0502020204030204" pitchFamily="34" charset="0"/>
+              <a:cs typeface="Calibri" panose="020F0502020204030204" pitchFamily="34" charset="0"/>
+            </a:endParaRPr>
+          </a:p>
+        </p:txBody>
+      </p:sp>
+      <p:sp>
+        <p:nvSpPr>
+          <p:cNvPr id="2" name="矩形 1"/>
+          <p:cNvSpPr/>
+          <p:nvPr/>
+        </p:nvSpPr>
+        <p:spPr>
+          <a:xfrm>
+            <a:off x="-128905" y="-136525"/>
+            <a:ext cx="12378690" cy="7115175"/>
+          </a:xfrm>
+          <a:prstGeom prst="rect">
+            <a:avLst/>
+          </a:prstGeom>
+          <a:solidFill>
+            <a:schemeClr val="tx1">
+              <a:alpha val="60000"/>
+            </a:schemeClr>
+          </a:solidFill>
+        </p:spPr>
+        <p:style>
+          <a:lnRef idx="2">
+            <a:schemeClr val="accent1">
+              <a:lumMod val="75000"/>
+            </a:schemeClr>
+          </a:lnRef>
+          <a:fillRef idx="1">
+            <a:schemeClr val="accent1"/>
+          </a:fillRef>
+          <a:effectRef idx="0">
+            <a:srgbClr val="FFFFFF"/>
+          </a:effectRef>
+          <a:fontRef idx="minor">
+            <a:schemeClr val="lt1"/>
+          </a:fontRef>
+        </p:style>
+        <p:txBody>
+          <a:bodyPr rtlCol="0" anchor="ctr"/>
+          <a:p>
+            <a:pPr algn="ctr"/>
+            <a:endParaRPr lang="zh-CN" altLang="en-US"/>
           </a:p>
         </p:txBody>
       </p:sp>
     </p:spTree>
-    <p:extLst>
-      <p:ext uri="{BB962C8B-B14F-4D97-AF65-F5344CB8AC3E}">
-        <p14:creationId xmlns:p14="http://schemas.microsoft.com/office/powerpoint/2010/main" val="2911340257"/>
-      </p:ext>
-    </p:extLst>
   </p:cSld>
   <p:clrMapOvr>
     <a:masterClrMapping/>
@@ -10651,7 +11864,7 @@
     </a:clrScheme>
     <a:fontScheme name="Office">
       <a:majorFont>
-        <a:latin typeface="等线 Light" panose="02110004020202020204"/>
+        <a:latin typeface="等线 Light"/>
         <a:ea typeface=""/>
         <a:cs typeface=""/>
         <a:font script="Jpan" typeface="游ゴシック Light"/>
@@ -10684,26 +11897,9 @@
         <a:font script="Viet" typeface="Times New Roman"/>
         <a:font script="Uigh" typeface="Microsoft Uighur"/>
         <a:font script="Geor" typeface="Sylfaen"/>
-        <a:font script="Armn" typeface="Arial"/>
-        <a:font script="Bugi" typeface="Leelawadee UI"/>
-        <a:font script="Bopo" typeface="Microsoft JhengHei"/>
-        <a:font script="Java" typeface="Javanese Text"/>
-        <a:font script="Lisu" typeface="Segoe UI"/>
-        <a:font script="Mymr" typeface="Myanmar Text"/>
-        <a:font script="Nkoo" typeface="Ebrima"/>
-        <a:font script="Olck" typeface="Nirmala UI"/>
-        <a:font script="Osma" typeface="Ebrima"/>
-        <a:font script="Phag" typeface="Phagspa"/>
-        <a:font script="Syrn" typeface="Estrangelo Edessa"/>
-        <a:font script="Syrj" typeface="Estrangelo Edessa"/>
-        <a:font script="Syre" typeface="Estrangelo Edessa"/>
-        <a:font script="Sora" typeface="Nirmala UI"/>
-        <a:font script="Tale" typeface="Microsoft Tai Le"/>
-        <a:font script="Talu" typeface="Microsoft New Tai Lue"/>
-        <a:font script="Tfng" typeface="Ebrima"/>
       </a:majorFont>
       <a:minorFont>
-        <a:latin typeface="等线" panose="02110004020202020204"/>
+        <a:latin typeface="等线"/>
         <a:ea typeface=""/>
         <a:cs typeface=""/>
         <a:font script="Jpan" typeface="游ゴシック"/>
@@ -10736,23 +11932,6 @@
         <a:font script="Viet" typeface="Arial"/>
         <a:font script="Uigh" typeface="Microsoft Uighur"/>
         <a:font script="Geor" typeface="Sylfaen"/>
-        <a:font script="Armn" typeface="Arial"/>
-        <a:font script="Bugi" typeface="Leelawadee UI"/>
-        <a:font script="Bopo" typeface="Microsoft JhengHei"/>
-        <a:font script="Java" typeface="Javanese Text"/>
-        <a:font script="Lisu" typeface="Segoe UI"/>
-        <a:font script="Mymr" typeface="Myanmar Text"/>
-        <a:font script="Nkoo" typeface="Ebrima"/>
-        <a:font script="Olck" typeface="Nirmala UI"/>
-        <a:font script="Osma" typeface="Ebrima"/>
-        <a:font script="Phag" typeface="Phagspa"/>
-        <a:font script="Syrn" typeface="Estrangelo Edessa"/>
-        <a:font script="Syrj" typeface="Estrangelo Edessa"/>
-        <a:font script="Syre" typeface="Estrangelo Edessa"/>
-        <a:font script="Sora" typeface="Nirmala UI"/>
-        <a:font script="Tale" typeface="Microsoft Tai Le"/>
-        <a:font script="Talu" typeface="Microsoft New Tai Lue"/>
-        <a:font script="Tfng" typeface="Ebrima"/>
       </a:minorFont>
     </a:fontScheme>
     <a:fmtScheme name="Office">
@@ -10914,10 +12093,9 @@
       </a:style>
     </a:lnDef>
   </a:objectDefaults>
-  <a:extraClrSchemeLst/>
   <a:extLst>
     <a:ext uri="{05A4C25C-085E-4340-85A3-A5531E510DB2}">
-      <thm15:themeFamily xmlns:thm15="http://schemas.microsoft.com/office/thememl/2012/main" name="Office Theme" id="{2E142A2C-CD16-42D6-873A-C26D2A0506FA}" vid="{1BDDFF52-6CD6-40A5-AB3C-68EB2F1E4D0A}"/>
+      <thm15:themeFamily xmlns:thm15="http://schemas.microsoft.com/office/thememl/2012/main" name="Office Theme" id="{62F939B6-93AF-4DB8-9C6B-D6C7DFDC589F}" vid="{4A3C46E8-61CC-4603-A589-7422A47A8E4A}"/>
     </a:ext>
   </a:extLst>
 </a:theme>
